--- a/Day 1/Guerrilla AI - Day 1 - Slides.pptx
+++ b/Day 1/Guerrilla AI - Day 1 - Slides.pptx
@@ -1,28 +1,31 @@
 
 <file path=ppt/presentation.xml><?xml version="1.0" encoding="utf-8"?>
-<p:presentation xmlns:a="http://schemas.openxmlformats.org/drawingml/2006/main" xmlns:r="http://schemas.openxmlformats.org/officeDocument/2006/relationships" xmlns:p="http://schemas.openxmlformats.org/presentationml/2006/main" saveSubsetFonts="1" autoCompressPictures="0">
+<p:presentation xmlns:a="http://schemas.openxmlformats.org/drawingml/2006/main" xmlns:r="http://schemas.openxmlformats.org/officeDocument/2006/relationships" xmlns:p="http://schemas.openxmlformats.org/presentationml/2006/main">
   <p:sldMasterIdLst>
     <p:sldMasterId id="2147483648" r:id="rId1"/>
   </p:sldMasterIdLst>
+  <p:notesMasterIdLst>
+    <p:notesMasterId r:id="rId12"/>
+  </p:notesMasterIdLst>
   <p:sldIdLst>
-    <p:sldId id="256" r:id="rId7"/>
-    <p:sldId id="257" r:id="rId9"/>
-    <p:sldId id="258" r:id="rId10"/>
-    <p:sldId id="259" r:id="rId11"/>
-    <p:sldId id="260" r:id="rId12"/>
-    <p:sldId id="261" r:id="rId13"/>
-    <p:sldId id="262" r:id="rId14"/>
-    <p:sldId id="263" r:id="rId15"/>
-    <p:sldId id="264" r:id="rId16"/>
-    <p:sldId id="265" r:id="rId17"/>
+    <p:sldId id="256" r:id="rId2"/>
+    <p:sldId id="257" r:id="rId3"/>
+    <p:sldId id="258" r:id="rId4"/>
+    <p:sldId id="259" r:id="rId5"/>
+    <p:sldId id="260" r:id="rId6"/>
+    <p:sldId id="261" r:id="rId7"/>
+    <p:sldId id="262" r:id="rId8"/>
+    <p:sldId id="263" r:id="rId9"/>
+    <p:sldId id="264" r:id="rId10"/>
+    <p:sldId id="265" r:id="rId11"/>
   </p:sldIdLst>
-  <p:sldSz cx="12191695" cy="6858000" type="screen4x3"/>
+  <p:sldSz cx="12192000" cy="6858000"/>
   <p:notesSz cx="6858000" cy="9144000"/>
   <p:defaultTextStyle>
     <a:defPPr>
       <a:defRPr lang="en-US"/>
     </a:defPPr>
-    <a:lvl1pPr marL="0" algn="l" defTabSz="457200" rtl="0" eaLnBrk="1" latinLnBrk="0" hangingPunct="1">
+    <a:lvl1pPr marL="0" algn="l" defTabSz="914400" rtl="0" eaLnBrk="1" latinLnBrk="0" hangingPunct="1">
       <a:defRPr sz="1800" kern="1200">
         <a:solidFill>
           <a:schemeClr val="tx1"/>
@@ -32,7 +35,7 @@
         <a:cs typeface="+mn-cs"/>
       </a:defRPr>
     </a:lvl1pPr>
-    <a:lvl2pPr marL="457200" algn="l" defTabSz="457200" rtl="0" eaLnBrk="1" latinLnBrk="0" hangingPunct="1">
+    <a:lvl2pPr marL="457200" algn="l" defTabSz="914400" rtl="0" eaLnBrk="1" latinLnBrk="0" hangingPunct="1">
       <a:defRPr sz="1800" kern="1200">
         <a:solidFill>
           <a:schemeClr val="tx1"/>
@@ -42,7 +45,7 @@
         <a:cs typeface="+mn-cs"/>
       </a:defRPr>
     </a:lvl2pPr>
-    <a:lvl3pPr marL="914400" algn="l" defTabSz="457200" rtl="0" eaLnBrk="1" latinLnBrk="0" hangingPunct="1">
+    <a:lvl3pPr marL="914400" algn="l" defTabSz="914400" rtl="0" eaLnBrk="1" latinLnBrk="0" hangingPunct="1">
       <a:defRPr sz="1800" kern="1200">
         <a:solidFill>
           <a:schemeClr val="tx1"/>
@@ -52,7 +55,7 @@
         <a:cs typeface="+mn-cs"/>
       </a:defRPr>
     </a:lvl3pPr>
-    <a:lvl4pPr marL="1371600" algn="l" defTabSz="457200" rtl="0" eaLnBrk="1" latinLnBrk="0" hangingPunct="1">
+    <a:lvl4pPr marL="1371600" algn="l" defTabSz="914400" rtl="0" eaLnBrk="1" latinLnBrk="0" hangingPunct="1">
       <a:defRPr sz="1800" kern="1200">
         <a:solidFill>
           <a:schemeClr val="tx1"/>
@@ -62,7 +65,7 @@
         <a:cs typeface="+mn-cs"/>
       </a:defRPr>
     </a:lvl4pPr>
-    <a:lvl5pPr marL="1828800" algn="l" defTabSz="457200" rtl="0" eaLnBrk="1" latinLnBrk="0" hangingPunct="1">
+    <a:lvl5pPr marL="1828800" algn="l" defTabSz="914400" rtl="0" eaLnBrk="1" latinLnBrk="0" hangingPunct="1">
       <a:defRPr sz="1800" kern="1200">
         <a:solidFill>
           <a:schemeClr val="tx1"/>
@@ -72,7 +75,7 @@
         <a:cs typeface="+mn-cs"/>
       </a:defRPr>
     </a:lvl5pPr>
-    <a:lvl6pPr marL="2286000" algn="l" defTabSz="457200" rtl="0" eaLnBrk="1" latinLnBrk="0" hangingPunct="1">
+    <a:lvl6pPr marL="2286000" algn="l" defTabSz="914400" rtl="0" eaLnBrk="1" latinLnBrk="0" hangingPunct="1">
       <a:defRPr sz="1800" kern="1200">
         <a:solidFill>
           <a:schemeClr val="tx1"/>
@@ -82,7 +85,7 @@
         <a:cs typeface="+mn-cs"/>
       </a:defRPr>
     </a:lvl6pPr>
-    <a:lvl7pPr marL="2743200" algn="l" defTabSz="457200" rtl="0" eaLnBrk="1" latinLnBrk="0" hangingPunct="1">
+    <a:lvl7pPr marL="2743200" algn="l" defTabSz="914400" rtl="0" eaLnBrk="1" latinLnBrk="0" hangingPunct="1">
       <a:defRPr sz="1800" kern="1200">
         <a:solidFill>
           <a:schemeClr val="tx1"/>
@@ -92,7 +95,7 @@
         <a:cs typeface="+mn-cs"/>
       </a:defRPr>
     </a:lvl7pPr>
-    <a:lvl8pPr marL="3200400" algn="l" defTabSz="457200" rtl="0" eaLnBrk="1" latinLnBrk="0" hangingPunct="1">
+    <a:lvl8pPr marL="3200400" algn="l" defTabSz="914400" rtl="0" eaLnBrk="1" latinLnBrk="0" hangingPunct="1">
       <a:defRPr sz="1800" kern="1200">
         <a:solidFill>
           <a:schemeClr val="tx1"/>
@@ -102,7 +105,7 @@
         <a:cs typeface="+mn-cs"/>
       </a:defRPr>
     </a:lvl8pPr>
-    <a:lvl9pPr marL="3657600" algn="l" defTabSz="457200" rtl="0" eaLnBrk="1" latinLnBrk="0" hangingPunct="1">
+    <a:lvl9pPr marL="3657600" algn="l" defTabSz="914400" rtl="0" eaLnBrk="1" latinLnBrk="0" hangingPunct="1">
       <a:defRPr sz="1800" kern="1200">
         <a:solidFill>
           <a:schemeClr val="tx1"/>
@@ -113,11 +116,16 @@
       </a:defRPr>
     </a:lvl9pPr>
   </p:defaultTextStyle>
+  <p:extLst>
+    <p:ext uri="{EFAFB233-063F-42B5-8137-9DF3F51BA10A}">
+      <p15:sldGuideLst xmlns:p15="http://schemas.microsoft.com/office/powerpoint/2012/main"/>
+    </p:ext>
+  </p:extLst>
 </p:presentation>
 </file>
 
 <file path=ppt/notesMasters/notesMaster1.xml><?xml version="1.0" encoding="utf-8"?>
-<p:notesMaster xmlns:a="http://schemas.openxmlformats.org/drawingml/2006/main" xmlns:p="http://schemas.openxmlformats.org/presentationml/2006/main" xmlns:r="http://schemas.openxmlformats.org/officeDocument/2006/relationships">
+<p:notesMaster xmlns:a="http://schemas.openxmlformats.org/drawingml/2006/main" xmlns:r="http://schemas.openxmlformats.org/officeDocument/2006/relationships" xmlns:p="http://schemas.openxmlformats.org/presentationml/2006/main">
   <p:cSld>
     <p:bg>
       <p:bgRef idx="1001">
@@ -140,7 +148,7 @@
       </p:grpSpPr>
       <p:sp>
         <p:nvSpPr>
-          <p:cNvPr id="2" name="Header Placeholder 1"/>
+          <p:cNvPr id="2" name="Header Placeholder"/>
           <p:cNvSpPr>
             <a:spLocks noGrp="1"/>
           </p:cNvSpPr>
@@ -149,64 +157,44 @@
           </p:nvPr>
         </p:nvSpPr>
         <p:spPr>
-          <a:xfrm>
-            <a:off x="0" y="0"/>
-            <a:ext cx="2971800" cy="457200"/>
-          </a:xfrm>
           <a:prstGeom prst="rect">
             <a:avLst/>
           </a:prstGeom>
         </p:spPr>
         <p:txBody>
-          <a:bodyPr vert="horz" lIns="91440" tIns="45720" rIns="91440" bIns="45720" rtlCol="0"/>
-          <a:lstStyle>
-            <a:lvl1pPr algn="l">
-              <a:defRPr sz="1200"/>
-            </a:lvl1pPr>
-          </a:lstStyle>
-          <a:p>
-            <a:endParaRPr lang="en-US"/>
-          </a:p>
-        </p:txBody>
-      </p:sp>
-      <p:sp>
-        <p:nvSpPr>
-          <p:cNvPr id="3" name="Date Placeholder 2"/>
-          <p:cNvSpPr>
-            <a:spLocks noGrp="1"/>
-          </p:cNvSpPr>
-          <p:nvPr>
-            <p:ph type="dt" idx="1"/>
+          <a:bodyPr/>
+          <a:lstStyle/>
+          <a:p>
+            <a:endParaRPr/>
+          </a:p>
+        </p:txBody>
+      </p:sp>
+      <p:sp>
+        <p:nvSpPr>
+          <p:cNvPr id="3" name="Date Placeholder"/>
+          <p:cNvSpPr>
+            <a:spLocks noGrp="1"/>
+          </p:cNvSpPr>
+          <p:nvPr>
+            <p:ph type="dt" sz="quarter" idx="1"/>
           </p:nvPr>
         </p:nvSpPr>
         <p:spPr>
-          <a:xfrm>
-            <a:off x="3884613" y="0"/>
-            <a:ext cx="2971800" cy="457200"/>
-          </a:xfrm>
           <a:prstGeom prst="rect">
             <a:avLst/>
           </a:prstGeom>
         </p:spPr>
         <p:txBody>
-          <a:bodyPr vert="horz" lIns="91440" tIns="45720" rIns="91440" bIns="45720" rtlCol="0"/>
-          <a:lstStyle>
-            <a:lvl1pPr algn="r">
-              <a:defRPr sz="1200"/>
-            </a:lvl1pPr>
-          </a:lstStyle>
-          <a:p>
-            <a:fld id="{0F89C1C7-3DCD-1040-A9CF-14679D8B5DDD}" type="datetimeFigureOut">
-              <a:rPr lang="en-US" smtClean="0"/>
-              <a:t>10/17/16</a:t>
-            </a:fld>
-            <a:endParaRPr lang="en-US"/>
-          </a:p>
-        </p:txBody>
-      </p:sp>
-      <p:sp>
-        <p:nvSpPr>
-          <p:cNvPr id="4" name="Slide Image Placeholder 3"/>
+          <a:bodyPr/>
+          <a:lstStyle/>
+          <a:p>
+            <a:endParaRPr/>
+          </a:p>
+        </p:txBody>
+      </p:sp>
+      <p:sp>
+        <p:nvSpPr>
+          <p:cNvPr id="4" name="Slide Image Placeholder"/>
           <p:cNvSpPr>
             <a:spLocks noGrp="1" noRot="1" noChangeAspect="1"/>
           </p:cNvSpPr>
@@ -215,259 +203,100 @@
           </p:nvPr>
         </p:nvSpPr>
         <p:spPr>
-          <a:xfrm>
-            <a:off x="1143000" y="685800"/>
-            <a:ext cx="4572000" cy="3429000"/>
-          </a:xfrm>
-          <a:prstGeom prst="rect">
-            <a:avLst/>
-          </a:prstGeom>
-          <a:noFill/>
-          <a:ln w="12700">
-            <a:solidFill>
-              <a:prstClr val="black"/>
-            </a:solidFill>
-          </a:ln>
-        </p:spPr>
-        <p:txBody>
-          <a:bodyPr vert="horz" lIns="91440" tIns="45720" rIns="91440" bIns="45720" rtlCol="0" anchor="ctr"/>
-          <a:lstStyle/>
-          <a:p>
-            <a:endParaRPr lang="en-US"/>
-          </a:p>
-        </p:txBody>
-      </p:sp>
-      <p:sp>
-        <p:nvSpPr>
-          <p:cNvPr id="5" name="Notes Placeholder 4"/>
-          <p:cNvSpPr>
-            <a:spLocks noGrp="1"/>
-          </p:cNvSpPr>
-          <p:nvPr>
-            <p:ph type="body" sz="quarter" idx="3"/>
-          </p:nvPr>
-        </p:nvSpPr>
-        <p:spPr>
-          <a:xfrm>
-            <a:off x="685800" y="4343400"/>
-            <a:ext cx="5486400" cy="4114800"/>
-          </a:xfrm>
           <a:prstGeom prst="rect">
             <a:avLst/>
           </a:prstGeom>
         </p:spPr>
         <p:txBody>
-          <a:bodyPr vert="horz" lIns="91440" tIns="45720" rIns="91440" bIns="45720" rtlCol="0"/>
-          <a:lstStyle/>
-          <a:p>
-            <a:pPr lvl="0"/>
-            <a:r>
-              <a:rPr lang="en-US" smtClean="0"/>
-              <a:t>Click to edit Master text styles</a:t>
-            </a:r>
-          </a:p>
-          <a:p>
-            <a:pPr lvl="1"/>
-            <a:r>
-              <a:rPr lang="en-US" smtClean="0"/>
-              <a:t>Second level</a:t>
-            </a:r>
-          </a:p>
-          <a:p>
-            <a:pPr lvl="2"/>
-            <a:r>
-              <a:rPr lang="en-US" smtClean="0"/>
-              <a:t>Third level</a:t>
-            </a:r>
-          </a:p>
-          <a:p>
-            <a:pPr lvl="3"/>
-            <a:r>
-              <a:rPr lang="en-US" smtClean="0"/>
-              <a:t>Fourth level</a:t>
-            </a:r>
-          </a:p>
-          <a:p>
-            <a:pPr lvl="4"/>
-            <a:r>
-              <a:rPr lang="en-US" smtClean="0"/>
-              <a:t>Fifth level</a:t>
-            </a:r>
-            <a:endParaRPr lang="en-US"/>
-          </a:p>
-        </p:txBody>
-      </p:sp>
-      <p:sp>
-        <p:nvSpPr>
-          <p:cNvPr id="6" name="Footer Placeholder 5"/>
-          <p:cNvSpPr>
-            <a:spLocks noGrp="1"/>
-          </p:cNvSpPr>
-          <p:nvPr>
-            <p:ph type="ftr" sz="quarter" idx="4"/>
+          <a:bodyPr/>
+          <a:lstStyle/>
+          <a:p>
+            <a:endParaRPr/>
+          </a:p>
+        </p:txBody>
+      </p:sp>
+      <p:sp>
+        <p:nvSpPr>
+          <p:cNvPr id="5" name="Notes Placeholder"/>
+          <p:cNvSpPr>
+            <a:spLocks noGrp="1"/>
+          </p:cNvSpPr>
+          <p:nvPr>
+            <p:ph type="body" sz="quarter" idx="3"/>
           </p:nvPr>
         </p:nvSpPr>
         <p:spPr>
-          <a:xfrm>
-            <a:off x="0" y="8685213"/>
-            <a:ext cx="2971800" cy="457200"/>
-          </a:xfrm>
           <a:prstGeom prst="rect">
             <a:avLst/>
           </a:prstGeom>
         </p:spPr>
         <p:txBody>
-          <a:bodyPr vert="horz" lIns="91440" tIns="45720" rIns="91440" bIns="45720" rtlCol="0" anchor="b"/>
-          <a:lstStyle>
-            <a:lvl1pPr algn="l">
-              <a:defRPr sz="1200"/>
-            </a:lvl1pPr>
-          </a:lstStyle>
-          <a:p>
-            <a:endParaRPr lang="en-US"/>
-          </a:p>
-        </p:txBody>
-      </p:sp>
-      <p:sp>
-        <p:nvSpPr>
-          <p:cNvPr id="7" name="Slide Number Placeholder 6"/>
-          <p:cNvSpPr>
-            <a:spLocks noGrp="1"/>
-          </p:cNvSpPr>
-          <p:nvPr>
-            <p:ph type="sldNum" sz="quarter" idx="5"/>
+          <a:bodyPr/>
+          <a:lstStyle/>
+          <a:p>
+            <a:endParaRPr/>
+          </a:p>
+        </p:txBody>
+      </p:sp>
+      <p:sp>
+        <p:nvSpPr>
+          <p:cNvPr id="6" name="Footer Placeholder"/>
+          <p:cNvSpPr>
+            <a:spLocks noGrp="1"/>
+          </p:cNvSpPr>
+          <p:nvPr>
+            <p:ph type="ftr" sz="quarter" idx="4"/>
           </p:nvPr>
         </p:nvSpPr>
         <p:spPr>
-          <a:xfrm>
-            <a:off x="3884613" y="8685213"/>
-            <a:ext cx="2971800" cy="457200"/>
-          </a:xfrm>
           <a:prstGeom prst="rect">
             <a:avLst/>
           </a:prstGeom>
         </p:spPr>
         <p:txBody>
-          <a:bodyPr vert="horz" lIns="91440" tIns="45720" rIns="91440" bIns="45720" rtlCol="0" anchor="b"/>
-          <a:lstStyle>
-            <a:lvl1pPr algn="r">
-              <a:defRPr sz="1200"/>
-            </a:lvl1pPr>
-          </a:lstStyle>
-          <a:p>
-            <a:fld id="{BB5E49A5-4136-284D-997B-48E1D791AD67}" type="slidenum">
-              <a:rPr lang="en-US" smtClean="0"/>
-              <a:t>‹#›</a:t>
-            </a:fld>
-            <a:endParaRPr lang="en-US"/>
+          <a:bodyPr/>
+          <a:lstStyle/>
+          <a:p>
+            <a:endParaRPr/>
+          </a:p>
+        </p:txBody>
+      </p:sp>
+      <p:sp>
+        <p:nvSpPr>
+          <p:cNvPr id="7" name="Slide Number Placeholder"/>
+          <p:cNvSpPr>
+            <a:spLocks noGrp="1"/>
+          </p:cNvSpPr>
+          <p:nvPr>
+            <p:ph type="sldNum" sz="quarter" idx="5"/>
+          </p:nvPr>
+        </p:nvSpPr>
+        <p:spPr>
+          <a:prstGeom prst="rect">
+            <a:avLst/>
+          </a:prstGeom>
+        </p:spPr>
+        <p:txBody>
+          <a:bodyPr/>
+          <a:lstStyle/>
+          <a:p>
+            <a:endParaRPr/>
           </a:p>
         </p:txBody>
       </p:sp>
     </p:spTree>
-    <p:extLst>
-      <p:ext uri="{BB962C8B-B14F-4D97-AF65-F5344CB8AC3E}">
-        <p14:creationId xmlns:p14="http://schemas.microsoft.com/office/powerpoint/2010/main" val="2623252185"/>
-      </p:ext>
-    </p:extLst>
   </p:cSld>
   <p:clrMap bg1="lt1" tx1="dk1" bg2="lt2" tx2="dk2" accent1="accent1" accent2="accent2" accent3="accent3" accent4="accent4" accent5="accent5" accent6="accent6" hlink="hlink" folHlink="folHlink"/>
   <p:notesStyle>
-    <a:lvl1pPr marL="0" algn="l" defTabSz="457200" rtl="0" eaLnBrk="1" latinLnBrk="0" hangingPunct="1">
-      <a:defRPr sz="1200" kern="1200">
-        <a:solidFill>
-          <a:schemeClr val="tx1"/>
-        </a:solidFill>
-        <a:latin typeface="+mn-lt"/>
-        <a:ea typeface="+mn-ea"/>
-        <a:cs typeface="+mn-cs"/>
-      </a:defRPr>
+    <a:lvl1pPr marL="0" algn="l" defTabSz="914400" rtl="0" eaLnBrk="1" latinLnBrk="0" hangingPunct="1">
+      <a:defRPr sz="1200" kern="1200"/>
     </a:lvl1pPr>
-    <a:lvl2pPr marL="457200" algn="l" defTabSz="457200" rtl="0" eaLnBrk="1" latinLnBrk="0" hangingPunct="1">
-      <a:defRPr sz="1200" kern="1200">
-        <a:solidFill>
-          <a:schemeClr val="tx1"/>
-        </a:solidFill>
-        <a:latin typeface="+mn-lt"/>
-        <a:ea typeface="+mn-ea"/>
-        <a:cs typeface="+mn-cs"/>
-      </a:defRPr>
-    </a:lvl2pPr>
-    <a:lvl3pPr marL="914400" algn="l" defTabSz="457200" rtl="0" eaLnBrk="1" latinLnBrk="0" hangingPunct="1">
-      <a:defRPr sz="1200" kern="1200">
-        <a:solidFill>
-          <a:schemeClr val="tx1"/>
-        </a:solidFill>
-        <a:latin typeface="+mn-lt"/>
-        <a:ea typeface="+mn-ea"/>
-        <a:cs typeface="+mn-cs"/>
-      </a:defRPr>
-    </a:lvl3pPr>
-    <a:lvl4pPr marL="1371600" algn="l" defTabSz="457200" rtl="0" eaLnBrk="1" latinLnBrk="0" hangingPunct="1">
-      <a:defRPr sz="1200" kern="1200">
-        <a:solidFill>
-          <a:schemeClr val="tx1"/>
-        </a:solidFill>
-        <a:latin typeface="+mn-lt"/>
-        <a:ea typeface="+mn-ea"/>
-        <a:cs typeface="+mn-cs"/>
-      </a:defRPr>
-    </a:lvl4pPr>
-    <a:lvl5pPr marL="1828800" algn="l" defTabSz="457200" rtl="0" eaLnBrk="1" latinLnBrk="0" hangingPunct="1">
-      <a:defRPr sz="1200" kern="1200">
-        <a:solidFill>
-          <a:schemeClr val="tx1"/>
-        </a:solidFill>
-        <a:latin typeface="+mn-lt"/>
-        <a:ea typeface="+mn-ea"/>
-        <a:cs typeface="+mn-cs"/>
-      </a:defRPr>
-    </a:lvl5pPr>
-    <a:lvl6pPr marL="2286000" algn="l" defTabSz="457200" rtl="0" eaLnBrk="1" latinLnBrk="0" hangingPunct="1">
-      <a:defRPr sz="1200" kern="1200">
-        <a:solidFill>
-          <a:schemeClr val="tx1"/>
-        </a:solidFill>
-        <a:latin typeface="+mn-lt"/>
-        <a:ea typeface="+mn-ea"/>
-        <a:cs typeface="+mn-cs"/>
-      </a:defRPr>
-    </a:lvl6pPr>
-    <a:lvl7pPr marL="2743200" algn="l" defTabSz="457200" rtl="0" eaLnBrk="1" latinLnBrk="0" hangingPunct="1">
-      <a:defRPr sz="1200" kern="1200">
-        <a:solidFill>
-          <a:schemeClr val="tx1"/>
-        </a:solidFill>
-        <a:latin typeface="+mn-lt"/>
-        <a:ea typeface="+mn-ea"/>
-        <a:cs typeface="+mn-cs"/>
-      </a:defRPr>
-    </a:lvl7pPr>
-    <a:lvl8pPr marL="3200400" algn="l" defTabSz="457200" rtl="0" eaLnBrk="1" latinLnBrk="0" hangingPunct="1">
-      <a:defRPr sz="1200" kern="1200">
-        <a:solidFill>
-          <a:schemeClr val="tx1"/>
-        </a:solidFill>
-        <a:latin typeface="+mn-lt"/>
-        <a:ea typeface="+mn-ea"/>
-        <a:cs typeface="+mn-cs"/>
-      </a:defRPr>
-    </a:lvl8pPr>
-    <a:lvl9pPr marL="3657600" algn="l" defTabSz="457200" rtl="0" eaLnBrk="1" latinLnBrk="0" hangingPunct="1">
-      <a:defRPr sz="1200" kern="1200">
-        <a:solidFill>
-          <a:schemeClr val="tx1"/>
-        </a:solidFill>
-        <a:latin typeface="+mn-lt"/>
-        <a:ea typeface="+mn-ea"/>
-        <a:cs typeface="+mn-cs"/>
-      </a:defRPr>
-    </a:lvl9pPr>
   </p:notesStyle>
 </p:notesMaster>
 </file>
 
 <file path=ppt/notesSlides/notesSlide1.xml><?xml version="1.0" encoding="utf-8"?>
-<p:notes xmlns:a="http://schemas.openxmlformats.org/drawingml/2006/main" xmlns:p="http://schemas.openxmlformats.org/presentationml/2006/main" xmlns:r="http://schemas.openxmlformats.org/officeDocument/2006/relationships">
+<p:notes xmlns:a="http://schemas.openxmlformats.org/drawingml/2006/main" xmlns:r="http://schemas.openxmlformats.org/officeDocument/2006/relationships" xmlns:p="http://schemas.openxmlformats.org/presentationml/2006/main">
   <p:cSld>
     <p:spTree>
       <p:nvGrpSpPr>
@@ -487,10 +316,10 @@
         <p:nvSpPr>
           <p:cNvPr id="2" name="Slide Image Placeholder 1"/>
           <p:cNvSpPr>
-            <a:spLocks noGrp="1"/>
-          </p:cNvSpPr>
-          <p:nvPr>
-            <p:ph type="sldImg" idx="2"/>
+            <a:spLocks noGrp="1" noRot="1" noChangeAspect="1"/>
+          </p:cNvSpPr>
+          <p:nvPr>
+            <p:ph type="sldImg"/>
           </p:nvPr>
         </p:nvSpPr>
         <p:spPr/>
@@ -502,7 +331,7 @@
             <a:spLocks noGrp="1"/>
           </p:cNvSpPr>
           <p:nvPr>
-            <p:ph type="body" idx="3" sz="quarter"/>
+            <p:ph type="body" idx="1"/>
           </p:nvPr>
         </p:nvSpPr>
         <p:spPr/>
@@ -511,7 +340,48 @@
           <a:lstStyle/>
           <a:p>
             <a:r>
-              <a:t>Welcome, everyone. This is Guerrilla AI for Excel, day 1 of 5. I'm George Mount from Stringfest Analytics. Here is the idea behind this whole series. You do not need a Copilot license, a budget line, or IT's permission to work like an AI-powered analyst. Guerrilla AI means being crafty with what is already installed on your machine: the machine learning Excel has quietly shipped for years, the structural habits that make any AI dramatically better at reading your work, and the free tools that close the gap. Today's twenty-minute win: the machine learning that has been hiding in your Excel for years. We have one live demo block and then two or three things you can do at your own desk this afternoon. Let's go. Before we start, drop one thing in the chat: where you are joining from, and the Excel task that eats the most of your week. Keep an eye on your own answer. By Friday you will have a move for most of them.</a:t>
+              <a:t>Welcome to Guerrilla AI for Excel. I'm George Mount. Today's win is turning an email column into names with Flash Fill, then asking Excel a question about the data. You can watch the whole demo. No typing along required.</a:t>
+            </a:r>
+          </a:p>
+          <a:p>
+            <a:endParaRPr/>
+          </a:p>
+          <a:p>
+            <a:r>
+              <a:t>CHAT CUE (about 0:30; budget 15 seconds total)</a:t>
+            </a:r>
+          </a:p>
+          <a:p>
+            <a:r>
+              <a:t>SAY: Let's try the chat with one word: CLEANING or REPORTING. Which takes more of your time? Either answer works. You are welcome to just watch, too.</a:t>
+            </a:r>
+          </a:p>
+          <a:p>
+            <a:r>
+              <a:t>PAUSE: Wait silently for 8 seconds. Do not repeat the request.</a:t>
+            </a:r>
+          </a:p>
+          <a:p>
+            <a:r>
+              <a:t>IF SOMEONE REPLIES: Acknowledge one actual answer: 'Thanks. Keep that task in mind as we look at the export.'</a:t>
+            </a:r>
+          </a:p>
+          <a:p>
+            <a:r>
+              <a:t>IF CHAT IS QUIET: Say, "I'll use cleaning as our starting point." Then continue. Never imply that somebody replied.</a:t>
+            </a:r>
+          </a:p>
+          <a:p>
+            <a:r>
+              <a:t>FACILITATION: Acknowledge at most two actual replies, without calling on anyone by name. Accept a letter, a word, or a longer question. If a reply arrives later, acknowledge it at the next natural pause.</a:t>
+            </a:r>
+          </a:p>
+          <a:p>
+            <a:endParaRPr/>
+          </a:p>
+          <a:p>
+            <a:r>
+              <a:t>Keep the opening to 60 seconds. Participation is optional. The learning continues even with no chat replies.</a:t>
             </a:r>
           </a:p>
         </p:txBody>
@@ -523,10 +393,17 @@
             <a:spLocks noGrp="1"/>
           </p:cNvSpPr>
           <p:nvPr>
-            <p:ph type="sldNum" idx="5" sz="quarter"/>
+            <p:ph type="sldNum" idx="5"/>
           </p:nvPr>
         </p:nvSpPr>
         <p:spPr/>
+        <p:txBody>
+          <a:bodyPr/>
+          <a:lstStyle/>
+          <a:p>
+            <a:endParaRPr/>
+          </a:p>
+        </p:txBody>
       </p:sp>
     </p:spTree>
   </p:cSld>
@@ -537,7 +414,7 @@
 </file>
 
 <file path=ppt/notesSlides/notesSlide10.xml><?xml version="1.0" encoding="utf-8"?>
-<p:notes xmlns:a="http://schemas.openxmlformats.org/drawingml/2006/main" xmlns:p="http://schemas.openxmlformats.org/presentationml/2006/main" xmlns:r="http://schemas.openxmlformats.org/officeDocument/2006/relationships">
+<p:notes xmlns:a="http://schemas.openxmlformats.org/drawingml/2006/main" xmlns:r="http://schemas.openxmlformats.org/officeDocument/2006/relationships" xmlns:p="http://schemas.openxmlformats.org/presentationml/2006/main">
   <p:cSld>
     <p:spTree>
       <p:nvGrpSpPr>
@@ -557,10 +434,10 @@
         <p:nvSpPr>
           <p:cNvPr id="2" name="Slide Image Placeholder 1"/>
           <p:cNvSpPr>
-            <a:spLocks noGrp="1"/>
-          </p:cNvSpPr>
-          <p:nvPr>
-            <p:ph type="sldImg" idx="2"/>
+            <a:spLocks noGrp="1" noRot="1" noChangeAspect="1"/>
+          </p:cNvSpPr>
+          <p:nvPr>
+            <p:ph type="sldImg"/>
           </p:nvPr>
         </p:nvSpPr>
         <p:spPr/>
@@ -572,7 +449,7 @@
             <a:spLocks noGrp="1"/>
           </p:cNvSpPr>
           <p:nvPr>
-            <p:ph type="body" idx="3" sz="quarter"/>
+            <p:ph type="body" idx="1"/>
           </p:nvPr>
         </p:nvSpPr>
         <p:spPr/>
@@ -581,7 +458,53 @@
           <a:lstStyle/>
           <a:p>
             <a:r>
-              <a:t>That is day 1, and we are on time. Quick recap: Flash Fill is pattern recognition you already own, Analyze Data answers plain-English questions, and dirty data is what makes smart tools look dumb. If you want the replay, it lives in the Stringfest Analytics membership vault along with everything else I have recorded, ten dollars a month, link in the follow-up email. One question if we have time, otherwise drop it in the chat and I will answer by email. Thanks, everyone. See you tomorrow at noon.</a:t>
+              <a:t>CHAT CUE (about 18:30; budget 15 seconds total)</a:t>
+            </a:r>
+          </a:p>
+          <a:p>
+            <a:r>
+              <a:t>SAY: Want me to revisit something? Type NAMES, REGIONS, or TOTALS. A full question is welcome too.</a:t>
+            </a:r>
+          </a:p>
+          <a:p>
+            <a:r>
+              <a:t>PAUSE: Wait silently for 8 seconds. Do not repeat the request.</a:t>
+            </a:r>
+          </a:p>
+          <a:p>
+            <a:r>
+              <a:t>IF SOMEONE REPLIES: Answer one actual request in about 30 seconds. NAMES: check the example matches its row. REGIONS: spaces and inconsistent labels need cleaning. TOTALS: remove summary rows before summing orders.</a:t>
+            </a:r>
+          </a:p>
+          <a:p>
+            <a:r>
+              <a:t>IF CHAT IS QUIET: Say, "One useful check before you go: make sure your example matches the email on that same row." Then continue. Never imply that somebody replied.</a:t>
+            </a:r>
+          </a:p>
+          <a:p>
+            <a:r>
+              <a:t>FACILITATION: Acknowledge at most two actual replies, without calling on anyone by name. Accept a letter, a word, or a longer question. If a reply arrives later, acknowledge it at the next natural pause.</a:t>
+            </a:r>
+          </a:p>
+          <a:p>
+            <a:endParaRPr/>
+          </a:p>
+          <a:p>
+            <a:r>
+              <a:t>Use this cue before reading the remaining notes.</a:t>
+            </a:r>
+          </a:p>
+          <a:p>
+            <a:endParaRPr/>
+          </a:p>
+          <a:p>
+            <a:r>
+              <a:t>ORIGINAL TEACHING SCRIPT</a:t>
+            </a:r>
+          </a:p>
+          <a:p>
+            <a:r>
+              <a:t>That is day 1, and we are on time. Quick recap: Flash Fill is pattern recognition you already own, Analyze Data answers plain-English questions, and dirty data is what makes smart tools look dumb. If you want the replay, it lives in the Stringfest Analytics membership vault along with everything else I have recorded, ten dollars a month, link in the follow-up email.  Thanks, everyone. See you tomorrow at noon.</a:t>
             </a:r>
           </a:p>
         </p:txBody>
@@ -593,10 +516,17 @@
             <a:spLocks noGrp="1"/>
           </p:cNvSpPr>
           <p:nvPr>
-            <p:ph type="sldNum" idx="5" sz="quarter"/>
+            <p:ph type="sldNum" idx="5"/>
           </p:nvPr>
         </p:nvSpPr>
         <p:spPr/>
+        <p:txBody>
+          <a:bodyPr/>
+          <a:lstStyle/>
+          <a:p>
+            <a:endParaRPr/>
+          </a:p>
+        </p:txBody>
       </p:sp>
     </p:spTree>
   </p:cSld>
@@ -607,7 +537,7 @@
 </file>
 
 <file path=ppt/notesSlides/notesSlide2.xml><?xml version="1.0" encoding="utf-8"?>
-<p:notes xmlns:a="http://schemas.openxmlformats.org/drawingml/2006/main" xmlns:p="http://schemas.openxmlformats.org/presentationml/2006/main" xmlns:r="http://schemas.openxmlformats.org/officeDocument/2006/relationships">
+<p:notes xmlns:a="http://schemas.openxmlformats.org/drawingml/2006/main" xmlns:r="http://schemas.openxmlformats.org/officeDocument/2006/relationships" xmlns:p="http://schemas.openxmlformats.org/presentationml/2006/main">
   <p:cSld>
     <p:spTree>
       <p:nvGrpSpPr>
@@ -627,10 +557,10 @@
         <p:nvSpPr>
           <p:cNvPr id="2" name="Slide Image Placeholder 1"/>
           <p:cNvSpPr>
-            <a:spLocks noGrp="1"/>
-          </p:cNvSpPr>
-          <p:nvPr>
-            <p:ph type="sldImg" idx="2"/>
+            <a:spLocks noGrp="1" noRot="1" noChangeAspect="1"/>
+          </p:cNvSpPr>
+          <p:nvPr>
+            <p:ph type="sldImg"/>
           </p:nvPr>
         </p:nvSpPr>
         <p:spPr/>
@@ -642,7 +572,7 @@
             <a:spLocks noGrp="1"/>
           </p:cNvSpPr>
           <p:nvPr>
-            <p:ph type="body" idx="3" sz="quarter"/>
+            <p:ph type="body" idx="1"/>
           </p:nvPr>
         </p:nvSpPr>
         <p:spPr/>
@@ -663,10 +593,17 @@
             <a:spLocks noGrp="1"/>
           </p:cNvSpPr>
           <p:nvPr>
-            <p:ph type="sldNum" idx="5" sz="quarter"/>
+            <p:ph type="sldNum" idx="5"/>
           </p:nvPr>
         </p:nvSpPr>
         <p:spPr/>
+        <p:txBody>
+          <a:bodyPr/>
+          <a:lstStyle/>
+          <a:p>
+            <a:endParaRPr/>
+          </a:p>
+        </p:txBody>
       </p:sp>
     </p:spTree>
   </p:cSld>
@@ -677,7 +614,7 @@
 </file>
 
 <file path=ppt/notesSlides/notesSlide3.xml><?xml version="1.0" encoding="utf-8"?>
-<p:notes xmlns:a="http://schemas.openxmlformats.org/drawingml/2006/main" xmlns:p="http://schemas.openxmlformats.org/presentationml/2006/main" xmlns:r="http://schemas.openxmlformats.org/officeDocument/2006/relationships">
+<p:notes xmlns:a="http://schemas.openxmlformats.org/drawingml/2006/main" xmlns:r="http://schemas.openxmlformats.org/officeDocument/2006/relationships" xmlns:p="http://schemas.openxmlformats.org/presentationml/2006/main">
   <p:cSld>
     <p:spTree>
       <p:nvGrpSpPr>
@@ -697,10 +634,10 @@
         <p:nvSpPr>
           <p:cNvPr id="2" name="Slide Image Placeholder 1"/>
           <p:cNvSpPr>
-            <a:spLocks noGrp="1"/>
-          </p:cNvSpPr>
-          <p:nvPr>
-            <p:ph type="sldImg" idx="2"/>
+            <a:spLocks noGrp="1" noRot="1" noChangeAspect="1"/>
+          </p:cNvSpPr>
+          <p:nvPr>
+            <p:ph type="sldImg"/>
           </p:nvPr>
         </p:nvSpPr>
         <p:spPr/>
@@ -712,7 +649,7 @@
             <a:spLocks noGrp="1"/>
           </p:cNvSpPr>
           <p:nvPr>
-            <p:ph type="body" idx="3" sz="quarter"/>
+            <p:ph type="body" idx="1"/>
           </p:nvPr>
         </p:nvSpPr>
         <p:spPr/>
@@ -721,7 +658,15 @@
           <a:lstStyle/>
           <a:p>
             <a:r>
-              <a:t>Here is today's guerrilla hook, stated plainly. Microsoft shipped machine learning inside Excel years ago and nobody told you. Flash Fill, which has been sitting on the Data tab since Excel 2013, is pattern recognition. You type one example of what you want and it infers the rule. Analyze Data, right there on the Home tab, runs models against your data and answers questions you type in plain English. Recommended PivotTables is the same idea with training wheels. None of this needs a license, a budget request, or a conversation with IT. It is already on your machine. So before anyone in your organization asks for an AI budget, the guerrilla move is to exhaust the AI you already have. That is the whole day in one sentence. Now let me show you the dataset we will abuse all week.</a:t>
+              <a:t>Here is today's guerrilla hook, stated plainly. Microsoft shipped machine learning inside Excel years ago and nobody told you. Flash Fill, which has been sitting on the Data tab since Excel 2013, is pattern recognition. You type one example of what you want and it infers the rule. Analyze Data, right there on the Home tab, runs models against your data and answers questions you type in plain English. Recommended PivotTables is the same idea with training wheels. These examples do not require buying Copilot. The available features depend on your Excel version and account. So before anyone in your organization asks for an AI budget, the guerrilla move is to exhaust the AI you already have. That is the whole day in one sentence. Now let me show you the dataset we will abuse all week.</a:t>
+            </a:r>
+          </a:p>
+          <a:p>
+            <a:endParaRPr/>
+          </a:p>
+          <a:p>
+            <a:r>
+              <a:t>AVAILABILITY: Do not promise that everyone has this feature. Analyze Data requires Microsoft 365; Python in Excel availability depends on a qualifying account and supported setup. Watching is enough for this session. Sources checked September 27, 2026: https://support.microsoft.com/en-us/excel/analyze-data-in-excel ; https://support.microsoft.com/en-us/excel/python/python-in-excel-availability</a:t>
             </a:r>
           </a:p>
         </p:txBody>
@@ -733,10 +678,17 @@
             <a:spLocks noGrp="1"/>
           </p:cNvSpPr>
           <p:nvPr>
-            <p:ph type="sldNum" idx="5" sz="quarter"/>
+            <p:ph type="sldNum" idx="5"/>
           </p:nvPr>
         </p:nvSpPr>
         <p:spPr/>
+        <p:txBody>
+          <a:bodyPr/>
+          <a:lstStyle/>
+          <a:p>
+            <a:endParaRPr/>
+          </a:p>
+        </p:txBody>
       </p:sp>
     </p:spTree>
   </p:cSld>
@@ -747,7 +699,7 @@
 </file>
 
 <file path=ppt/notesSlides/notesSlide4.xml><?xml version="1.0" encoding="utf-8"?>
-<p:notes xmlns:a="http://schemas.openxmlformats.org/drawingml/2006/main" xmlns:p="http://schemas.openxmlformats.org/presentationml/2006/main" xmlns:r="http://schemas.openxmlformats.org/officeDocument/2006/relationships">
+<p:notes xmlns:a="http://schemas.openxmlformats.org/drawingml/2006/main" xmlns:r="http://schemas.openxmlformats.org/officeDocument/2006/relationships" xmlns:p="http://schemas.openxmlformats.org/presentationml/2006/main">
   <p:cSld>
     <p:spTree>
       <p:nvGrpSpPr>
@@ -767,10 +719,10 @@
         <p:nvSpPr>
           <p:cNvPr id="2" name="Slide Image Placeholder 1"/>
           <p:cNvSpPr>
-            <a:spLocks noGrp="1"/>
-          </p:cNvSpPr>
-          <p:nvPr>
-            <p:ph type="sldImg" idx="2"/>
+            <a:spLocks noGrp="1" noRot="1" noChangeAspect="1"/>
+          </p:cNvSpPr>
+          <p:nvPr>
+            <p:ph type="sldImg"/>
           </p:nvPr>
         </p:nvSpPr>
         <p:spPr/>
@@ -782,7 +734,7 @@
             <a:spLocks noGrp="1"/>
           </p:cNvSpPr>
           <p:nvPr>
-            <p:ph type="body" idx="3" sz="quarter"/>
+            <p:ph type="body" idx="1"/>
           </p:nvPr>
         </p:nvSpPr>
         <p:spPr/>
@@ -803,10 +755,17 @@
             <a:spLocks noGrp="1"/>
           </p:cNvSpPr>
           <p:nvPr>
-            <p:ph type="sldNum" idx="5" sz="quarter"/>
+            <p:ph type="sldNum" idx="5"/>
           </p:nvPr>
         </p:nvSpPr>
         <p:spPr/>
+        <p:txBody>
+          <a:bodyPr/>
+          <a:lstStyle/>
+          <a:p>
+            <a:endParaRPr/>
+          </a:p>
+        </p:txBody>
       </p:sp>
     </p:spTree>
   </p:cSld>
@@ -817,7 +776,7 @@
 </file>
 
 <file path=ppt/notesSlides/notesSlide5.xml><?xml version="1.0" encoding="utf-8"?>
-<p:notes xmlns:a="http://schemas.openxmlformats.org/drawingml/2006/main" xmlns:p="http://schemas.openxmlformats.org/presentationml/2006/main" xmlns:r="http://schemas.openxmlformats.org/officeDocument/2006/relationships">
+<p:notes xmlns:a="http://schemas.openxmlformats.org/drawingml/2006/main" xmlns:r="http://schemas.openxmlformats.org/officeDocument/2006/relationships" xmlns:p="http://schemas.openxmlformats.org/presentationml/2006/main">
   <p:cSld>
     <p:spTree>
       <p:nvGrpSpPr>
@@ -837,10 +796,10 @@
         <p:nvSpPr>
           <p:cNvPr id="2" name="Slide Image Placeholder 1"/>
           <p:cNvSpPr>
-            <a:spLocks noGrp="1"/>
-          </p:cNvSpPr>
-          <p:nvPr>
-            <p:ph type="sldImg" idx="2"/>
+            <a:spLocks noGrp="1" noRot="1" noChangeAspect="1"/>
+          </p:cNvSpPr>
+          <p:nvPr>
+            <p:ph type="sldImg"/>
           </p:nvPr>
         </p:nvSpPr>
         <p:spPr/>
@@ -852,7 +811,7 @@
             <a:spLocks noGrp="1"/>
           </p:cNvSpPr>
           <p:nvPr>
-            <p:ph type="body" idx="3" sz="quarter"/>
+            <p:ph type="body" idx="1"/>
           </p:nvPr>
         </p:nvSpPr>
         <p:spPr/>
@@ -861,7 +820,53 @@
           <a:lstStyle/>
           <a:p>
             <a:r>
-              <a:t>Demo time. I am in the raw-export sheet. We need actual rep names, and all we have is email addresses like dana dot kowalski at lakeshoresupply dot com. Watch how fast this is. I click cell I1 and type the header, Rep Name. Now in I2, next to Dana's email, I type the answer I want: Dana Kowalski, capital D, capital K. I press Enter. Now the magic key: Control E. Flash Fill reads my one example, works out the pattern, and fills the entire column. Look at it go. Marcus Webb, Priya Raman, Tom Delgado, all correct. I will spot-check two rows near the bottom, because trust but verify applies to every tool this week. That is pattern recognition from a single training example. If you have ever spent an afternoon splitting names by hand, this just gave you your afternoon back.</a:t>
+              <a:t>CHAT CUE (about 6:00; budget 15 seconds total)</a:t>
+            </a:r>
+          </a:p>
+          <a:p>
+            <a:r>
+              <a:t>SAY: Quick guess, just YES or NO: if I change the email later, will that filled name update too?</a:t>
+            </a:r>
+          </a:p>
+          <a:p>
+            <a:r>
+              <a:t>PAUSE: Wait silently for 8 seconds. Do not repeat the request.</a:t>
+            </a:r>
+          </a:p>
+          <a:p>
+            <a:r>
+              <a:t>IF SOMEONE REPLIES: NO. Flash Fill writes values. It does not create a formula linked to the email. Show the filled cell in the formula bar, then continue.</a:t>
+            </a:r>
+          </a:p>
+          <a:p>
+            <a:r>
+              <a:t>IF CHAT IS QUIET: Say, "Let's check the filled cell. It is a value, so it will not update with the email." Then continue. Never imply that somebody replied.</a:t>
+            </a:r>
+          </a:p>
+          <a:p>
+            <a:r>
+              <a:t>FACILITATION: Acknowledge at most two actual replies, without calling on anyone by name. Accept a letter, a word, or a longer question. If a reply arrives later, acknowledge it at the next natural pause.</a:t>
+            </a:r>
+          </a:p>
+          <a:p>
+            <a:endParaRPr/>
+          </a:p>
+          <a:p>
+            <a:r>
+              <a:t>Use this cue at the indicated demo pause. Keep the Excel window visible when the prompt refers to its result.</a:t>
+            </a:r>
+          </a:p>
+          <a:p>
+            <a:endParaRPr/>
+          </a:p>
+          <a:p>
+            <a:r>
+              <a:t>ORIGINAL TEACHING SCRIPT</a:t>
+            </a:r>
+          </a:p>
+          <a:p>
+            <a:r>
+              <a:t>Demo time. I am in the raw-export sheet. We need actual rep names, and all we have is email addresses like marcus dot webb at lakeshoresupply dot com. Watch how fast this is. I click cell I1 and type the header, Rep Name. Now in I2, next to Marcus's email, I type the answer I want: Marcus Webb, capital M, capital W. I press Enter. Now the magic key: Control E. Flash Fill reads my one example, works out the pattern, and fills the entire column. Look at it go. Check Dana Kowalski, Priya Raman, and Tom Delgado against their source emails. I will spot-check two rows near the bottom, because trust but verify applies to every tool this week. That is pattern recognition from a single training example. If you have ever spent an afternoon splitting names by hand, this just gave you your afternoon back.</a:t>
             </a:r>
           </a:p>
         </p:txBody>
@@ -873,10 +878,17 @@
             <a:spLocks noGrp="1"/>
           </p:cNvSpPr>
           <p:nvPr>
-            <p:ph type="sldNum" idx="5" sz="quarter"/>
+            <p:ph type="sldNum" idx="5"/>
           </p:nvPr>
         </p:nvSpPr>
         <p:spPr/>
+        <p:txBody>
+          <a:bodyPr/>
+          <a:lstStyle/>
+          <a:p>
+            <a:endParaRPr/>
+          </a:p>
+        </p:txBody>
       </p:sp>
     </p:spTree>
   </p:cSld>
@@ -887,7 +899,7 @@
 </file>
 
 <file path=ppt/notesSlides/notesSlide6.xml><?xml version="1.0" encoding="utf-8"?>
-<p:notes xmlns:a="http://schemas.openxmlformats.org/drawingml/2006/main" xmlns:p="http://schemas.openxmlformats.org/presentationml/2006/main" xmlns:r="http://schemas.openxmlformats.org/officeDocument/2006/relationships">
+<p:notes xmlns:a="http://schemas.openxmlformats.org/drawingml/2006/main" xmlns:r="http://schemas.openxmlformats.org/officeDocument/2006/relationships" xmlns:p="http://schemas.openxmlformats.org/presentationml/2006/main">
   <p:cSld>
     <p:spTree>
       <p:nvGrpSpPr>
@@ -907,10 +919,10 @@
         <p:nvSpPr>
           <p:cNvPr id="2" name="Slide Image Placeholder 1"/>
           <p:cNvSpPr>
-            <a:spLocks noGrp="1"/>
-          </p:cNvSpPr>
-          <p:nvPr>
-            <p:ph type="sldImg" idx="2"/>
+            <a:spLocks noGrp="1" noRot="1" noChangeAspect="1"/>
+          </p:cNvSpPr>
+          <p:nvPr>
+            <p:ph type="sldImg"/>
           </p:nvPr>
         </p:nvSpPr>
         <p:spPr/>
@@ -922,7 +934,7 @@
             <a:spLocks noGrp="1"/>
           </p:cNvSpPr>
           <p:nvPr>
-            <p:ph type="body" idx="3" sz="quarter"/>
+            <p:ph type="body" idx="1"/>
           </p:nvPr>
         </p:nvSpPr>
         <p:spPr/>
@@ -931,7 +943,53 @@
           <a:lstStyle/>
           <a:p>
             <a:r>
-              <a:t>Second demo. I click anywhere in the data, go to the Home tab, and hit Analyze Data. A pane opens with suggestions Excel generated by scanning the data on its own. I will type a question instead: total Amount by Region. Excel parses my English, matches it to columns, and offers a PivotTable, which I insert with one click. Now, look closely at the result, because something is off. We will talk about it on the next slide, and I want you to see it with your own eyes first. While we are here: if the pane ever feels lost, the older sibling is Insert, Recommended PivotTables. Same machine learning, more manual. Both cost nothing and both have been sitting in front of you for years.</a:t>
+              <a:t>CHAT CUE (about 11:00; budget 15 seconds total)</a:t>
+            </a:r>
+          </a:p>
+          <a:p>
+            <a:r>
+              <a:t>SAY: Before we add up sales, what should happen to the TOTAL rows: KEEP or REMOVE? One word is plenty.</a:t>
+            </a:r>
+          </a:p>
+          <a:p>
+            <a:r>
+              <a:t>PAUSE: Wait silently for 8 seconds. Do not repeat the request.</a:t>
+            </a:r>
+          </a:p>
+          <a:p>
+            <a:r>
+              <a:t>IF SOMEONE REPLIES: REMOVE. They already summarize other rows. Including them as orders can count sales twice. Today, spot the problem. Tomorrow, remove them.</a:t>
+            </a:r>
+          </a:p>
+          <a:p>
+            <a:r>
+              <a:t>IF CHAT IS QUIET: Say, "I'll remove summary rows before adding up the individual orders." Then continue. Never imply that somebody replied.</a:t>
+            </a:r>
+          </a:p>
+          <a:p>
+            <a:r>
+              <a:t>FACILITATION: Acknowledge at most two actual replies, without calling on anyone by name. Accept a letter, a word, or a longer question. If a reply arrives later, acknowledge it at the next natural pause.</a:t>
+            </a:r>
+          </a:p>
+          <a:p>
+            <a:endParaRPr/>
+          </a:p>
+          <a:p>
+            <a:r>
+              <a:t>Use this cue at the indicated demo pause. Keep the Excel window visible when the prompt refers to its result.</a:t>
+            </a:r>
+          </a:p>
+          <a:p>
+            <a:endParaRPr/>
+          </a:p>
+          <a:p>
+            <a:r>
+              <a:t>ORIGINAL TEACHING SCRIPT</a:t>
+            </a:r>
+          </a:p>
+          <a:p>
+            <a:r>
+              <a:t>Second demo. I click anywhere in the data, go to the Home tab, and hit Analyze Data. A pane opens with suggestions Excel generated by scanning the data on its own. I will type a question instead: total Amount by Region. Excel parses my English, matches it to columns, and offers a PivotTable, which I insert with one click. Now, look closely at the actual result and check whether it groups and totals the data as expected. We will talk about it on the next slide, and I want you to see it with your own eyes first. While we are here: if the pane ever feels lost, the older sibling is Insert, Recommended PivotTables. Same machine learning, more manual. Check the features available in your Excel account. The demo does not require buying Copilot.</a:t>
             </a:r>
           </a:p>
         </p:txBody>
@@ -943,10 +1001,17 @@
             <a:spLocks noGrp="1"/>
           </p:cNvSpPr>
           <p:nvPr>
-            <p:ph type="sldNum" idx="5" sz="quarter"/>
+            <p:ph type="sldNum" idx="5"/>
           </p:nvPr>
         </p:nvSpPr>
         <p:spPr/>
+        <p:txBody>
+          <a:bodyPr/>
+          <a:lstStyle/>
+          <a:p>
+            <a:endParaRPr/>
+          </a:p>
+        </p:txBody>
       </p:sp>
     </p:spTree>
   </p:cSld>
@@ -957,7 +1022,7 @@
 </file>
 
 <file path=ppt/notesSlides/notesSlide7.xml><?xml version="1.0" encoding="utf-8"?>
-<p:notes xmlns:a="http://schemas.openxmlformats.org/drawingml/2006/main" xmlns:p="http://schemas.openxmlformats.org/presentationml/2006/main" xmlns:r="http://schemas.openxmlformats.org/officeDocument/2006/relationships">
+<p:notes xmlns:a="http://schemas.openxmlformats.org/drawingml/2006/main" xmlns:r="http://schemas.openxmlformats.org/officeDocument/2006/relationships" xmlns:p="http://schemas.openxmlformats.org/presentationml/2006/main">
   <p:cSld>
     <p:spTree>
       <p:nvGrpSpPr>
@@ -977,10 +1042,10 @@
         <p:nvSpPr>
           <p:cNvPr id="2" name="Slide Image Placeholder 1"/>
           <p:cNvSpPr>
-            <a:spLocks noGrp="1"/>
-          </p:cNvSpPr>
-          <p:nvPr>
-            <p:ph type="sldImg" idx="2"/>
+            <a:spLocks noGrp="1" noRot="1" noChangeAspect="1"/>
+          </p:cNvSpPr>
+          <p:nvPr>
+            <p:ph type="sldImg"/>
           </p:nvPr>
         </p:nvSpPr>
         <p:spPr/>
@@ -992,7 +1057,7 @@
             <a:spLocks noGrp="1"/>
           </p:cNvSpPr>
           <p:nvPr>
-            <p:ph type="body" idx="3" sz="quarter"/>
+            <p:ph type="body" idx="1"/>
           </p:nvPr>
         </p:nvSpPr>
         <p:spPr/>
@@ -1001,7 +1066,7 @@
           <a:lstStyle/>
           <a:p>
             <a:r>
-              <a:t>Here is the honest moment, and it might be the most important slide of the day. Analyze Data just told us Lakeshore has seven regions. It has four. Because region was typed inconsistently, the model treated MIDWEST in caps, Midwest, and midwest with a trailing space as three different places. And those embedded TOTAL rows? They got counted like orders, so the numbers came back inflated. The tool did exactly what we asked. The data lied to it. That is the thread of this whole week: the AI is only as good as what it reads, and Wednesday is entirely about fixing that. One more thing while we are talking about free tools. Many of you have Copilot Chat available in Excel right now without a purchased license, and it is worth knowing what employees can already do with it. Whether and how it is enabled is a question for your IT department, so start there rather than with a purchase request.</a:t>
+              <a:t>Here is the honest moment, and it might be the most important slide of the day. Inspect the actual result rather than promising a particular number of groups. Lakeshore has four intended regions. Extra spaces and inconsistent labels can split or confuse summaries. And those embedded TOTAL rows? They got counted like orders, so the numbers came back inflated. The result depends on the input data and the operation the tool actually performed. Check both. That is the thread of this whole week: the AI is only as good as what it reads, and Wednesday is entirely about fixing that. One more thing while we are talking about free tools. Many of you have Copilot Chat available in Excel right now without a purchased license, and it is worth knowing what employees can already do with it. Whether and how it is enabled is a question for your IT department, so start there rather than with a purchase request.</a:t>
             </a:r>
           </a:p>
         </p:txBody>
@@ -1013,10 +1078,17 @@
             <a:spLocks noGrp="1"/>
           </p:cNvSpPr>
           <p:nvPr>
-            <p:ph type="sldNum" idx="5" sz="quarter"/>
+            <p:ph type="sldNum" idx="5"/>
           </p:nvPr>
         </p:nvSpPr>
         <p:spPr/>
+        <p:txBody>
+          <a:bodyPr/>
+          <a:lstStyle/>
+          <a:p>
+            <a:endParaRPr/>
+          </a:p>
+        </p:txBody>
       </p:sp>
     </p:spTree>
   </p:cSld>
@@ -1027,7 +1099,7 @@
 </file>
 
 <file path=ppt/notesSlides/notesSlide8.xml><?xml version="1.0" encoding="utf-8"?>
-<p:notes xmlns:a="http://schemas.openxmlformats.org/drawingml/2006/main" xmlns:p="http://schemas.openxmlformats.org/presentationml/2006/main" xmlns:r="http://schemas.openxmlformats.org/officeDocument/2006/relationships">
+<p:notes xmlns:a="http://schemas.openxmlformats.org/drawingml/2006/main" xmlns:r="http://schemas.openxmlformats.org/officeDocument/2006/relationships" xmlns:p="http://schemas.openxmlformats.org/presentationml/2006/main">
   <p:cSld>
     <p:spTree>
       <p:nvGrpSpPr>
@@ -1047,10 +1119,10 @@
         <p:nvSpPr>
           <p:cNvPr id="2" name="Slide Image Placeholder 1"/>
           <p:cNvSpPr>
-            <a:spLocks noGrp="1"/>
-          </p:cNvSpPr>
-          <p:nvPr>
-            <p:ph type="sldImg" idx="2"/>
+            <a:spLocks noGrp="1" noRot="1" noChangeAspect="1"/>
+          </p:cNvSpPr>
+          <p:nvPr>
+            <p:ph type="sldImg"/>
           </p:nvPr>
         </p:nvSpPr>
         <p:spPr/>
@@ -1062,7 +1134,7 @@
             <a:spLocks noGrp="1"/>
           </p:cNvSpPr>
           <p:nvPr>
-            <p:ph type="body" idx="3" sz="quarter"/>
+            <p:ph type="body" idx="1"/>
           </p:nvPr>
         </p:nvSpPr>
         <p:spPr/>
@@ -1071,6 +1143,53 @@
           <a:lstStyle/>
           <a:p>
             <a:r>
+              <a:t>CHAT CUE (about 16:30; budget 15 seconds total)</a:t>
+            </a:r>
+          </a:p>
+          <a:p>
+            <a:r>
+              <a:t>SAY: Pick just one thing for later: NAMES for Flash Fill, or TOTALS for checking a summary. Type either word.</a:t>
+            </a:r>
+          </a:p>
+          <a:p>
+            <a:r>
+              <a:t>PAUSE: Wait silently for 8 seconds. Do not repeat the request.</a:t>
+            </a:r>
+          </a:p>
+          <a:p>
+            <a:r>
+              <a:t>IF SOMEONE REPLIES: Acknowledge an actual choice. NAMES: type one correct example and try Flash Fill. TOTALS: check one summary for included subtotal rows.</a:t>
+            </a:r>
+          </a:p>
+          <a:p>
+            <a:r>
+              <a:t>IF CHAT IS QUIET: Say, "I'll start with NAMES: one column and one example." Then continue. Never imply that somebody replied.</a:t>
+            </a:r>
+          </a:p>
+          <a:p>
+            <a:r>
+              <a:t>FACILITATION: Acknowledge at most two actual replies, without calling on anyone by name. Accept a letter, a word, or a longer question. If a reply arrives later, acknowledge it at the next natural pause.</a:t>
+            </a:r>
+          </a:p>
+          <a:p>
+            <a:endParaRPr/>
+          </a:p>
+          <a:p>
+            <a:r>
+              <a:t>Use this cue before reading the remaining notes.</a:t>
+            </a:r>
+          </a:p>
+          <a:p>
+            <a:endParaRPr/>
+          </a:p>
+          <a:p>
+            <a:r>
+              <a:t>TEACHING SCRIPT
+Pick one small next action. You do not need to complete every option. NAMES: Try Flash Fill on one email column. Type a correct example, then press Ctrl+E. TOTALS: Check one summary for subtotal rows or inconsistent region labels. Choose one. Check the result against the source.</a:t>
+            </a:r>
+          </a:p>
+          <a:p>
+            <a:r>
               <a:t>Your desk actions for today, and there are three. One: find a column you have been cleaning by hand, type one example of what you want next to it, and press Control E. Two: open a real dataset you care about, click Home, Analyze Data, and ask it one question that actually matters to you. Three, and this is the sneaky one: note what it gets wrong. Write the list down. Bring it tomorrow, because the fix for that list is the rest of this week. Ten minutes, all three.</a:t>
             </a:r>
           </a:p>
@@ -1083,10 +1202,17 @@
             <a:spLocks noGrp="1"/>
           </p:cNvSpPr>
           <p:nvPr>
-            <p:ph type="sldNum" idx="5" sz="quarter"/>
+            <p:ph type="sldNum" idx="5"/>
           </p:nvPr>
         </p:nvSpPr>
         <p:spPr/>
+        <p:txBody>
+          <a:bodyPr/>
+          <a:lstStyle/>
+          <a:p>
+            <a:endParaRPr/>
+          </a:p>
+        </p:txBody>
       </p:sp>
     </p:spTree>
   </p:cSld>
@@ -1097,7 +1223,7 @@
 </file>
 
 <file path=ppt/notesSlides/notesSlide9.xml><?xml version="1.0" encoding="utf-8"?>
-<p:notes xmlns:a="http://schemas.openxmlformats.org/drawingml/2006/main" xmlns:p="http://schemas.openxmlformats.org/presentationml/2006/main" xmlns:r="http://schemas.openxmlformats.org/officeDocument/2006/relationships">
+<p:notes xmlns:a="http://schemas.openxmlformats.org/drawingml/2006/main" xmlns:r="http://schemas.openxmlformats.org/officeDocument/2006/relationships" xmlns:p="http://schemas.openxmlformats.org/presentationml/2006/main">
   <p:cSld>
     <p:spTree>
       <p:nvGrpSpPr>
@@ -1117,10 +1243,10 @@
         <p:nvSpPr>
           <p:cNvPr id="2" name="Slide Image Placeholder 1"/>
           <p:cNvSpPr>
-            <a:spLocks noGrp="1"/>
-          </p:cNvSpPr>
-          <p:nvPr>
-            <p:ph type="sldImg" idx="2"/>
+            <a:spLocks noGrp="1" noRot="1" noChangeAspect="1"/>
+          </p:cNvSpPr>
+          <p:nvPr>
+            <p:ph type="sldImg"/>
           </p:nvPr>
         </p:nvSpPr>
         <p:spPr/>
@@ -1132,7 +1258,7 @@
             <a:spLocks noGrp="1"/>
           </p:cNvSpPr>
           <p:nvPr>
-            <p:ph type="body" idx="3" sz="quarter"/>
+            <p:ph type="body" idx="1"/>
           </p:nvPr>
         </p:nvSpPr>
         <p:spPr/>
@@ -1153,10 +1279,17 @@
             <a:spLocks noGrp="1"/>
           </p:cNvSpPr>
           <p:nvPr>
-            <p:ph type="sldNum" idx="5" sz="quarter"/>
+            <p:ph type="sldNum" idx="5"/>
           </p:nvPr>
         </p:nvSpPr>
         <p:spPr/>
+        <p:txBody>
+          <a:bodyPr/>
+          <a:lstStyle/>
+          <a:p>
+            <a:endParaRPr/>
+          </a:p>
+        </p:txBody>
       </p:sp>
     </p:spTree>
   </p:cSld>
@@ -1185,7 +1318,13 @@
       </p:grpSpPr>
       <p:sp>
         <p:nvSpPr>
-          <p:cNvPr id="2" name="Title 1"/>
+          <p:cNvPr id="2" name="Title 1">
+            <a:extLst>
+              <a:ext uri="{FF2B5EF4-FFF2-40B4-BE49-F238E27FC236}">
+                <a16:creationId xmlns:a16="http://schemas.microsoft.com/office/drawing/2014/main" id="{2EDB0313-58FE-4E7F-9C44-1981999C11F5}"/>
+              </a:ext>
+            </a:extLst>
+          </p:cNvPr>
           <p:cNvSpPr>
             <a:spLocks noGrp="1"/>
           </p:cNvSpPr>
@@ -1204,16 +1343,20 @@
           <a:lstStyle/>
           <a:p>
             <a:r>
-              <a:rPr lang="en-US" smtClean="0"/>
               <a:t>Click to edit Master title style</a:t>
             </a:r>
-            <a:endParaRPr lang="en-US"/>
-          </a:p>
-        </p:txBody>
-      </p:sp>
-      <p:sp>
-        <p:nvSpPr>
-          <p:cNvPr id="3" name="Subtitle 2"/>
+          </a:p>
+        </p:txBody>
+      </p:sp>
+      <p:sp>
+        <p:nvSpPr>
+          <p:cNvPr id="3" name="Subtitle 2">
+            <a:extLst>
+              <a:ext uri="{FF2B5EF4-FFF2-40B4-BE49-F238E27FC236}">
+                <a16:creationId xmlns:a16="http://schemas.microsoft.com/office/drawing/2014/main" id="{82283D71-929E-4E32-8EF5-76EAADE58A43}"/>
+              </a:ext>
+            </a:extLst>
+          </p:cNvPr>
           <p:cNvSpPr>
             <a:spLocks noGrp="1"/>
           </p:cNvSpPr>
@@ -1323,21 +1466,25 @@
           </a:lstStyle>
           <a:p>
             <a:r>
-              <a:rPr lang="en-US" smtClean="0"/>
               <a:t>Click to edit Master subtitle style</a:t>
             </a:r>
-            <a:endParaRPr lang="en-US"/>
-          </a:p>
-        </p:txBody>
-      </p:sp>
-      <p:sp>
-        <p:nvSpPr>
-          <p:cNvPr id="4" name="Date Placeholder 3"/>
-          <p:cNvSpPr>
-            <a:spLocks noGrp="1"/>
-          </p:cNvSpPr>
-          <p:nvPr>
-            <p:ph type="dt" sz="half" idx="10"/>
+          </a:p>
+        </p:txBody>
+      </p:sp>
+      <p:sp>
+        <p:nvSpPr>
+          <p:cNvPr id="4" name="Date Placeholder 3">
+            <a:extLst>
+              <a:ext uri="{FF2B5EF4-FFF2-40B4-BE49-F238E27FC236}">
+                <a16:creationId xmlns:a16="http://schemas.microsoft.com/office/drawing/2014/main" id="{A0570E15-0A1C-477F-9646-643A8D6A9F6C}"/>
+              </a:ext>
+            </a:extLst>
+          </p:cNvPr>
+          <p:cNvSpPr>
+            <a:spLocks noGrp="1"/>
+          </p:cNvSpPr>
+          <p:nvPr>
+            <p:ph type="dt" idx="10"/>
           </p:nvPr>
         </p:nvSpPr>
         <p:spPr/>
@@ -1346,21 +1493,26 @@
           <a:lstStyle/>
           <a:p>
             <a:fld id="{5BCAD085-E8A6-8845-BD4E-CB4CCA059FC4}" type="datetimeFigureOut">
-              <a:rPr lang="en-US" smtClean="0"/>
-              <a:t>1/27/13</a:t>
+              <a:t>9/27/2026</a:t>
             </a:fld>
-            <a:endParaRPr lang="en-US"/>
-          </a:p>
-        </p:txBody>
-      </p:sp>
-      <p:sp>
-        <p:nvSpPr>
-          <p:cNvPr id="5" name="Footer Placeholder 4"/>
-          <p:cNvSpPr>
-            <a:spLocks noGrp="1"/>
-          </p:cNvSpPr>
-          <p:nvPr>
-            <p:ph type="ftr" sz="quarter" idx="11"/>
+            <a:endParaRPr/>
+          </a:p>
+        </p:txBody>
+      </p:sp>
+      <p:sp>
+        <p:nvSpPr>
+          <p:cNvPr id="5" name="Footer Placeholder 4">
+            <a:extLst>
+              <a:ext uri="{FF2B5EF4-FFF2-40B4-BE49-F238E27FC236}">
+                <a16:creationId xmlns:a16="http://schemas.microsoft.com/office/drawing/2014/main" id="{7E033367-E24F-4329-A3DA-A6492FF1B5E0}"/>
+              </a:ext>
+            </a:extLst>
+          </p:cNvPr>
+          <p:cNvSpPr>
+            <a:spLocks noGrp="1"/>
+          </p:cNvSpPr>
+          <p:nvPr>
+            <p:ph type="ftr" idx="11"/>
           </p:nvPr>
         </p:nvSpPr>
         <p:spPr/>
@@ -1368,18 +1520,24 @@
           <a:bodyPr/>
           <a:lstStyle/>
           <a:p>
-            <a:endParaRPr lang="en-US"/>
-          </a:p>
-        </p:txBody>
-      </p:sp>
-      <p:sp>
-        <p:nvSpPr>
-          <p:cNvPr id="6" name="Slide Number Placeholder 5"/>
-          <p:cNvSpPr>
-            <a:spLocks noGrp="1"/>
-          </p:cNvSpPr>
-          <p:nvPr>
-            <p:ph type="sldNum" sz="quarter" idx="12"/>
+            <a:endParaRPr/>
+          </a:p>
+        </p:txBody>
+      </p:sp>
+      <p:sp>
+        <p:nvSpPr>
+          <p:cNvPr id="6" name="Slide Number Placeholder 5">
+            <a:extLst>
+              <a:ext uri="{FF2B5EF4-FFF2-40B4-BE49-F238E27FC236}">
+                <a16:creationId xmlns:a16="http://schemas.microsoft.com/office/drawing/2014/main" id="{58D47359-AA9D-4523-9E38-8F3CB60E7DC8}"/>
+              </a:ext>
+            </a:extLst>
+          </p:cNvPr>
+          <p:cNvSpPr>
+            <a:spLocks noGrp="1"/>
+          </p:cNvSpPr>
+          <p:nvPr>
+            <p:ph type="sldNum" idx="12"/>
           </p:nvPr>
         </p:nvSpPr>
         <p:spPr/>
@@ -1388,19 +1546,13 @@
           <a:lstStyle/>
           <a:p>
             <a:fld id="{C1FF6DA9-008F-8B48-92A6-B652298478BF}" type="slidenum">
-              <a:rPr lang="en-US" smtClean="0"/>
               <a:t>‹#›</a:t>
             </a:fld>
-            <a:endParaRPr lang="en-US"/>
+            <a:endParaRPr/>
           </a:p>
         </p:txBody>
       </p:sp>
     </p:spTree>
-    <p:extLst>
-      <p:ext uri="{BB962C8B-B14F-4D97-AF65-F5344CB8AC3E}">
-        <p14:creationId xmlns:p14="http://schemas.microsoft.com/office/powerpoint/2010/main" val="3168075583"/>
-      </p:ext>
-    </p:extLst>
   </p:cSld>
   <p:clrMapOvr>
     <a:masterClrMapping/>
@@ -1427,7 +1579,13 @@
       </p:grpSpPr>
       <p:sp>
         <p:nvSpPr>
-          <p:cNvPr id="2" name="Title 1"/>
+          <p:cNvPr id="2" name="Title 1">
+            <a:extLst>
+              <a:ext uri="{FF2B5EF4-FFF2-40B4-BE49-F238E27FC236}">
+                <a16:creationId xmlns:a16="http://schemas.microsoft.com/office/drawing/2014/main" id="{6DA1B0AF-503A-46FA-A1D0-41F53367A54C}"/>
+              </a:ext>
+            </a:extLst>
+          </p:cNvPr>
           <p:cNvSpPr>
             <a:spLocks noGrp="1"/>
           </p:cNvSpPr>
@@ -1441,21 +1599,25 @@
           <a:lstStyle/>
           <a:p>
             <a:r>
-              <a:rPr lang="en-US" smtClean="0"/>
               <a:t>Click to edit Master title style</a:t>
             </a:r>
-            <a:endParaRPr lang="en-US"/>
-          </a:p>
-        </p:txBody>
-      </p:sp>
-      <p:sp>
-        <p:nvSpPr>
-          <p:cNvPr id="3" name="Vertical Text Placeholder 2"/>
-          <p:cNvSpPr>
-            <a:spLocks noGrp="1"/>
-          </p:cNvSpPr>
-          <p:nvPr>
-            <p:ph type="body" orient="vert" idx="1"/>
+          </a:p>
+        </p:txBody>
+      </p:sp>
+      <p:sp>
+        <p:nvSpPr>
+          <p:cNvPr id="3" name="Vertical Text Placeholder 2">
+            <a:extLst>
+              <a:ext uri="{FF2B5EF4-FFF2-40B4-BE49-F238E27FC236}">
+                <a16:creationId xmlns:a16="http://schemas.microsoft.com/office/drawing/2014/main" id="{7B7EA850-0C4D-4D83-B524-64F6748C1E00}"/>
+              </a:ext>
+            </a:extLst>
+          </p:cNvPr>
+          <p:cNvSpPr>
+            <a:spLocks noGrp="1"/>
+          </p:cNvSpPr>
+          <p:nvPr>
+            <p:ph type="body" idx="1"/>
           </p:nvPr>
         </p:nvSpPr>
         <p:spPr/>
@@ -1463,51 +1625,61 @@
           <a:bodyPr vert="eaVert"/>
           <a:lstStyle/>
           <a:p>
-            <a:pPr lvl="0"/>
-            <a:r>
-              <a:rPr lang="en-US" smtClean="0"/>
+            <a:pPr lvl="0">
+              <a:buNone/>
+            </a:pPr>
+            <a:r>
               <a:t>Click to edit Master text styles</a:t>
             </a:r>
           </a:p>
           <a:p>
-            <a:pPr lvl="1"/>
-            <a:r>
-              <a:rPr lang="en-US" smtClean="0"/>
+            <a:pPr lvl="1">
+              <a:buNone/>
+            </a:pPr>
+            <a:r>
               <a:t>Second level</a:t>
             </a:r>
           </a:p>
           <a:p>
-            <a:pPr lvl="2"/>
-            <a:r>
-              <a:rPr lang="en-US" smtClean="0"/>
+            <a:pPr lvl="2">
+              <a:buNone/>
+            </a:pPr>
+            <a:r>
               <a:t>Third level</a:t>
             </a:r>
           </a:p>
           <a:p>
-            <a:pPr lvl="3"/>
-            <a:r>
-              <a:rPr lang="en-US" smtClean="0"/>
+            <a:pPr lvl="3">
+              <a:buNone/>
+            </a:pPr>
+            <a:r>
               <a:t>Fourth level</a:t>
             </a:r>
           </a:p>
           <a:p>
-            <a:pPr lvl="4"/>
-            <a:r>
-              <a:rPr lang="en-US" smtClean="0"/>
+            <a:pPr lvl="4">
+              <a:buNone/>
+            </a:pPr>
+            <a:r>
               <a:t>Fifth level</a:t>
             </a:r>
-            <a:endParaRPr lang="en-US"/>
-          </a:p>
-        </p:txBody>
-      </p:sp>
-      <p:sp>
-        <p:nvSpPr>
-          <p:cNvPr id="4" name="Date Placeholder 3"/>
-          <p:cNvSpPr>
-            <a:spLocks noGrp="1"/>
-          </p:cNvSpPr>
-          <p:nvPr>
-            <p:ph type="dt" sz="half" idx="10"/>
+          </a:p>
+        </p:txBody>
+      </p:sp>
+      <p:sp>
+        <p:nvSpPr>
+          <p:cNvPr id="4" name="Date Placeholder 3">
+            <a:extLst>
+              <a:ext uri="{FF2B5EF4-FFF2-40B4-BE49-F238E27FC236}">
+                <a16:creationId xmlns:a16="http://schemas.microsoft.com/office/drawing/2014/main" id="{150479CC-77DA-40DC-B9D3-606554CFB19C}"/>
+              </a:ext>
+            </a:extLst>
+          </p:cNvPr>
+          <p:cNvSpPr>
+            <a:spLocks noGrp="1"/>
+          </p:cNvSpPr>
+          <p:nvPr>
+            <p:ph type="dt" idx="10"/>
           </p:nvPr>
         </p:nvSpPr>
         <p:spPr/>
@@ -1516,21 +1688,26 @@
           <a:lstStyle/>
           <a:p>
             <a:fld id="{5BCAD085-E8A6-8845-BD4E-CB4CCA059FC4}" type="datetimeFigureOut">
-              <a:rPr lang="en-US" smtClean="0"/>
-              <a:t>1/27/13</a:t>
+              <a:t>9/27/2026</a:t>
             </a:fld>
-            <a:endParaRPr lang="en-US"/>
-          </a:p>
-        </p:txBody>
-      </p:sp>
-      <p:sp>
-        <p:nvSpPr>
-          <p:cNvPr id="5" name="Footer Placeholder 4"/>
-          <p:cNvSpPr>
-            <a:spLocks noGrp="1"/>
-          </p:cNvSpPr>
-          <p:nvPr>
-            <p:ph type="ftr" sz="quarter" idx="11"/>
+            <a:endParaRPr/>
+          </a:p>
+        </p:txBody>
+      </p:sp>
+      <p:sp>
+        <p:nvSpPr>
+          <p:cNvPr id="5" name="Footer Placeholder 4">
+            <a:extLst>
+              <a:ext uri="{FF2B5EF4-FFF2-40B4-BE49-F238E27FC236}">
+                <a16:creationId xmlns:a16="http://schemas.microsoft.com/office/drawing/2014/main" id="{D34A10E2-0FA6-4DD2-9201-19486485859A}"/>
+              </a:ext>
+            </a:extLst>
+          </p:cNvPr>
+          <p:cNvSpPr>
+            <a:spLocks noGrp="1"/>
+          </p:cNvSpPr>
+          <p:nvPr>
+            <p:ph type="ftr" idx="11"/>
           </p:nvPr>
         </p:nvSpPr>
         <p:spPr/>
@@ -1538,18 +1715,24 @@
           <a:bodyPr/>
           <a:lstStyle/>
           <a:p>
-            <a:endParaRPr lang="en-US"/>
-          </a:p>
-        </p:txBody>
-      </p:sp>
-      <p:sp>
-        <p:nvSpPr>
-          <p:cNvPr id="6" name="Slide Number Placeholder 5"/>
-          <p:cNvSpPr>
-            <a:spLocks noGrp="1"/>
-          </p:cNvSpPr>
-          <p:nvPr>
-            <p:ph type="sldNum" sz="quarter" idx="12"/>
+            <a:endParaRPr/>
+          </a:p>
+        </p:txBody>
+      </p:sp>
+      <p:sp>
+        <p:nvSpPr>
+          <p:cNvPr id="6" name="Slide Number Placeholder 5">
+            <a:extLst>
+              <a:ext uri="{FF2B5EF4-FFF2-40B4-BE49-F238E27FC236}">
+                <a16:creationId xmlns:a16="http://schemas.microsoft.com/office/drawing/2014/main" id="{F07E19AC-8459-4954-8C2B-6BF83AA1C14B}"/>
+              </a:ext>
+            </a:extLst>
+          </p:cNvPr>
+          <p:cNvSpPr>
+            <a:spLocks noGrp="1"/>
+          </p:cNvSpPr>
+          <p:nvPr>
+            <p:ph type="sldNum" idx="12"/>
           </p:nvPr>
         </p:nvSpPr>
         <p:spPr/>
@@ -1558,19 +1741,13 @@
           <a:lstStyle/>
           <a:p>
             <a:fld id="{C1FF6DA9-008F-8B48-92A6-B652298478BF}" type="slidenum">
-              <a:rPr lang="en-US" smtClean="0"/>
               <a:t>‹#›</a:t>
             </a:fld>
-            <a:endParaRPr lang="en-US"/>
+            <a:endParaRPr/>
           </a:p>
         </p:txBody>
       </p:sp>
     </p:spTree>
-    <p:extLst>
-      <p:ext uri="{BB962C8B-B14F-4D97-AF65-F5344CB8AC3E}">
-        <p14:creationId xmlns:p14="http://schemas.microsoft.com/office/powerpoint/2010/main" val="2910927964"/>
-      </p:ext>
-    </p:extLst>
   </p:cSld>
   <p:clrMapOvr>
     <a:masterClrMapping/>
@@ -1597,12 +1774,18 @@
       </p:grpSpPr>
       <p:sp>
         <p:nvSpPr>
-          <p:cNvPr id="2" name="Vertical Title 1"/>
-          <p:cNvSpPr>
-            <a:spLocks noGrp="1"/>
-          </p:cNvSpPr>
-          <p:nvPr>
-            <p:ph type="title" orient="vert"/>
+          <p:cNvPr id="2" name="Vertical Title 1">
+            <a:extLst>
+              <a:ext uri="{FF2B5EF4-FFF2-40B4-BE49-F238E27FC236}">
+                <a16:creationId xmlns:a16="http://schemas.microsoft.com/office/drawing/2014/main" id="{8933B5E4-877C-4313-A28D-C223D3AB19E3}"/>
+              </a:ext>
+            </a:extLst>
+          </p:cNvPr>
+          <p:cNvSpPr>
+            <a:spLocks noGrp="1"/>
+          </p:cNvSpPr>
+          <p:nvPr>
+            <p:ph type="title"/>
           </p:nvPr>
         </p:nvSpPr>
         <p:spPr>
@@ -1616,21 +1799,25 @@
           <a:lstStyle/>
           <a:p>
             <a:r>
-              <a:rPr lang="en-US" smtClean="0"/>
               <a:t>Click to edit Master title style</a:t>
             </a:r>
-            <a:endParaRPr lang="en-US"/>
-          </a:p>
-        </p:txBody>
-      </p:sp>
-      <p:sp>
-        <p:nvSpPr>
-          <p:cNvPr id="3" name="Vertical Text Placeholder 2"/>
-          <p:cNvSpPr>
-            <a:spLocks noGrp="1"/>
-          </p:cNvSpPr>
-          <p:nvPr>
-            <p:ph type="body" orient="vert" idx="1"/>
+          </a:p>
+        </p:txBody>
+      </p:sp>
+      <p:sp>
+        <p:nvSpPr>
+          <p:cNvPr id="3" name="Vertical Text Placeholder 2">
+            <a:extLst>
+              <a:ext uri="{FF2B5EF4-FFF2-40B4-BE49-F238E27FC236}">
+                <a16:creationId xmlns:a16="http://schemas.microsoft.com/office/drawing/2014/main" id="{D300149C-2BC1-432A-97F4-03C486E59E0F}"/>
+              </a:ext>
+            </a:extLst>
+          </p:cNvPr>
+          <p:cNvSpPr>
+            <a:spLocks noGrp="1"/>
+          </p:cNvSpPr>
+          <p:nvPr>
+            <p:ph type="body" idx="1"/>
           </p:nvPr>
         </p:nvSpPr>
         <p:spPr>
@@ -1643,51 +1830,61 @@
           <a:bodyPr vert="eaVert"/>
           <a:lstStyle/>
           <a:p>
-            <a:pPr lvl="0"/>
-            <a:r>
-              <a:rPr lang="en-US" smtClean="0"/>
+            <a:pPr lvl="0">
+              <a:buNone/>
+            </a:pPr>
+            <a:r>
               <a:t>Click to edit Master text styles</a:t>
             </a:r>
           </a:p>
           <a:p>
-            <a:pPr lvl="1"/>
-            <a:r>
-              <a:rPr lang="en-US" smtClean="0"/>
+            <a:pPr lvl="1">
+              <a:buNone/>
+            </a:pPr>
+            <a:r>
               <a:t>Second level</a:t>
             </a:r>
           </a:p>
           <a:p>
-            <a:pPr lvl="2"/>
-            <a:r>
-              <a:rPr lang="en-US" smtClean="0"/>
+            <a:pPr lvl="2">
+              <a:buNone/>
+            </a:pPr>
+            <a:r>
               <a:t>Third level</a:t>
             </a:r>
           </a:p>
           <a:p>
-            <a:pPr lvl="3"/>
-            <a:r>
-              <a:rPr lang="en-US" smtClean="0"/>
+            <a:pPr lvl="3">
+              <a:buNone/>
+            </a:pPr>
+            <a:r>
               <a:t>Fourth level</a:t>
             </a:r>
           </a:p>
           <a:p>
-            <a:pPr lvl="4"/>
-            <a:r>
-              <a:rPr lang="en-US" smtClean="0"/>
+            <a:pPr lvl="4">
+              <a:buNone/>
+            </a:pPr>
+            <a:r>
               <a:t>Fifth level</a:t>
             </a:r>
-            <a:endParaRPr lang="en-US"/>
-          </a:p>
-        </p:txBody>
-      </p:sp>
-      <p:sp>
-        <p:nvSpPr>
-          <p:cNvPr id="4" name="Date Placeholder 3"/>
-          <p:cNvSpPr>
-            <a:spLocks noGrp="1"/>
-          </p:cNvSpPr>
-          <p:nvPr>
-            <p:ph type="dt" sz="half" idx="10"/>
+          </a:p>
+        </p:txBody>
+      </p:sp>
+      <p:sp>
+        <p:nvSpPr>
+          <p:cNvPr id="4" name="Date Placeholder 3">
+            <a:extLst>
+              <a:ext uri="{FF2B5EF4-FFF2-40B4-BE49-F238E27FC236}">
+                <a16:creationId xmlns:a16="http://schemas.microsoft.com/office/drawing/2014/main" id="{B159DA44-B3D6-4B1F-9CCB-CC084F6450F8}"/>
+              </a:ext>
+            </a:extLst>
+          </p:cNvPr>
+          <p:cNvSpPr>
+            <a:spLocks noGrp="1"/>
+          </p:cNvSpPr>
+          <p:nvPr>
+            <p:ph type="dt" idx="10"/>
           </p:nvPr>
         </p:nvSpPr>
         <p:spPr/>
@@ -1696,21 +1893,26 @@
           <a:lstStyle/>
           <a:p>
             <a:fld id="{5BCAD085-E8A6-8845-BD4E-CB4CCA059FC4}" type="datetimeFigureOut">
-              <a:rPr lang="en-US" smtClean="0"/>
-              <a:t>1/27/13</a:t>
+              <a:t>9/27/2026</a:t>
             </a:fld>
-            <a:endParaRPr lang="en-US"/>
-          </a:p>
-        </p:txBody>
-      </p:sp>
-      <p:sp>
-        <p:nvSpPr>
-          <p:cNvPr id="5" name="Footer Placeholder 4"/>
-          <p:cNvSpPr>
-            <a:spLocks noGrp="1"/>
-          </p:cNvSpPr>
-          <p:nvPr>
-            <p:ph type="ftr" sz="quarter" idx="11"/>
+            <a:endParaRPr/>
+          </a:p>
+        </p:txBody>
+      </p:sp>
+      <p:sp>
+        <p:nvSpPr>
+          <p:cNvPr id="5" name="Footer Placeholder 4">
+            <a:extLst>
+              <a:ext uri="{FF2B5EF4-FFF2-40B4-BE49-F238E27FC236}">
+                <a16:creationId xmlns:a16="http://schemas.microsoft.com/office/drawing/2014/main" id="{3A964BBC-3979-42B4-BBDE-17F26B01AF04}"/>
+              </a:ext>
+            </a:extLst>
+          </p:cNvPr>
+          <p:cNvSpPr>
+            <a:spLocks noGrp="1"/>
+          </p:cNvSpPr>
+          <p:nvPr>
+            <p:ph type="ftr" idx="11"/>
           </p:nvPr>
         </p:nvSpPr>
         <p:spPr/>
@@ -1718,18 +1920,24 @@
           <a:bodyPr/>
           <a:lstStyle/>
           <a:p>
-            <a:endParaRPr lang="en-US"/>
-          </a:p>
-        </p:txBody>
-      </p:sp>
-      <p:sp>
-        <p:nvSpPr>
-          <p:cNvPr id="6" name="Slide Number Placeholder 5"/>
-          <p:cNvSpPr>
-            <a:spLocks noGrp="1"/>
-          </p:cNvSpPr>
-          <p:nvPr>
-            <p:ph type="sldNum" sz="quarter" idx="12"/>
+            <a:endParaRPr/>
+          </a:p>
+        </p:txBody>
+      </p:sp>
+      <p:sp>
+        <p:nvSpPr>
+          <p:cNvPr id="6" name="Slide Number Placeholder 5">
+            <a:extLst>
+              <a:ext uri="{FF2B5EF4-FFF2-40B4-BE49-F238E27FC236}">
+                <a16:creationId xmlns:a16="http://schemas.microsoft.com/office/drawing/2014/main" id="{FDE600D6-823D-44A0-920B-7BDCD960F306}"/>
+              </a:ext>
+            </a:extLst>
+          </p:cNvPr>
+          <p:cNvSpPr>
+            <a:spLocks noGrp="1"/>
+          </p:cNvSpPr>
+          <p:nvPr>
+            <p:ph type="sldNum" idx="12"/>
           </p:nvPr>
         </p:nvSpPr>
         <p:spPr/>
@@ -1738,19 +1946,13 @@
           <a:lstStyle/>
           <a:p>
             <a:fld id="{C1FF6DA9-008F-8B48-92A6-B652298478BF}" type="slidenum">
-              <a:rPr lang="en-US" smtClean="0"/>
               <a:t>‹#›</a:t>
             </a:fld>
-            <a:endParaRPr lang="en-US"/>
+            <a:endParaRPr/>
           </a:p>
         </p:txBody>
       </p:sp>
     </p:spTree>
-    <p:extLst>
-      <p:ext uri="{BB962C8B-B14F-4D97-AF65-F5344CB8AC3E}">
-        <p14:creationId xmlns:p14="http://schemas.microsoft.com/office/powerpoint/2010/main" val="3612223792"/>
-      </p:ext>
-    </p:extLst>
   </p:cSld>
   <p:clrMapOvr>
     <a:masterClrMapping/>
@@ -1777,7 +1979,13 @@
       </p:grpSpPr>
       <p:sp>
         <p:nvSpPr>
-          <p:cNvPr id="2" name="Title 1"/>
+          <p:cNvPr id="2" name="Title 1">
+            <a:extLst>
+              <a:ext uri="{FF2B5EF4-FFF2-40B4-BE49-F238E27FC236}">
+                <a16:creationId xmlns:a16="http://schemas.microsoft.com/office/drawing/2014/main" id="{7F6063E2-330E-42DD-8AFE-245F629BB024}"/>
+              </a:ext>
+            </a:extLst>
+          </p:cNvPr>
           <p:cNvSpPr>
             <a:spLocks noGrp="1"/>
           </p:cNvSpPr>
@@ -1791,16 +1999,20 @@
           <a:lstStyle/>
           <a:p>
             <a:r>
-              <a:rPr lang="en-US" smtClean="0"/>
               <a:t>Click to edit Master title style</a:t>
             </a:r>
-            <a:endParaRPr lang="en-US"/>
-          </a:p>
-        </p:txBody>
-      </p:sp>
-      <p:sp>
-        <p:nvSpPr>
-          <p:cNvPr id="3" name="Content Placeholder 2"/>
+          </a:p>
+        </p:txBody>
+      </p:sp>
+      <p:sp>
+        <p:nvSpPr>
+          <p:cNvPr id="3" name="Content Placeholder 2">
+            <a:extLst>
+              <a:ext uri="{FF2B5EF4-FFF2-40B4-BE49-F238E27FC236}">
+                <a16:creationId xmlns:a16="http://schemas.microsoft.com/office/drawing/2014/main" id="{D0C9616F-8D01-4643-998A-340A1F9C0A9E}"/>
+              </a:ext>
+            </a:extLst>
+          </p:cNvPr>
           <p:cNvSpPr>
             <a:spLocks noGrp="1"/>
           </p:cNvSpPr>
@@ -1813,51 +2025,61 @@
           <a:bodyPr/>
           <a:lstStyle/>
           <a:p>
-            <a:pPr lvl="0"/>
-            <a:r>
-              <a:rPr lang="en-US" smtClean="0"/>
+            <a:pPr lvl="0">
+              <a:buNone/>
+            </a:pPr>
+            <a:r>
               <a:t>Click to edit Master text styles</a:t>
             </a:r>
           </a:p>
           <a:p>
-            <a:pPr lvl="1"/>
-            <a:r>
-              <a:rPr lang="en-US" smtClean="0"/>
+            <a:pPr lvl="1">
+              <a:buNone/>
+            </a:pPr>
+            <a:r>
               <a:t>Second level</a:t>
             </a:r>
           </a:p>
           <a:p>
-            <a:pPr lvl="2"/>
-            <a:r>
-              <a:rPr lang="en-US" smtClean="0"/>
+            <a:pPr lvl="2">
+              <a:buNone/>
+            </a:pPr>
+            <a:r>
               <a:t>Third level</a:t>
             </a:r>
           </a:p>
           <a:p>
-            <a:pPr lvl="3"/>
-            <a:r>
-              <a:rPr lang="en-US" smtClean="0"/>
+            <a:pPr lvl="3">
+              <a:buNone/>
+            </a:pPr>
+            <a:r>
               <a:t>Fourth level</a:t>
             </a:r>
           </a:p>
           <a:p>
-            <a:pPr lvl="4"/>
-            <a:r>
-              <a:rPr lang="en-US" smtClean="0"/>
+            <a:pPr lvl="4">
+              <a:buNone/>
+            </a:pPr>
+            <a:r>
               <a:t>Fifth level</a:t>
             </a:r>
-            <a:endParaRPr lang="en-US"/>
-          </a:p>
-        </p:txBody>
-      </p:sp>
-      <p:sp>
-        <p:nvSpPr>
-          <p:cNvPr id="4" name="Date Placeholder 3"/>
-          <p:cNvSpPr>
-            <a:spLocks noGrp="1"/>
-          </p:cNvSpPr>
-          <p:nvPr>
-            <p:ph type="dt" sz="half" idx="10"/>
+          </a:p>
+        </p:txBody>
+      </p:sp>
+      <p:sp>
+        <p:nvSpPr>
+          <p:cNvPr id="4" name="Date Placeholder 3">
+            <a:extLst>
+              <a:ext uri="{FF2B5EF4-FFF2-40B4-BE49-F238E27FC236}">
+                <a16:creationId xmlns:a16="http://schemas.microsoft.com/office/drawing/2014/main" id="{E437A679-FD0C-4EF6-966A-361128F648DD}"/>
+              </a:ext>
+            </a:extLst>
+          </p:cNvPr>
+          <p:cNvSpPr>
+            <a:spLocks noGrp="1"/>
+          </p:cNvSpPr>
+          <p:nvPr>
+            <p:ph type="dt" idx="10"/>
           </p:nvPr>
         </p:nvSpPr>
         <p:spPr/>
@@ -1866,21 +2088,26 @@
           <a:lstStyle/>
           <a:p>
             <a:fld id="{5BCAD085-E8A6-8845-BD4E-CB4CCA059FC4}" type="datetimeFigureOut">
-              <a:rPr lang="en-US" smtClean="0"/>
-              <a:t>1/27/13</a:t>
+              <a:t>9/27/2026</a:t>
             </a:fld>
-            <a:endParaRPr lang="en-US"/>
-          </a:p>
-        </p:txBody>
-      </p:sp>
-      <p:sp>
-        <p:nvSpPr>
-          <p:cNvPr id="5" name="Footer Placeholder 4"/>
-          <p:cNvSpPr>
-            <a:spLocks noGrp="1"/>
-          </p:cNvSpPr>
-          <p:nvPr>
-            <p:ph type="ftr" sz="quarter" idx="11"/>
+            <a:endParaRPr/>
+          </a:p>
+        </p:txBody>
+      </p:sp>
+      <p:sp>
+        <p:nvSpPr>
+          <p:cNvPr id="5" name="Footer Placeholder 4">
+            <a:extLst>
+              <a:ext uri="{FF2B5EF4-FFF2-40B4-BE49-F238E27FC236}">
+                <a16:creationId xmlns:a16="http://schemas.microsoft.com/office/drawing/2014/main" id="{8C4A0811-55E5-4B61-A248-F05AA5ED13B3}"/>
+              </a:ext>
+            </a:extLst>
+          </p:cNvPr>
+          <p:cNvSpPr>
+            <a:spLocks noGrp="1"/>
+          </p:cNvSpPr>
+          <p:nvPr>
+            <p:ph type="ftr" idx="11"/>
           </p:nvPr>
         </p:nvSpPr>
         <p:spPr/>
@@ -1888,18 +2115,24 @@
           <a:bodyPr/>
           <a:lstStyle/>
           <a:p>
-            <a:endParaRPr lang="en-US"/>
-          </a:p>
-        </p:txBody>
-      </p:sp>
-      <p:sp>
-        <p:nvSpPr>
-          <p:cNvPr id="6" name="Slide Number Placeholder 5"/>
-          <p:cNvSpPr>
-            <a:spLocks noGrp="1"/>
-          </p:cNvSpPr>
-          <p:nvPr>
-            <p:ph type="sldNum" sz="quarter" idx="12"/>
+            <a:endParaRPr/>
+          </a:p>
+        </p:txBody>
+      </p:sp>
+      <p:sp>
+        <p:nvSpPr>
+          <p:cNvPr id="6" name="Slide Number Placeholder 5">
+            <a:extLst>
+              <a:ext uri="{FF2B5EF4-FFF2-40B4-BE49-F238E27FC236}">
+                <a16:creationId xmlns:a16="http://schemas.microsoft.com/office/drawing/2014/main" id="{649B0371-1BD0-4C8B-BE0F-5722F5D00045}"/>
+              </a:ext>
+            </a:extLst>
+          </p:cNvPr>
+          <p:cNvSpPr>
+            <a:spLocks noGrp="1"/>
+          </p:cNvSpPr>
+          <p:nvPr>
+            <p:ph type="sldNum" idx="12"/>
           </p:nvPr>
         </p:nvSpPr>
         <p:spPr/>
@@ -1908,19 +2141,13 @@
           <a:lstStyle/>
           <a:p>
             <a:fld id="{C1FF6DA9-008F-8B48-92A6-B652298478BF}" type="slidenum">
-              <a:rPr lang="en-US" smtClean="0"/>
               <a:t>‹#›</a:t>
             </a:fld>
-            <a:endParaRPr lang="en-US"/>
+            <a:endParaRPr/>
           </a:p>
         </p:txBody>
       </p:sp>
     </p:spTree>
-    <p:extLst>
-      <p:ext uri="{BB962C8B-B14F-4D97-AF65-F5344CB8AC3E}">
-        <p14:creationId xmlns:p14="http://schemas.microsoft.com/office/powerpoint/2010/main" val="2614314258"/>
-      </p:ext>
-    </p:extLst>
   </p:cSld>
   <p:clrMapOvr>
     <a:masterClrMapping/>
@@ -1947,7 +2174,13 @@
       </p:grpSpPr>
       <p:sp>
         <p:nvSpPr>
-          <p:cNvPr id="2" name="Title 1"/>
+          <p:cNvPr id="2" name="Title 1">
+            <a:extLst>
+              <a:ext uri="{FF2B5EF4-FFF2-40B4-BE49-F238E27FC236}">
+                <a16:creationId xmlns:a16="http://schemas.microsoft.com/office/drawing/2014/main" id="{68F48AB7-EED4-487A-A363-E4AEE8AB034F}"/>
+              </a:ext>
+            </a:extLst>
+          </p:cNvPr>
           <p:cNvSpPr>
             <a:spLocks noGrp="1"/>
           </p:cNvSpPr>
@@ -1965,21 +2198,26 @@
           <a:bodyPr anchor="t"/>
           <a:lstStyle>
             <a:lvl1pPr algn="l">
+              <a:buNone/>
               <a:defRPr sz="4000" b="1" cap="all"/>
             </a:lvl1pPr>
           </a:lstStyle>
           <a:p>
             <a:r>
-              <a:rPr lang="en-US" smtClean="0"/>
               <a:t>Click to edit Master title style</a:t>
             </a:r>
-            <a:endParaRPr lang="en-US"/>
-          </a:p>
-        </p:txBody>
-      </p:sp>
-      <p:sp>
-        <p:nvSpPr>
-          <p:cNvPr id="3" name="Text Placeholder 2"/>
+          </a:p>
+        </p:txBody>
+      </p:sp>
+      <p:sp>
+        <p:nvSpPr>
+          <p:cNvPr id="3" name="Text Placeholder 2">
+            <a:extLst>
+              <a:ext uri="{FF2B5EF4-FFF2-40B4-BE49-F238E27FC236}">
+                <a16:creationId xmlns:a16="http://schemas.microsoft.com/office/drawing/2014/main" id="{717000BD-B932-44F9-B542-B9FF8F74EC76}"/>
+              </a:ext>
+            </a:extLst>
+          </p:cNvPr>
           <p:cNvSpPr>
             <a:spLocks noGrp="1"/>
           </p:cNvSpPr>
@@ -2088,9 +2326,10 @@
             </a:lvl9pPr>
           </a:lstStyle>
           <a:p>
-            <a:pPr lvl="0"/>
-            <a:r>
-              <a:rPr lang="en-US" smtClean="0"/>
+            <a:pPr lvl="0">
+              <a:buNone/>
+            </a:pPr>
+            <a:r>
               <a:t>Click to edit Master text styles</a:t>
             </a:r>
           </a:p>
@@ -2098,12 +2337,18 @@
       </p:sp>
       <p:sp>
         <p:nvSpPr>
-          <p:cNvPr id="4" name="Date Placeholder 3"/>
-          <p:cNvSpPr>
-            <a:spLocks noGrp="1"/>
-          </p:cNvSpPr>
-          <p:nvPr>
-            <p:ph type="dt" sz="half" idx="10"/>
+          <p:cNvPr id="4" name="Date Placeholder 3">
+            <a:extLst>
+              <a:ext uri="{FF2B5EF4-FFF2-40B4-BE49-F238E27FC236}">
+                <a16:creationId xmlns:a16="http://schemas.microsoft.com/office/drawing/2014/main" id="{45EAD98D-BC1A-4FB1-B1AD-946A55E5F005}"/>
+              </a:ext>
+            </a:extLst>
+          </p:cNvPr>
+          <p:cNvSpPr>
+            <a:spLocks noGrp="1"/>
+          </p:cNvSpPr>
+          <p:nvPr>
+            <p:ph type="dt" idx="10"/>
           </p:nvPr>
         </p:nvSpPr>
         <p:spPr/>
@@ -2112,21 +2357,26 @@
           <a:lstStyle/>
           <a:p>
             <a:fld id="{5BCAD085-E8A6-8845-BD4E-CB4CCA059FC4}" type="datetimeFigureOut">
-              <a:rPr lang="en-US" smtClean="0"/>
-              <a:t>1/27/13</a:t>
+              <a:t>9/27/2026</a:t>
             </a:fld>
-            <a:endParaRPr lang="en-US"/>
-          </a:p>
-        </p:txBody>
-      </p:sp>
-      <p:sp>
-        <p:nvSpPr>
-          <p:cNvPr id="5" name="Footer Placeholder 4"/>
-          <p:cNvSpPr>
-            <a:spLocks noGrp="1"/>
-          </p:cNvSpPr>
-          <p:nvPr>
-            <p:ph type="ftr" sz="quarter" idx="11"/>
+            <a:endParaRPr/>
+          </a:p>
+        </p:txBody>
+      </p:sp>
+      <p:sp>
+        <p:nvSpPr>
+          <p:cNvPr id="5" name="Footer Placeholder 4">
+            <a:extLst>
+              <a:ext uri="{FF2B5EF4-FFF2-40B4-BE49-F238E27FC236}">
+                <a16:creationId xmlns:a16="http://schemas.microsoft.com/office/drawing/2014/main" id="{5C343EF8-7F98-463A-A89A-77EA49C5330A}"/>
+              </a:ext>
+            </a:extLst>
+          </p:cNvPr>
+          <p:cNvSpPr>
+            <a:spLocks noGrp="1"/>
+          </p:cNvSpPr>
+          <p:nvPr>
+            <p:ph type="ftr" idx="11"/>
           </p:nvPr>
         </p:nvSpPr>
         <p:spPr/>
@@ -2134,18 +2384,24 @@
           <a:bodyPr/>
           <a:lstStyle/>
           <a:p>
-            <a:endParaRPr lang="en-US"/>
-          </a:p>
-        </p:txBody>
-      </p:sp>
-      <p:sp>
-        <p:nvSpPr>
-          <p:cNvPr id="6" name="Slide Number Placeholder 5"/>
-          <p:cNvSpPr>
-            <a:spLocks noGrp="1"/>
-          </p:cNvSpPr>
-          <p:nvPr>
-            <p:ph type="sldNum" sz="quarter" idx="12"/>
+            <a:endParaRPr/>
+          </a:p>
+        </p:txBody>
+      </p:sp>
+      <p:sp>
+        <p:nvSpPr>
+          <p:cNvPr id="6" name="Slide Number Placeholder 5">
+            <a:extLst>
+              <a:ext uri="{FF2B5EF4-FFF2-40B4-BE49-F238E27FC236}">
+                <a16:creationId xmlns:a16="http://schemas.microsoft.com/office/drawing/2014/main" id="{E0719879-F9A9-4AD0-877C-C33286B4203A}"/>
+              </a:ext>
+            </a:extLst>
+          </p:cNvPr>
+          <p:cNvSpPr>
+            <a:spLocks noGrp="1"/>
+          </p:cNvSpPr>
+          <p:nvPr>
+            <p:ph type="sldNum" idx="12"/>
           </p:nvPr>
         </p:nvSpPr>
         <p:spPr/>
@@ -2154,19 +2410,13 @@
           <a:lstStyle/>
           <a:p>
             <a:fld id="{C1FF6DA9-008F-8B48-92A6-B652298478BF}" type="slidenum">
-              <a:rPr lang="en-US" smtClean="0"/>
               <a:t>‹#›</a:t>
             </a:fld>
-            <a:endParaRPr lang="en-US"/>
+            <a:endParaRPr/>
           </a:p>
         </p:txBody>
       </p:sp>
     </p:spTree>
-    <p:extLst>
-      <p:ext uri="{BB962C8B-B14F-4D97-AF65-F5344CB8AC3E}">
-        <p14:creationId xmlns:p14="http://schemas.microsoft.com/office/powerpoint/2010/main" val="960648375"/>
-      </p:ext>
-    </p:extLst>
   </p:cSld>
   <p:clrMapOvr>
     <a:masterClrMapping/>
@@ -2193,7 +2443,13 @@
       </p:grpSpPr>
       <p:sp>
         <p:nvSpPr>
-          <p:cNvPr id="2" name="Title 1"/>
+          <p:cNvPr id="2" name="Title 1">
+            <a:extLst>
+              <a:ext uri="{FF2B5EF4-FFF2-40B4-BE49-F238E27FC236}">
+                <a16:creationId xmlns:a16="http://schemas.microsoft.com/office/drawing/2014/main" id="{999EF8BD-A578-4387-BB36-F059EAC5653D}"/>
+              </a:ext>
+            </a:extLst>
+          </p:cNvPr>
           <p:cNvSpPr>
             <a:spLocks noGrp="1"/>
           </p:cNvSpPr>
@@ -2207,21 +2463,25 @@
           <a:lstStyle/>
           <a:p>
             <a:r>
-              <a:rPr lang="en-US" smtClean="0"/>
               <a:t>Click to edit Master title style</a:t>
             </a:r>
-            <a:endParaRPr lang="en-US"/>
-          </a:p>
-        </p:txBody>
-      </p:sp>
-      <p:sp>
-        <p:nvSpPr>
-          <p:cNvPr id="3" name="Content Placeholder 2"/>
-          <p:cNvSpPr>
-            <a:spLocks noGrp="1"/>
-          </p:cNvSpPr>
-          <p:nvPr>
-            <p:ph sz="half" idx="1"/>
+          </a:p>
+        </p:txBody>
+      </p:sp>
+      <p:sp>
+        <p:nvSpPr>
+          <p:cNvPr id="3" name="Content Placeholder 2">
+            <a:extLst>
+              <a:ext uri="{FF2B5EF4-FFF2-40B4-BE49-F238E27FC236}">
+                <a16:creationId xmlns:a16="http://schemas.microsoft.com/office/drawing/2014/main" id="{0F32FA67-5B09-4DE1-B1DE-B4DB38B9F06B}"/>
+              </a:ext>
+            </a:extLst>
+          </p:cNvPr>
+          <p:cNvSpPr>
+            <a:spLocks noGrp="1"/>
+          </p:cNvSpPr>
+          <p:nvPr>
+            <p:ph idx="1"/>
           </p:nvPr>
         </p:nvSpPr>
         <p:spPr>
@@ -2234,79 +2494,98 @@
           <a:bodyPr/>
           <a:lstStyle>
             <a:lvl1pPr>
+              <a:buNone/>
               <a:defRPr sz="2800"/>
             </a:lvl1pPr>
             <a:lvl2pPr>
+              <a:buNone/>
               <a:defRPr sz="2400"/>
             </a:lvl2pPr>
             <a:lvl3pPr>
+              <a:buNone/>
               <a:defRPr sz="2000"/>
             </a:lvl3pPr>
             <a:lvl4pPr>
+              <a:buNone/>
               <a:defRPr sz="1800"/>
             </a:lvl4pPr>
             <a:lvl5pPr>
+              <a:buNone/>
               <a:defRPr sz="1800"/>
             </a:lvl5pPr>
             <a:lvl6pPr>
+              <a:buNone/>
               <a:defRPr sz="1800"/>
             </a:lvl6pPr>
             <a:lvl7pPr>
+              <a:buNone/>
               <a:defRPr sz="1800"/>
             </a:lvl7pPr>
             <a:lvl8pPr>
+              <a:buNone/>
               <a:defRPr sz="1800"/>
             </a:lvl8pPr>
             <a:lvl9pPr>
+              <a:buNone/>
               <a:defRPr sz="1800"/>
             </a:lvl9pPr>
           </a:lstStyle>
           <a:p>
-            <a:pPr lvl="0"/>
-            <a:r>
-              <a:rPr lang="en-US" smtClean="0"/>
+            <a:pPr lvl="0">
+              <a:buNone/>
+            </a:pPr>
+            <a:r>
               <a:t>Click to edit Master text styles</a:t>
             </a:r>
           </a:p>
           <a:p>
-            <a:pPr lvl="1"/>
-            <a:r>
-              <a:rPr lang="en-US" smtClean="0"/>
+            <a:pPr lvl="1">
+              <a:buNone/>
+            </a:pPr>
+            <a:r>
               <a:t>Second level</a:t>
             </a:r>
           </a:p>
           <a:p>
-            <a:pPr lvl="2"/>
-            <a:r>
-              <a:rPr lang="en-US" smtClean="0"/>
+            <a:pPr lvl="2">
+              <a:buNone/>
+            </a:pPr>
+            <a:r>
               <a:t>Third level</a:t>
             </a:r>
           </a:p>
           <a:p>
-            <a:pPr lvl="3"/>
-            <a:r>
-              <a:rPr lang="en-US" smtClean="0"/>
+            <a:pPr lvl="3">
+              <a:buNone/>
+            </a:pPr>
+            <a:r>
               <a:t>Fourth level</a:t>
             </a:r>
           </a:p>
           <a:p>
-            <a:pPr lvl="4"/>
-            <a:r>
-              <a:rPr lang="en-US" smtClean="0"/>
+            <a:pPr lvl="4">
+              <a:buNone/>
+            </a:pPr>
+            <a:r>
               <a:t>Fifth level</a:t>
             </a:r>
-            <a:endParaRPr lang="en-US"/>
-          </a:p>
-        </p:txBody>
-      </p:sp>
-      <p:sp>
-        <p:nvSpPr>
-          <p:cNvPr id="4" name="Content Placeholder 3"/>
-          <p:cNvSpPr>
-            <a:spLocks noGrp="1"/>
-          </p:cNvSpPr>
-          <p:nvPr>
-            <p:ph sz="half" idx="2"/>
+          </a:p>
+        </p:txBody>
+      </p:sp>
+      <p:sp>
+        <p:nvSpPr>
+          <p:cNvPr id="4" name="Content Placeholder 3">
+            <a:extLst>
+              <a:ext uri="{FF2B5EF4-FFF2-40B4-BE49-F238E27FC236}">
+                <a16:creationId xmlns:a16="http://schemas.microsoft.com/office/drawing/2014/main" id="{77B38016-2BCC-4F48-B300-00A7A9AE821D}"/>
+              </a:ext>
+            </a:extLst>
+          </p:cNvPr>
+          <p:cNvSpPr>
+            <a:spLocks noGrp="1"/>
+          </p:cNvSpPr>
+          <p:nvPr>
+            <p:ph idx="2"/>
           </p:nvPr>
         </p:nvSpPr>
         <p:spPr>
@@ -2319,79 +2598,98 @@
           <a:bodyPr/>
           <a:lstStyle>
             <a:lvl1pPr>
+              <a:buNone/>
               <a:defRPr sz="2800"/>
             </a:lvl1pPr>
             <a:lvl2pPr>
+              <a:buNone/>
               <a:defRPr sz="2400"/>
             </a:lvl2pPr>
             <a:lvl3pPr>
+              <a:buNone/>
               <a:defRPr sz="2000"/>
             </a:lvl3pPr>
             <a:lvl4pPr>
+              <a:buNone/>
               <a:defRPr sz="1800"/>
             </a:lvl4pPr>
             <a:lvl5pPr>
+              <a:buNone/>
               <a:defRPr sz="1800"/>
             </a:lvl5pPr>
             <a:lvl6pPr>
+              <a:buNone/>
               <a:defRPr sz="1800"/>
             </a:lvl6pPr>
             <a:lvl7pPr>
+              <a:buNone/>
               <a:defRPr sz="1800"/>
             </a:lvl7pPr>
             <a:lvl8pPr>
+              <a:buNone/>
               <a:defRPr sz="1800"/>
             </a:lvl8pPr>
             <a:lvl9pPr>
+              <a:buNone/>
               <a:defRPr sz="1800"/>
             </a:lvl9pPr>
           </a:lstStyle>
           <a:p>
-            <a:pPr lvl="0"/>
-            <a:r>
-              <a:rPr lang="en-US" smtClean="0"/>
+            <a:pPr lvl="0">
+              <a:buNone/>
+            </a:pPr>
+            <a:r>
               <a:t>Click to edit Master text styles</a:t>
             </a:r>
           </a:p>
           <a:p>
-            <a:pPr lvl="1"/>
-            <a:r>
-              <a:rPr lang="en-US" smtClean="0"/>
+            <a:pPr lvl="1">
+              <a:buNone/>
+            </a:pPr>
+            <a:r>
               <a:t>Second level</a:t>
             </a:r>
           </a:p>
           <a:p>
-            <a:pPr lvl="2"/>
-            <a:r>
-              <a:rPr lang="en-US" smtClean="0"/>
+            <a:pPr lvl="2">
+              <a:buNone/>
+            </a:pPr>
+            <a:r>
               <a:t>Third level</a:t>
             </a:r>
           </a:p>
           <a:p>
-            <a:pPr lvl="3"/>
-            <a:r>
-              <a:rPr lang="en-US" smtClean="0"/>
+            <a:pPr lvl="3">
+              <a:buNone/>
+            </a:pPr>
+            <a:r>
               <a:t>Fourth level</a:t>
             </a:r>
           </a:p>
           <a:p>
-            <a:pPr lvl="4"/>
-            <a:r>
-              <a:rPr lang="en-US" smtClean="0"/>
+            <a:pPr lvl="4">
+              <a:buNone/>
+            </a:pPr>
+            <a:r>
               <a:t>Fifth level</a:t>
             </a:r>
-            <a:endParaRPr lang="en-US"/>
-          </a:p>
-        </p:txBody>
-      </p:sp>
-      <p:sp>
-        <p:nvSpPr>
-          <p:cNvPr id="5" name="Date Placeholder 4"/>
-          <p:cNvSpPr>
-            <a:spLocks noGrp="1"/>
-          </p:cNvSpPr>
-          <p:nvPr>
-            <p:ph type="dt" sz="half" idx="10"/>
+          </a:p>
+        </p:txBody>
+      </p:sp>
+      <p:sp>
+        <p:nvSpPr>
+          <p:cNvPr id="5" name="Date Placeholder 4">
+            <a:extLst>
+              <a:ext uri="{FF2B5EF4-FFF2-40B4-BE49-F238E27FC236}">
+                <a16:creationId xmlns:a16="http://schemas.microsoft.com/office/drawing/2014/main" id="{A54B241E-B3A3-4B71-B89E-5F31947AEB9A}"/>
+              </a:ext>
+            </a:extLst>
+          </p:cNvPr>
+          <p:cNvSpPr>
+            <a:spLocks noGrp="1"/>
+          </p:cNvSpPr>
+          <p:nvPr>
+            <p:ph type="dt" idx="10"/>
           </p:nvPr>
         </p:nvSpPr>
         <p:spPr/>
@@ -2400,21 +2698,26 @@
           <a:lstStyle/>
           <a:p>
             <a:fld id="{5BCAD085-E8A6-8845-BD4E-CB4CCA059FC4}" type="datetimeFigureOut">
-              <a:rPr lang="en-US" smtClean="0"/>
-              <a:t>1/27/13</a:t>
+              <a:t>9/27/2026</a:t>
             </a:fld>
-            <a:endParaRPr lang="en-US"/>
-          </a:p>
-        </p:txBody>
-      </p:sp>
-      <p:sp>
-        <p:nvSpPr>
-          <p:cNvPr id="6" name="Footer Placeholder 5"/>
-          <p:cNvSpPr>
-            <a:spLocks noGrp="1"/>
-          </p:cNvSpPr>
-          <p:nvPr>
-            <p:ph type="ftr" sz="quarter" idx="11"/>
+            <a:endParaRPr/>
+          </a:p>
+        </p:txBody>
+      </p:sp>
+      <p:sp>
+        <p:nvSpPr>
+          <p:cNvPr id="6" name="Footer Placeholder 5">
+            <a:extLst>
+              <a:ext uri="{FF2B5EF4-FFF2-40B4-BE49-F238E27FC236}">
+                <a16:creationId xmlns:a16="http://schemas.microsoft.com/office/drawing/2014/main" id="{066CBD14-56A7-4368-A906-408EA2A7931D}"/>
+              </a:ext>
+            </a:extLst>
+          </p:cNvPr>
+          <p:cNvSpPr>
+            <a:spLocks noGrp="1"/>
+          </p:cNvSpPr>
+          <p:nvPr>
+            <p:ph type="ftr" idx="11"/>
           </p:nvPr>
         </p:nvSpPr>
         <p:spPr/>
@@ -2422,18 +2725,24 @@
           <a:bodyPr/>
           <a:lstStyle/>
           <a:p>
-            <a:endParaRPr lang="en-US"/>
-          </a:p>
-        </p:txBody>
-      </p:sp>
-      <p:sp>
-        <p:nvSpPr>
-          <p:cNvPr id="7" name="Slide Number Placeholder 6"/>
-          <p:cNvSpPr>
-            <a:spLocks noGrp="1"/>
-          </p:cNvSpPr>
-          <p:nvPr>
-            <p:ph type="sldNum" sz="quarter" idx="12"/>
+            <a:endParaRPr/>
+          </a:p>
+        </p:txBody>
+      </p:sp>
+      <p:sp>
+        <p:nvSpPr>
+          <p:cNvPr id="7" name="Slide Number Placeholder 6">
+            <a:extLst>
+              <a:ext uri="{FF2B5EF4-FFF2-40B4-BE49-F238E27FC236}">
+                <a16:creationId xmlns:a16="http://schemas.microsoft.com/office/drawing/2014/main" id="{ACD8DE49-8B1F-4CAB-92C5-82E0B6C9D0FD}"/>
+              </a:ext>
+            </a:extLst>
+          </p:cNvPr>
+          <p:cNvSpPr>
+            <a:spLocks noGrp="1"/>
+          </p:cNvSpPr>
+          <p:nvPr>
+            <p:ph type="sldNum" idx="12"/>
           </p:nvPr>
         </p:nvSpPr>
         <p:spPr/>
@@ -2442,19 +2751,13 @@
           <a:lstStyle/>
           <a:p>
             <a:fld id="{C1FF6DA9-008F-8B48-92A6-B652298478BF}" type="slidenum">
-              <a:rPr lang="en-US" smtClean="0"/>
               <a:t>‹#›</a:t>
             </a:fld>
-            <a:endParaRPr lang="en-US"/>
+            <a:endParaRPr/>
           </a:p>
         </p:txBody>
       </p:sp>
     </p:spTree>
-    <p:extLst>
-      <p:ext uri="{BB962C8B-B14F-4D97-AF65-F5344CB8AC3E}">
-        <p14:creationId xmlns:p14="http://schemas.microsoft.com/office/powerpoint/2010/main" val="2782244947"/>
-      </p:ext>
-    </p:extLst>
   </p:cSld>
   <p:clrMapOvr>
     <a:masterClrMapping/>
@@ -2481,7 +2784,13 @@
       </p:grpSpPr>
       <p:sp>
         <p:nvSpPr>
-          <p:cNvPr id="2" name="Title 1"/>
+          <p:cNvPr id="2" name="Title 1">
+            <a:extLst>
+              <a:ext uri="{FF2B5EF4-FFF2-40B4-BE49-F238E27FC236}">
+                <a16:creationId xmlns:a16="http://schemas.microsoft.com/office/drawing/2014/main" id="{A1A8A0D2-C5A8-4A65-80AB-F674FD496849}"/>
+              </a:ext>
+            </a:extLst>
+          </p:cNvPr>
           <p:cNvSpPr>
             <a:spLocks noGrp="1"/>
           </p:cNvSpPr>
@@ -2494,21 +2803,26 @@
           <a:bodyPr/>
           <a:lstStyle>
             <a:lvl1pPr>
+              <a:buNone/>
               <a:defRPr/>
             </a:lvl1pPr>
           </a:lstStyle>
           <a:p>
             <a:r>
-              <a:rPr lang="en-US" smtClean="0"/>
               <a:t>Click to edit Master title style</a:t>
             </a:r>
-            <a:endParaRPr lang="en-US"/>
-          </a:p>
-        </p:txBody>
-      </p:sp>
-      <p:sp>
-        <p:nvSpPr>
-          <p:cNvPr id="3" name="Text Placeholder 2"/>
+          </a:p>
+        </p:txBody>
+      </p:sp>
+      <p:sp>
+        <p:nvSpPr>
+          <p:cNvPr id="3" name="Text Placeholder 2">
+            <a:extLst>
+              <a:ext uri="{FF2B5EF4-FFF2-40B4-BE49-F238E27FC236}">
+                <a16:creationId xmlns:a16="http://schemas.microsoft.com/office/drawing/2014/main" id="{C876B16E-190D-436F-8E21-80C01203DAEA}"/>
+              </a:ext>
+            </a:extLst>
+          </p:cNvPr>
           <p:cNvSpPr>
             <a:spLocks noGrp="1"/>
           </p:cNvSpPr>
@@ -2563,9 +2877,10 @@
             </a:lvl9pPr>
           </a:lstStyle>
           <a:p>
-            <a:pPr lvl="0"/>
-            <a:r>
-              <a:rPr lang="en-US" smtClean="0"/>
+            <a:pPr lvl="0">
+              <a:buNone/>
+            </a:pPr>
+            <a:r>
               <a:t>Click to edit Master text styles</a:t>
             </a:r>
           </a:p>
@@ -2573,12 +2888,18 @@
       </p:sp>
       <p:sp>
         <p:nvSpPr>
-          <p:cNvPr id="4" name="Content Placeholder 3"/>
-          <p:cNvSpPr>
-            <a:spLocks noGrp="1"/>
-          </p:cNvSpPr>
-          <p:nvPr>
-            <p:ph sz="half" idx="2"/>
+          <p:cNvPr id="4" name="Content Placeholder 3">
+            <a:extLst>
+              <a:ext uri="{FF2B5EF4-FFF2-40B4-BE49-F238E27FC236}">
+                <a16:creationId xmlns:a16="http://schemas.microsoft.com/office/drawing/2014/main" id="{02AFFE8F-CA4E-4B79-A6D4-AAB613913553}"/>
+              </a:ext>
+            </a:extLst>
+          </p:cNvPr>
+          <p:cNvSpPr>
+            <a:spLocks noGrp="1"/>
+          </p:cNvSpPr>
+          <p:nvPr>
+            <p:ph idx="2"/>
           </p:nvPr>
         </p:nvSpPr>
         <p:spPr>
@@ -2591,79 +2912,98 @@
           <a:bodyPr/>
           <a:lstStyle>
             <a:lvl1pPr>
+              <a:buNone/>
               <a:defRPr sz="2400"/>
             </a:lvl1pPr>
             <a:lvl2pPr>
+              <a:buNone/>
               <a:defRPr sz="2000"/>
             </a:lvl2pPr>
             <a:lvl3pPr>
+              <a:buNone/>
               <a:defRPr sz="1800"/>
             </a:lvl3pPr>
             <a:lvl4pPr>
+              <a:buNone/>
               <a:defRPr sz="1600"/>
             </a:lvl4pPr>
             <a:lvl5pPr>
+              <a:buNone/>
               <a:defRPr sz="1600"/>
             </a:lvl5pPr>
             <a:lvl6pPr>
+              <a:buNone/>
               <a:defRPr sz="1600"/>
             </a:lvl6pPr>
             <a:lvl7pPr>
+              <a:buNone/>
               <a:defRPr sz="1600"/>
             </a:lvl7pPr>
             <a:lvl8pPr>
+              <a:buNone/>
               <a:defRPr sz="1600"/>
             </a:lvl8pPr>
             <a:lvl9pPr>
+              <a:buNone/>
               <a:defRPr sz="1600"/>
             </a:lvl9pPr>
           </a:lstStyle>
           <a:p>
-            <a:pPr lvl="0"/>
-            <a:r>
-              <a:rPr lang="en-US" smtClean="0"/>
+            <a:pPr lvl="0">
+              <a:buNone/>
+            </a:pPr>
+            <a:r>
               <a:t>Click to edit Master text styles</a:t>
             </a:r>
           </a:p>
           <a:p>
-            <a:pPr lvl="1"/>
-            <a:r>
-              <a:rPr lang="en-US" smtClean="0"/>
+            <a:pPr lvl="1">
+              <a:buNone/>
+            </a:pPr>
+            <a:r>
               <a:t>Second level</a:t>
             </a:r>
           </a:p>
           <a:p>
-            <a:pPr lvl="2"/>
-            <a:r>
-              <a:rPr lang="en-US" smtClean="0"/>
+            <a:pPr lvl="2">
+              <a:buNone/>
+            </a:pPr>
+            <a:r>
               <a:t>Third level</a:t>
             </a:r>
           </a:p>
           <a:p>
-            <a:pPr lvl="3"/>
-            <a:r>
-              <a:rPr lang="en-US" smtClean="0"/>
+            <a:pPr lvl="3">
+              <a:buNone/>
+            </a:pPr>
+            <a:r>
               <a:t>Fourth level</a:t>
             </a:r>
           </a:p>
           <a:p>
-            <a:pPr lvl="4"/>
-            <a:r>
-              <a:rPr lang="en-US" smtClean="0"/>
+            <a:pPr lvl="4">
+              <a:buNone/>
+            </a:pPr>
+            <a:r>
               <a:t>Fifth level</a:t>
             </a:r>
-            <a:endParaRPr lang="en-US"/>
-          </a:p>
-        </p:txBody>
-      </p:sp>
-      <p:sp>
-        <p:nvSpPr>
-          <p:cNvPr id="5" name="Text Placeholder 4"/>
-          <p:cNvSpPr>
-            <a:spLocks noGrp="1"/>
-          </p:cNvSpPr>
-          <p:nvPr>
-            <p:ph type="body" sz="quarter" idx="3"/>
+          </a:p>
+        </p:txBody>
+      </p:sp>
+      <p:sp>
+        <p:nvSpPr>
+          <p:cNvPr id="5" name="Text Placeholder 4">
+            <a:extLst>
+              <a:ext uri="{FF2B5EF4-FFF2-40B4-BE49-F238E27FC236}">
+                <a16:creationId xmlns:a16="http://schemas.microsoft.com/office/drawing/2014/main" id="{3D26127F-9EDE-439D-9B31-1C07BC23CCC5}"/>
+              </a:ext>
+            </a:extLst>
+          </p:cNvPr>
+          <p:cNvSpPr>
+            <a:spLocks noGrp="1"/>
+          </p:cNvSpPr>
+          <p:nvPr>
+            <p:ph type="body" idx="3"/>
           </p:nvPr>
         </p:nvSpPr>
         <p:spPr>
@@ -2713,9 +3053,10 @@
             </a:lvl9pPr>
           </a:lstStyle>
           <a:p>
-            <a:pPr lvl="0"/>
-            <a:r>
-              <a:rPr lang="en-US" smtClean="0"/>
+            <a:pPr lvl="0">
+              <a:buNone/>
+            </a:pPr>
+            <a:r>
               <a:t>Click to edit Master text styles</a:t>
             </a:r>
           </a:p>
@@ -2723,12 +3064,18 @@
       </p:sp>
       <p:sp>
         <p:nvSpPr>
-          <p:cNvPr id="6" name="Content Placeholder 5"/>
-          <p:cNvSpPr>
-            <a:spLocks noGrp="1"/>
-          </p:cNvSpPr>
-          <p:nvPr>
-            <p:ph sz="quarter" idx="4"/>
+          <p:cNvPr id="6" name="Content Placeholder 5">
+            <a:extLst>
+              <a:ext uri="{FF2B5EF4-FFF2-40B4-BE49-F238E27FC236}">
+                <a16:creationId xmlns:a16="http://schemas.microsoft.com/office/drawing/2014/main" id="{D4079F1B-7F84-4BBE-8170-A4A3BFA46D46}"/>
+              </a:ext>
+            </a:extLst>
+          </p:cNvPr>
+          <p:cNvSpPr>
+            <a:spLocks noGrp="1"/>
+          </p:cNvSpPr>
+          <p:nvPr>
+            <p:ph idx="4"/>
           </p:nvPr>
         </p:nvSpPr>
         <p:spPr>
@@ -2741,79 +3088,98 @@
           <a:bodyPr/>
           <a:lstStyle>
             <a:lvl1pPr>
+              <a:buNone/>
               <a:defRPr sz="2400"/>
             </a:lvl1pPr>
             <a:lvl2pPr>
+              <a:buNone/>
               <a:defRPr sz="2000"/>
             </a:lvl2pPr>
             <a:lvl3pPr>
+              <a:buNone/>
               <a:defRPr sz="1800"/>
             </a:lvl3pPr>
             <a:lvl4pPr>
+              <a:buNone/>
               <a:defRPr sz="1600"/>
             </a:lvl4pPr>
             <a:lvl5pPr>
+              <a:buNone/>
               <a:defRPr sz="1600"/>
             </a:lvl5pPr>
             <a:lvl6pPr>
+              <a:buNone/>
               <a:defRPr sz="1600"/>
             </a:lvl6pPr>
             <a:lvl7pPr>
+              <a:buNone/>
               <a:defRPr sz="1600"/>
             </a:lvl7pPr>
             <a:lvl8pPr>
+              <a:buNone/>
               <a:defRPr sz="1600"/>
             </a:lvl8pPr>
             <a:lvl9pPr>
+              <a:buNone/>
               <a:defRPr sz="1600"/>
             </a:lvl9pPr>
           </a:lstStyle>
           <a:p>
-            <a:pPr lvl="0"/>
-            <a:r>
-              <a:rPr lang="en-US" smtClean="0"/>
+            <a:pPr lvl="0">
+              <a:buNone/>
+            </a:pPr>
+            <a:r>
               <a:t>Click to edit Master text styles</a:t>
             </a:r>
           </a:p>
           <a:p>
-            <a:pPr lvl="1"/>
-            <a:r>
-              <a:rPr lang="en-US" smtClean="0"/>
+            <a:pPr lvl="1">
+              <a:buNone/>
+            </a:pPr>
+            <a:r>
               <a:t>Second level</a:t>
             </a:r>
           </a:p>
           <a:p>
-            <a:pPr lvl="2"/>
-            <a:r>
-              <a:rPr lang="en-US" smtClean="0"/>
+            <a:pPr lvl="2">
+              <a:buNone/>
+            </a:pPr>
+            <a:r>
               <a:t>Third level</a:t>
             </a:r>
           </a:p>
           <a:p>
-            <a:pPr lvl="3"/>
-            <a:r>
-              <a:rPr lang="en-US" smtClean="0"/>
+            <a:pPr lvl="3">
+              <a:buNone/>
+            </a:pPr>
+            <a:r>
               <a:t>Fourth level</a:t>
             </a:r>
           </a:p>
           <a:p>
-            <a:pPr lvl="4"/>
-            <a:r>
-              <a:rPr lang="en-US" smtClean="0"/>
+            <a:pPr lvl="4">
+              <a:buNone/>
+            </a:pPr>
+            <a:r>
               <a:t>Fifth level</a:t>
             </a:r>
-            <a:endParaRPr lang="en-US"/>
-          </a:p>
-        </p:txBody>
-      </p:sp>
-      <p:sp>
-        <p:nvSpPr>
-          <p:cNvPr id="7" name="Date Placeholder 6"/>
-          <p:cNvSpPr>
-            <a:spLocks noGrp="1"/>
-          </p:cNvSpPr>
-          <p:nvPr>
-            <p:ph type="dt" sz="half" idx="10"/>
+          </a:p>
+        </p:txBody>
+      </p:sp>
+      <p:sp>
+        <p:nvSpPr>
+          <p:cNvPr id="7" name="Date Placeholder 6">
+            <a:extLst>
+              <a:ext uri="{FF2B5EF4-FFF2-40B4-BE49-F238E27FC236}">
+                <a16:creationId xmlns:a16="http://schemas.microsoft.com/office/drawing/2014/main" id="{83A0BAEC-91E7-4470-AB56-9F3074E75660}"/>
+              </a:ext>
+            </a:extLst>
+          </p:cNvPr>
+          <p:cNvSpPr>
+            <a:spLocks noGrp="1"/>
+          </p:cNvSpPr>
+          <p:nvPr>
+            <p:ph type="dt" idx="10"/>
           </p:nvPr>
         </p:nvSpPr>
         <p:spPr/>
@@ -2822,21 +3188,26 @@
           <a:lstStyle/>
           <a:p>
             <a:fld id="{5BCAD085-E8A6-8845-BD4E-CB4CCA059FC4}" type="datetimeFigureOut">
-              <a:rPr lang="en-US" smtClean="0"/>
-              <a:t>1/27/13</a:t>
+              <a:t>9/27/2026</a:t>
             </a:fld>
-            <a:endParaRPr lang="en-US"/>
-          </a:p>
-        </p:txBody>
-      </p:sp>
-      <p:sp>
-        <p:nvSpPr>
-          <p:cNvPr id="8" name="Footer Placeholder 7"/>
-          <p:cNvSpPr>
-            <a:spLocks noGrp="1"/>
-          </p:cNvSpPr>
-          <p:nvPr>
-            <p:ph type="ftr" sz="quarter" idx="11"/>
+            <a:endParaRPr/>
+          </a:p>
+        </p:txBody>
+      </p:sp>
+      <p:sp>
+        <p:nvSpPr>
+          <p:cNvPr id="8" name="Footer Placeholder 7">
+            <a:extLst>
+              <a:ext uri="{FF2B5EF4-FFF2-40B4-BE49-F238E27FC236}">
+                <a16:creationId xmlns:a16="http://schemas.microsoft.com/office/drawing/2014/main" id="{FD1E4B0F-A47E-485B-BF7E-742C198BD2BB}"/>
+              </a:ext>
+            </a:extLst>
+          </p:cNvPr>
+          <p:cNvSpPr>
+            <a:spLocks noGrp="1"/>
+          </p:cNvSpPr>
+          <p:nvPr>
+            <p:ph type="ftr" idx="11"/>
           </p:nvPr>
         </p:nvSpPr>
         <p:spPr/>
@@ -2844,18 +3215,24 @@
           <a:bodyPr/>
           <a:lstStyle/>
           <a:p>
-            <a:endParaRPr lang="en-US"/>
-          </a:p>
-        </p:txBody>
-      </p:sp>
-      <p:sp>
-        <p:nvSpPr>
-          <p:cNvPr id="9" name="Slide Number Placeholder 8"/>
-          <p:cNvSpPr>
-            <a:spLocks noGrp="1"/>
-          </p:cNvSpPr>
-          <p:nvPr>
-            <p:ph type="sldNum" sz="quarter" idx="12"/>
+            <a:endParaRPr/>
+          </a:p>
+        </p:txBody>
+      </p:sp>
+      <p:sp>
+        <p:nvSpPr>
+          <p:cNvPr id="9" name="Slide Number Placeholder 8">
+            <a:extLst>
+              <a:ext uri="{FF2B5EF4-FFF2-40B4-BE49-F238E27FC236}">
+                <a16:creationId xmlns:a16="http://schemas.microsoft.com/office/drawing/2014/main" id="{9B278ADA-CA40-4908-A4B9-2471894FDA31}"/>
+              </a:ext>
+            </a:extLst>
+          </p:cNvPr>
+          <p:cNvSpPr>
+            <a:spLocks noGrp="1"/>
+          </p:cNvSpPr>
+          <p:nvPr>
+            <p:ph type="sldNum" idx="12"/>
           </p:nvPr>
         </p:nvSpPr>
         <p:spPr/>
@@ -2864,19 +3241,13 @@
           <a:lstStyle/>
           <a:p>
             <a:fld id="{C1FF6DA9-008F-8B48-92A6-B652298478BF}" type="slidenum">
-              <a:rPr lang="en-US" smtClean="0"/>
               <a:t>‹#›</a:t>
             </a:fld>
-            <a:endParaRPr lang="en-US"/>
+            <a:endParaRPr/>
           </a:p>
         </p:txBody>
       </p:sp>
     </p:spTree>
-    <p:extLst>
-      <p:ext uri="{BB962C8B-B14F-4D97-AF65-F5344CB8AC3E}">
-        <p14:creationId xmlns:p14="http://schemas.microsoft.com/office/powerpoint/2010/main" val="990158736"/>
-      </p:ext>
-    </p:extLst>
   </p:cSld>
   <p:clrMapOvr>
     <a:masterClrMapping/>
@@ -2903,7 +3274,13 @@
       </p:grpSpPr>
       <p:sp>
         <p:nvSpPr>
-          <p:cNvPr id="2" name="Title 1"/>
+          <p:cNvPr id="2" name="Title 1">
+            <a:extLst>
+              <a:ext uri="{FF2B5EF4-FFF2-40B4-BE49-F238E27FC236}">
+                <a16:creationId xmlns:a16="http://schemas.microsoft.com/office/drawing/2014/main" id="{F3DB9C04-3C8A-4ECD-98C3-E8C07B051F03}"/>
+              </a:ext>
+            </a:extLst>
+          </p:cNvPr>
           <p:cNvSpPr>
             <a:spLocks noGrp="1"/>
           </p:cNvSpPr>
@@ -2917,21 +3294,25 @@
           <a:lstStyle/>
           <a:p>
             <a:r>
-              <a:rPr lang="en-US" smtClean="0"/>
               <a:t>Click to edit Master title style</a:t>
             </a:r>
-            <a:endParaRPr lang="en-US"/>
-          </a:p>
-        </p:txBody>
-      </p:sp>
-      <p:sp>
-        <p:nvSpPr>
-          <p:cNvPr id="3" name="Date Placeholder 2"/>
-          <p:cNvSpPr>
-            <a:spLocks noGrp="1"/>
-          </p:cNvSpPr>
-          <p:nvPr>
-            <p:ph type="dt" sz="half" idx="10"/>
+          </a:p>
+        </p:txBody>
+      </p:sp>
+      <p:sp>
+        <p:nvSpPr>
+          <p:cNvPr id="3" name="Date Placeholder 2">
+            <a:extLst>
+              <a:ext uri="{FF2B5EF4-FFF2-40B4-BE49-F238E27FC236}">
+                <a16:creationId xmlns:a16="http://schemas.microsoft.com/office/drawing/2014/main" id="{909FFDE9-307A-4E31-9D21-1FA0A2A77B9E}"/>
+              </a:ext>
+            </a:extLst>
+          </p:cNvPr>
+          <p:cNvSpPr>
+            <a:spLocks noGrp="1"/>
+          </p:cNvSpPr>
+          <p:nvPr>
+            <p:ph type="dt" idx="10"/>
           </p:nvPr>
         </p:nvSpPr>
         <p:spPr/>
@@ -2940,21 +3321,26 @@
           <a:lstStyle/>
           <a:p>
             <a:fld id="{5BCAD085-E8A6-8845-BD4E-CB4CCA059FC4}" type="datetimeFigureOut">
-              <a:rPr lang="en-US" smtClean="0"/>
-              <a:t>1/27/13</a:t>
+              <a:t>9/27/2026</a:t>
             </a:fld>
-            <a:endParaRPr lang="en-US"/>
-          </a:p>
-        </p:txBody>
-      </p:sp>
-      <p:sp>
-        <p:nvSpPr>
-          <p:cNvPr id="4" name="Footer Placeholder 3"/>
-          <p:cNvSpPr>
-            <a:spLocks noGrp="1"/>
-          </p:cNvSpPr>
-          <p:nvPr>
-            <p:ph type="ftr" sz="quarter" idx="11"/>
+            <a:endParaRPr/>
+          </a:p>
+        </p:txBody>
+      </p:sp>
+      <p:sp>
+        <p:nvSpPr>
+          <p:cNvPr id="4" name="Footer Placeholder 3">
+            <a:extLst>
+              <a:ext uri="{FF2B5EF4-FFF2-40B4-BE49-F238E27FC236}">
+                <a16:creationId xmlns:a16="http://schemas.microsoft.com/office/drawing/2014/main" id="{ACECA23F-85C6-45B7-9E44-47393EB6817A}"/>
+              </a:ext>
+            </a:extLst>
+          </p:cNvPr>
+          <p:cNvSpPr>
+            <a:spLocks noGrp="1"/>
+          </p:cNvSpPr>
+          <p:nvPr>
+            <p:ph type="ftr" idx="11"/>
           </p:nvPr>
         </p:nvSpPr>
         <p:spPr/>
@@ -2962,18 +3348,24 @@
           <a:bodyPr/>
           <a:lstStyle/>
           <a:p>
-            <a:endParaRPr lang="en-US"/>
-          </a:p>
-        </p:txBody>
-      </p:sp>
-      <p:sp>
-        <p:nvSpPr>
-          <p:cNvPr id="5" name="Slide Number Placeholder 4"/>
-          <p:cNvSpPr>
-            <a:spLocks noGrp="1"/>
-          </p:cNvSpPr>
-          <p:nvPr>
-            <p:ph type="sldNum" sz="quarter" idx="12"/>
+            <a:endParaRPr/>
+          </a:p>
+        </p:txBody>
+      </p:sp>
+      <p:sp>
+        <p:nvSpPr>
+          <p:cNvPr id="5" name="Slide Number Placeholder 4">
+            <a:extLst>
+              <a:ext uri="{FF2B5EF4-FFF2-40B4-BE49-F238E27FC236}">
+                <a16:creationId xmlns:a16="http://schemas.microsoft.com/office/drawing/2014/main" id="{6890FA59-86D3-45B9-B219-1BA6E8FCBA4B}"/>
+              </a:ext>
+            </a:extLst>
+          </p:cNvPr>
+          <p:cNvSpPr>
+            <a:spLocks noGrp="1"/>
+          </p:cNvSpPr>
+          <p:nvPr>
+            <p:ph type="sldNum" idx="12"/>
           </p:nvPr>
         </p:nvSpPr>
         <p:spPr/>
@@ -2982,19 +3374,13 @@
           <a:lstStyle/>
           <a:p>
             <a:fld id="{C1FF6DA9-008F-8B48-92A6-B652298478BF}" type="slidenum">
-              <a:rPr lang="en-US" smtClean="0"/>
               <a:t>‹#›</a:t>
             </a:fld>
-            <a:endParaRPr lang="en-US"/>
+            <a:endParaRPr/>
           </a:p>
         </p:txBody>
       </p:sp>
     </p:spTree>
-    <p:extLst>
-      <p:ext uri="{BB962C8B-B14F-4D97-AF65-F5344CB8AC3E}">
-        <p14:creationId xmlns:p14="http://schemas.microsoft.com/office/powerpoint/2010/main" val="727027711"/>
-      </p:ext>
-    </p:extLst>
   </p:cSld>
   <p:clrMapOvr>
     <a:masterClrMapping/>
@@ -3021,12 +3407,18 @@
       </p:grpSpPr>
       <p:sp>
         <p:nvSpPr>
-          <p:cNvPr id="2" name="Date Placeholder 1"/>
-          <p:cNvSpPr>
-            <a:spLocks noGrp="1"/>
-          </p:cNvSpPr>
-          <p:nvPr>
-            <p:ph type="dt" sz="half" idx="10"/>
+          <p:cNvPr id="2" name="Date Placeholder 1">
+            <a:extLst>
+              <a:ext uri="{FF2B5EF4-FFF2-40B4-BE49-F238E27FC236}">
+                <a16:creationId xmlns:a16="http://schemas.microsoft.com/office/drawing/2014/main" id="{8DA8634E-F7B4-4AD3-A6B6-2A951927EC50}"/>
+              </a:ext>
+            </a:extLst>
+          </p:cNvPr>
+          <p:cNvSpPr>
+            <a:spLocks noGrp="1"/>
+          </p:cNvSpPr>
+          <p:nvPr>
+            <p:ph type="dt" idx="10"/>
           </p:nvPr>
         </p:nvSpPr>
         <p:spPr/>
@@ -3035,21 +3427,26 @@
           <a:lstStyle/>
           <a:p>
             <a:fld id="{5BCAD085-E8A6-8845-BD4E-CB4CCA059FC4}" type="datetimeFigureOut">
-              <a:rPr lang="en-US" smtClean="0"/>
-              <a:t>1/27/13</a:t>
+              <a:t>9/27/2026</a:t>
             </a:fld>
-            <a:endParaRPr lang="en-US"/>
-          </a:p>
-        </p:txBody>
-      </p:sp>
-      <p:sp>
-        <p:nvSpPr>
-          <p:cNvPr id="3" name="Footer Placeholder 2"/>
-          <p:cNvSpPr>
-            <a:spLocks noGrp="1"/>
-          </p:cNvSpPr>
-          <p:nvPr>
-            <p:ph type="ftr" sz="quarter" idx="11"/>
+            <a:endParaRPr/>
+          </a:p>
+        </p:txBody>
+      </p:sp>
+      <p:sp>
+        <p:nvSpPr>
+          <p:cNvPr id="3" name="Footer Placeholder 2">
+            <a:extLst>
+              <a:ext uri="{FF2B5EF4-FFF2-40B4-BE49-F238E27FC236}">
+                <a16:creationId xmlns:a16="http://schemas.microsoft.com/office/drawing/2014/main" id="{53AF1EAA-AA91-46F7-B6C2-4F6978073A2F}"/>
+              </a:ext>
+            </a:extLst>
+          </p:cNvPr>
+          <p:cNvSpPr>
+            <a:spLocks noGrp="1"/>
+          </p:cNvSpPr>
+          <p:nvPr>
+            <p:ph type="ftr" idx="11"/>
           </p:nvPr>
         </p:nvSpPr>
         <p:spPr/>
@@ -3057,18 +3454,24 @@
           <a:bodyPr/>
           <a:lstStyle/>
           <a:p>
-            <a:endParaRPr lang="en-US"/>
-          </a:p>
-        </p:txBody>
-      </p:sp>
-      <p:sp>
-        <p:nvSpPr>
-          <p:cNvPr id="4" name="Slide Number Placeholder 3"/>
-          <p:cNvSpPr>
-            <a:spLocks noGrp="1"/>
-          </p:cNvSpPr>
-          <p:nvPr>
-            <p:ph type="sldNum" sz="quarter" idx="12"/>
+            <a:endParaRPr/>
+          </a:p>
+        </p:txBody>
+      </p:sp>
+      <p:sp>
+        <p:nvSpPr>
+          <p:cNvPr id="4" name="Slide Number Placeholder 3">
+            <a:extLst>
+              <a:ext uri="{FF2B5EF4-FFF2-40B4-BE49-F238E27FC236}">
+                <a16:creationId xmlns:a16="http://schemas.microsoft.com/office/drawing/2014/main" id="{779CA83B-D4E8-49C4-8D9D-EC8F83DD4D34}"/>
+              </a:ext>
+            </a:extLst>
+          </p:cNvPr>
+          <p:cNvSpPr>
+            <a:spLocks noGrp="1"/>
+          </p:cNvSpPr>
+          <p:nvPr>
+            <p:ph type="sldNum" idx="12"/>
           </p:nvPr>
         </p:nvSpPr>
         <p:spPr/>
@@ -3077,19 +3480,13 @@
           <a:lstStyle/>
           <a:p>
             <a:fld id="{C1FF6DA9-008F-8B48-92A6-B652298478BF}" type="slidenum">
-              <a:rPr lang="en-US" smtClean="0"/>
               <a:t>‹#›</a:t>
             </a:fld>
-            <a:endParaRPr lang="en-US"/>
+            <a:endParaRPr/>
           </a:p>
         </p:txBody>
       </p:sp>
     </p:spTree>
-    <p:extLst>
-      <p:ext uri="{BB962C8B-B14F-4D97-AF65-F5344CB8AC3E}">
-        <p14:creationId xmlns:p14="http://schemas.microsoft.com/office/powerpoint/2010/main" val="1212999818"/>
-      </p:ext>
-    </p:extLst>
   </p:cSld>
   <p:clrMapOvr>
     <a:masterClrMapping/>
@@ -3116,7 +3513,13 @@
       </p:grpSpPr>
       <p:sp>
         <p:nvSpPr>
-          <p:cNvPr id="2" name="Title 1"/>
+          <p:cNvPr id="2" name="Title 1">
+            <a:extLst>
+              <a:ext uri="{FF2B5EF4-FFF2-40B4-BE49-F238E27FC236}">
+                <a16:creationId xmlns:a16="http://schemas.microsoft.com/office/drawing/2014/main" id="{BCDAFCA7-F133-4F74-93E4-BCF539530C9F}"/>
+              </a:ext>
+            </a:extLst>
+          </p:cNvPr>
           <p:cNvSpPr>
             <a:spLocks noGrp="1"/>
           </p:cNvSpPr>
@@ -3134,21 +3537,26 @@
           <a:bodyPr anchor="b"/>
           <a:lstStyle>
             <a:lvl1pPr algn="l">
+              <a:buNone/>
               <a:defRPr sz="2000" b="1"/>
             </a:lvl1pPr>
           </a:lstStyle>
           <a:p>
             <a:r>
-              <a:rPr lang="en-US" smtClean="0"/>
               <a:t>Click to edit Master title style</a:t>
             </a:r>
-            <a:endParaRPr lang="en-US"/>
-          </a:p>
-        </p:txBody>
-      </p:sp>
-      <p:sp>
-        <p:nvSpPr>
-          <p:cNvPr id="3" name="Content Placeholder 2"/>
+          </a:p>
+        </p:txBody>
+      </p:sp>
+      <p:sp>
+        <p:nvSpPr>
+          <p:cNvPr id="3" name="Content Placeholder 2">
+            <a:extLst>
+              <a:ext uri="{FF2B5EF4-FFF2-40B4-BE49-F238E27FC236}">
+                <a16:creationId xmlns:a16="http://schemas.microsoft.com/office/drawing/2014/main" id="{E5CAAB03-7A34-43DE-B985-2848E727B472}"/>
+              </a:ext>
+            </a:extLst>
+          </p:cNvPr>
           <p:cNvSpPr>
             <a:spLocks noGrp="1"/>
           </p:cNvSpPr>
@@ -3166,79 +3574,98 @@
           <a:bodyPr/>
           <a:lstStyle>
             <a:lvl1pPr>
+              <a:buNone/>
               <a:defRPr sz="3200"/>
             </a:lvl1pPr>
             <a:lvl2pPr>
+              <a:buNone/>
               <a:defRPr sz="2800"/>
             </a:lvl2pPr>
             <a:lvl3pPr>
+              <a:buNone/>
               <a:defRPr sz="2400"/>
             </a:lvl3pPr>
             <a:lvl4pPr>
+              <a:buNone/>
               <a:defRPr sz="2000"/>
             </a:lvl4pPr>
             <a:lvl5pPr>
+              <a:buNone/>
               <a:defRPr sz="2000"/>
             </a:lvl5pPr>
             <a:lvl6pPr>
+              <a:buNone/>
               <a:defRPr sz="2000"/>
             </a:lvl6pPr>
             <a:lvl7pPr>
+              <a:buNone/>
               <a:defRPr sz="2000"/>
             </a:lvl7pPr>
             <a:lvl8pPr>
+              <a:buNone/>
               <a:defRPr sz="2000"/>
             </a:lvl8pPr>
             <a:lvl9pPr>
+              <a:buNone/>
               <a:defRPr sz="2000"/>
             </a:lvl9pPr>
           </a:lstStyle>
           <a:p>
-            <a:pPr lvl="0"/>
-            <a:r>
-              <a:rPr lang="en-US" smtClean="0"/>
+            <a:pPr lvl="0">
+              <a:buNone/>
+            </a:pPr>
+            <a:r>
               <a:t>Click to edit Master text styles</a:t>
             </a:r>
           </a:p>
           <a:p>
-            <a:pPr lvl="1"/>
-            <a:r>
-              <a:rPr lang="en-US" smtClean="0"/>
+            <a:pPr lvl="1">
+              <a:buNone/>
+            </a:pPr>
+            <a:r>
               <a:t>Second level</a:t>
             </a:r>
           </a:p>
           <a:p>
-            <a:pPr lvl="2"/>
-            <a:r>
-              <a:rPr lang="en-US" smtClean="0"/>
+            <a:pPr lvl="2">
+              <a:buNone/>
+            </a:pPr>
+            <a:r>
               <a:t>Third level</a:t>
             </a:r>
           </a:p>
           <a:p>
-            <a:pPr lvl="3"/>
-            <a:r>
-              <a:rPr lang="en-US" smtClean="0"/>
+            <a:pPr lvl="3">
+              <a:buNone/>
+            </a:pPr>
+            <a:r>
               <a:t>Fourth level</a:t>
             </a:r>
           </a:p>
           <a:p>
-            <a:pPr lvl="4"/>
-            <a:r>
-              <a:rPr lang="en-US" smtClean="0"/>
+            <a:pPr lvl="4">
+              <a:buNone/>
+            </a:pPr>
+            <a:r>
               <a:t>Fifth level</a:t>
             </a:r>
-            <a:endParaRPr lang="en-US"/>
-          </a:p>
-        </p:txBody>
-      </p:sp>
-      <p:sp>
-        <p:nvSpPr>
-          <p:cNvPr id="4" name="Text Placeholder 3"/>
-          <p:cNvSpPr>
-            <a:spLocks noGrp="1"/>
-          </p:cNvSpPr>
-          <p:nvPr>
-            <p:ph type="body" sz="half" idx="2"/>
+          </a:p>
+        </p:txBody>
+      </p:sp>
+      <p:sp>
+        <p:nvSpPr>
+          <p:cNvPr id="4" name="Text Placeholder 3">
+            <a:extLst>
+              <a:ext uri="{FF2B5EF4-FFF2-40B4-BE49-F238E27FC236}">
+                <a16:creationId xmlns:a16="http://schemas.microsoft.com/office/drawing/2014/main" id="{A147C4D0-DAED-46B6-87D5-1BD18EE05F8D}"/>
+              </a:ext>
+            </a:extLst>
+          </p:cNvPr>
+          <p:cNvSpPr>
+            <a:spLocks noGrp="1"/>
+          </p:cNvSpPr>
+          <p:nvPr>
+            <p:ph type="body" idx="2"/>
           </p:nvPr>
         </p:nvSpPr>
         <p:spPr>
@@ -3288,9 +3715,10 @@
             </a:lvl9pPr>
           </a:lstStyle>
           <a:p>
-            <a:pPr lvl="0"/>
-            <a:r>
-              <a:rPr lang="en-US" smtClean="0"/>
+            <a:pPr lvl="0">
+              <a:buNone/>
+            </a:pPr>
+            <a:r>
               <a:t>Click to edit Master text styles</a:t>
             </a:r>
           </a:p>
@@ -3298,12 +3726,18 @@
       </p:sp>
       <p:sp>
         <p:nvSpPr>
-          <p:cNvPr id="5" name="Date Placeholder 4"/>
-          <p:cNvSpPr>
-            <a:spLocks noGrp="1"/>
-          </p:cNvSpPr>
-          <p:nvPr>
-            <p:ph type="dt" sz="half" idx="10"/>
+          <p:cNvPr id="5" name="Date Placeholder 4">
+            <a:extLst>
+              <a:ext uri="{FF2B5EF4-FFF2-40B4-BE49-F238E27FC236}">
+                <a16:creationId xmlns:a16="http://schemas.microsoft.com/office/drawing/2014/main" id="{E3C476E9-CA72-4D7E-B3F6-C56EEECD91E4}"/>
+              </a:ext>
+            </a:extLst>
+          </p:cNvPr>
+          <p:cNvSpPr>
+            <a:spLocks noGrp="1"/>
+          </p:cNvSpPr>
+          <p:nvPr>
+            <p:ph type="dt" idx="10"/>
           </p:nvPr>
         </p:nvSpPr>
         <p:spPr/>
@@ -3312,21 +3746,26 @@
           <a:lstStyle/>
           <a:p>
             <a:fld id="{5BCAD085-E8A6-8845-BD4E-CB4CCA059FC4}" type="datetimeFigureOut">
-              <a:rPr lang="en-US" smtClean="0"/>
-              <a:t>1/27/13</a:t>
+              <a:t>9/27/2026</a:t>
             </a:fld>
-            <a:endParaRPr lang="en-US"/>
-          </a:p>
-        </p:txBody>
-      </p:sp>
-      <p:sp>
-        <p:nvSpPr>
-          <p:cNvPr id="6" name="Footer Placeholder 5"/>
-          <p:cNvSpPr>
-            <a:spLocks noGrp="1"/>
-          </p:cNvSpPr>
-          <p:nvPr>
-            <p:ph type="ftr" sz="quarter" idx="11"/>
+            <a:endParaRPr/>
+          </a:p>
+        </p:txBody>
+      </p:sp>
+      <p:sp>
+        <p:nvSpPr>
+          <p:cNvPr id="6" name="Footer Placeholder 5">
+            <a:extLst>
+              <a:ext uri="{FF2B5EF4-FFF2-40B4-BE49-F238E27FC236}">
+                <a16:creationId xmlns:a16="http://schemas.microsoft.com/office/drawing/2014/main" id="{48BC69EF-38D6-4003-9621-D032D2E159CC}"/>
+              </a:ext>
+            </a:extLst>
+          </p:cNvPr>
+          <p:cNvSpPr>
+            <a:spLocks noGrp="1"/>
+          </p:cNvSpPr>
+          <p:nvPr>
+            <p:ph type="ftr" idx="11"/>
           </p:nvPr>
         </p:nvSpPr>
         <p:spPr/>
@@ -3334,18 +3773,24 @@
           <a:bodyPr/>
           <a:lstStyle/>
           <a:p>
-            <a:endParaRPr lang="en-US"/>
-          </a:p>
-        </p:txBody>
-      </p:sp>
-      <p:sp>
-        <p:nvSpPr>
-          <p:cNvPr id="7" name="Slide Number Placeholder 6"/>
-          <p:cNvSpPr>
-            <a:spLocks noGrp="1"/>
-          </p:cNvSpPr>
-          <p:nvPr>
-            <p:ph type="sldNum" sz="quarter" idx="12"/>
+            <a:endParaRPr/>
+          </a:p>
+        </p:txBody>
+      </p:sp>
+      <p:sp>
+        <p:nvSpPr>
+          <p:cNvPr id="7" name="Slide Number Placeholder 6">
+            <a:extLst>
+              <a:ext uri="{FF2B5EF4-FFF2-40B4-BE49-F238E27FC236}">
+                <a16:creationId xmlns:a16="http://schemas.microsoft.com/office/drawing/2014/main" id="{EC599A7D-D5D1-4C2F-A53B-427340A342D8}"/>
+              </a:ext>
+            </a:extLst>
+          </p:cNvPr>
+          <p:cNvSpPr>
+            <a:spLocks noGrp="1"/>
+          </p:cNvSpPr>
+          <p:nvPr>
+            <p:ph type="sldNum" idx="12"/>
           </p:nvPr>
         </p:nvSpPr>
         <p:spPr/>
@@ -3354,19 +3799,13 @@
           <a:lstStyle/>
           <a:p>
             <a:fld id="{C1FF6DA9-008F-8B48-92A6-B652298478BF}" type="slidenum">
-              <a:rPr lang="en-US" smtClean="0"/>
               <a:t>‹#›</a:t>
             </a:fld>
-            <a:endParaRPr lang="en-US"/>
+            <a:endParaRPr/>
           </a:p>
         </p:txBody>
       </p:sp>
     </p:spTree>
-    <p:extLst>
-      <p:ext uri="{BB962C8B-B14F-4D97-AF65-F5344CB8AC3E}">
-        <p14:creationId xmlns:p14="http://schemas.microsoft.com/office/powerpoint/2010/main" val="1840726560"/>
-      </p:ext>
-    </p:extLst>
   </p:cSld>
   <p:clrMapOvr>
     <a:masterClrMapping/>
@@ -3393,7 +3832,13 @@
       </p:grpSpPr>
       <p:sp>
         <p:nvSpPr>
-          <p:cNvPr id="2" name="Title 1"/>
+          <p:cNvPr id="2" name="Title 1">
+            <a:extLst>
+              <a:ext uri="{FF2B5EF4-FFF2-40B4-BE49-F238E27FC236}">
+                <a16:creationId xmlns:a16="http://schemas.microsoft.com/office/drawing/2014/main" id="{9B0955C4-520F-4A6A-ACE5-7194188BD7F1}"/>
+              </a:ext>
+            </a:extLst>
+          </p:cNvPr>
           <p:cNvSpPr>
             <a:spLocks noGrp="1"/>
           </p:cNvSpPr>
@@ -3411,21 +3856,26 @@
           <a:bodyPr anchor="b"/>
           <a:lstStyle>
             <a:lvl1pPr algn="l">
+              <a:buNone/>
               <a:defRPr sz="2000" b="1"/>
             </a:lvl1pPr>
           </a:lstStyle>
           <a:p>
             <a:r>
-              <a:rPr lang="en-US" smtClean="0"/>
               <a:t>Click to edit Master title style</a:t>
             </a:r>
-            <a:endParaRPr lang="en-US"/>
-          </a:p>
-        </p:txBody>
-      </p:sp>
-      <p:sp>
-        <p:nvSpPr>
-          <p:cNvPr id="3" name="Picture Placeholder 2"/>
+          </a:p>
+        </p:txBody>
+      </p:sp>
+      <p:sp>
+        <p:nvSpPr>
+          <p:cNvPr id="3" name="Picture Placeholder 2">
+            <a:extLst>
+              <a:ext uri="{FF2B5EF4-FFF2-40B4-BE49-F238E27FC236}">
+                <a16:creationId xmlns:a16="http://schemas.microsoft.com/office/drawing/2014/main" id="{BFC8F556-AFD9-4DFB-944A-53BFFCEF2F70}"/>
+              </a:ext>
+            </a:extLst>
+          </p:cNvPr>
           <p:cNvSpPr>
             <a:spLocks noGrp="1"/>
           </p:cNvSpPr>
@@ -3480,18 +3930,24 @@
             </a:lvl9pPr>
           </a:lstStyle>
           <a:p>
-            <a:endParaRPr lang="en-US"/>
-          </a:p>
-        </p:txBody>
-      </p:sp>
-      <p:sp>
-        <p:nvSpPr>
-          <p:cNvPr id="4" name="Text Placeholder 3"/>
-          <p:cNvSpPr>
-            <a:spLocks noGrp="1"/>
-          </p:cNvSpPr>
-          <p:nvPr>
-            <p:ph type="body" sz="half" idx="2"/>
+            <a:endParaRPr/>
+          </a:p>
+        </p:txBody>
+      </p:sp>
+      <p:sp>
+        <p:nvSpPr>
+          <p:cNvPr id="4" name="Text Placeholder 3">
+            <a:extLst>
+              <a:ext uri="{FF2B5EF4-FFF2-40B4-BE49-F238E27FC236}">
+                <a16:creationId xmlns:a16="http://schemas.microsoft.com/office/drawing/2014/main" id="{823F4DB7-2137-4D02-9E6F-7ECE3D64C2DD}"/>
+              </a:ext>
+            </a:extLst>
+          </p:cNvPr>
+          <p:cNvSpPr>
+            <a:spLocks noGrp="1"/>
+          </p:cNvSpPr>
+          <p:nvPr>
+            <p:ph type="body" idx="2"/>
           </p:nvPr>
         </p:nvSpPr>
         <p:spPr>
@@ -3541,9 +3997,10 @@
             </a:lvl9pPr>
           </a:lstStyle>
           <a:p>
-            <a:pPr lvl="0"/>
-            <a:r>
-              <a:rPr lang="en-US" smtClean="0"/>
+            <a:pPr lvl="0">
+              <a:buNone/>
+            </a:pPr>
+            <a:r>
               <a:t>Click to edit Master text styles</a:t>
             </a:r>
           </a:p>
@@ -3551,12 +4008,18 @@
       </p:sp>
       <p:sp>
         <p:nvSpPr>
-          <p:cNvPr id="5" name="Date Placeholder 4"/>
-          <p:cNvSpPr>
-            <a:spLocks noGrp="1"/>
-          </p:cNvSpPr>
-          <p:nvPr>
-            <p:ph type="dt" sz="half" idx="10"/>
+          <p:cNvPr id="5" name="Date Placeholder 4">
+            <a:extLst>
+              <a:ext uri="{FF2B5EF4-FFF2-40B4-BE49-F238E27FC236}">
+                <a16:creationId xmlns:a16="http://schemas.microsoft.com/office/drawing/2014/main" id="{26EB2151-9114-4A5D-8819-0284A18D6BE1}"/>
+              </a:ext>
+            </a:extLst>
+          </p:cNvPr>
+          <p:cNvSpPr>
+            <a:spLocks noGrp="1"/>
+          </p:cNvSpPr>
+          <p:nvPr>
+            <p:ph type="dt" idx="10"/>
           </p:nvPr>
         </p:nvSpPr>
         <p:spPr/>
@@ -3565,21 +4028,26 @@
           <a:lstStyle/>
           <a:p>
             <a:fld id="{5BCAD085-E8A6-8845-BD4E-CB4CCA059FC4}" type="datetimeFigureOut">
-              <a:rPr lang="en-US" smtClean="0"/>
-              <a:t>1/27/13</a:t>
+              <a:t>9/27/2026</a:t>
             </a:fld>
-            <a:endParaRPr lang="en-US"/>
-          </a:p>
-        </p:txBody>
-      </p:sp>
-      <p:sp>
-        <p:nvSpPr>
-          <p:cNvPr id="6" name="Footer Placeholder 5"/>
-          <p:cNvSpPr>
-            <a:spLocks noGrp="1"/>
-          </p:cNvSpPr>
-          <p:nvPr>
-            <p:ph type="ftr" sz="quarter" idx="11"/>
+            <a:endParaRPr/>
+          </a:p>
+        </p:txBody>
+      </p:sp>
+      <p:sp>
+        <p:nvSpPr>
+          <p:cNvPr id="6" name="Footer Placeholder 5">
+            <a:extLst>
+              <a:ext uri="{FF2B5EF4-FFF2-40B4-BE49-F238E27FC236}">
+                <a16:creationId xmlns:a16="http://schemas.microsoft.com/office/drawing/2014/main" id="{E340FAE4-FA94-4601-B76C-589D99C3948D}"/>
+              </a:ext>
+            </a:extLst>
+          </p:cNvPr>
+          <p:cNvSpPr>
+            <a:spLocks noGrp="1"/>
+          </p:cNvSpPr>
+          <p:nvPr>
+            <p:ph type="ftr" idx="11"/>
           </p:nvPr>
         </p:nvSpPr>
         <p:spPr/>
@@ -3587,18 +4055,24 @@
           <a:bodyPr/>
           <a:lstStyle/>
           <a:p>
-            <a:endParaRPr lang="en-US"/>
-          </a:p>
-        </p:txBody>
-      </p:sp>
-      <p:sp>
-        <p:nvSpPr>
-          <p:cNvPr id="7" name="Slide Number Placeholder 6"/>
-          <p:cNvSpPr>
-            <a:spLocks noGrp="1"/>
-          </p:cNvSpPr>
-          <p:nvPr>
-            <p:ph type="sldNum" sz="quarter" idx="12"/>
+            <a:endParaRPr/>
+          </a:p>
+        </p:txBody>
+      </p:sp>
+      <p:sp>
+        <p:nvSpPr>
+          <p:cNvPr id="7" name="Slide Number Placeholder 6">
+            <a:extLst>
+              <a:ext uri="{FF2B5EF4-FFF2-40B4-BE49-F238E27FC236}">
+                <a16:creationId xmlns:a16="http://schemas.microsoft.com/office/drawing/2014/main" id="{4144669D-37FD-468B-B02B-5AB0C1581FA8}"/>
+              </a:ext>
+            </a:extLst>
+          </p:cNvPr>
+          <p:cNvSpPr>
+            <a:spLocks noGrp="1"/>
+          </p:cNvSpPr>
+          <p:nvPr>
+            <p:ph type="sldNum" idx="12"/>
           </p:nvPr>
         </p:nvSpPr>
         <p:spPr/>
@@ -3607,19 +4081,13 @@
           <a:lstStyle/>
           <a:p>
             <a:fld id="{C1FF6DA9-008F-8B48-92A6-B652298478BF}" type="slidenum">
-              <a:rPr lang="en-US" smtClean="0"/>
               <a:t>‹#›</a:t>
             </a:fld>
-            <a:endParaRPr lang="en-US"/>
+            <a:endParaRPr/>
           </a:p>
         </p:txBody>
       </p:sp>
     </p:spTree>
-    <p:extLst>
-      <p:ext uri="{BB962C8B-B14F-4D97-AF65-F5344CB8AC3E}">
-        <p14:creationId xmlns:p14="http://schemas.microsoft.com/office/powerpoint/2010/main" val="3889236939"/>
-      </p:ext>
-    </p:extLst>
   </p:cSld>
   <p:clrMapOvr>
     <a:masterClrMapping/>
@@ -3651,7 +4119,13 @@
       </p:grpSpPr>
       <p:sp>
         <p:nvSpPr>
-          <p:cNvPr id="2" name="Title Placeholder 1"/>
+          <p:cNvPr id="2" name="Title Placeholder 1">
+            <a:extLst>
+              <a:ext uri="{FF2B5EF4-FFF2-40B4-BE49-F238E27FC236}">
+                <a16:creationId xmlns:a16="http://schemas.microsoft.com/office/drawing/2014/main" id="{EE8B51B5-D83C-4B47-835C-867A3F99C969}"/>
+              </a:ext>
+            </a:extLst>
+          </p:cNvPr>
           <p:cNvSpPr>
             <a:spLocks noGrp="1"/>
           </p:cNvSpPr>
@@ -3669,22 +4143,26 @@
           </a:prstGeom>
         </p:spPr>
         <p:txBody>
-          <a:bodyPr vert="horz" lIns="91440" tIns="45720" rIns="91440" bIns="45720" rtlCol="0" anchor="ctr">
+          <a:bodyPr vert="horz" lIns="91440" tIns="45720" rIns="91440" bIns="45720" anchor="ctr">
             <a:normAutofit/>
           </a:bodyPr>
           <a:lstStyle/>
           <a:p>
             <a:r>
-              <a:rPr lang="en-US" smtClean="0"/>
               <a:t>Click to edit Master title style</a:t>
             </a:r>
-            <a:endParaRPr lang="en-US"/>
-          </a:p>
-        </p:txBody>
-      </p:sp>
-      <p:sp>
-        <p:nvSpPr>
-          <p:cNvPr id="3" name="Text Placeholder 2"/>
+          </a:p>
+        </p:txBody>
+      </p:sp>
+      <p:sp>
+        <p:nvSpPr>
+          <p:cNvPr id="3" name="Text Placeholder 2">
+            <a:extLst>
+              <a:ext uri="{FF2B5EF4-FFF2-40B4-BE49-F238E27FC236}">
+                <a16:creationId xmlns:a16="http://schemas.microsoft.com/office/drawing/2014/main" id="{C993F479-C48E-4A54-BDB3-05C0730083F1}"/>
+              </a:ext>
+            </a:extLst>
+          </p:cNvPr>
           <p:cNvSpPr>
             <a:spLocks noGrp="1"/>
           </p:cNvSpPr>
@@ -3702,56 +4180,66 @@
           </a:prstGeom>
         </p:spPr>
         <p:txBody>
-          <a:bodyPr vert="horz" lIns="91440" tIns="45720" rIns="91440" bIns="45720" rtlCol="0">
+          <a:bodyPr vert="horz" lIns="91440" tIns="45720" rIns="91440" bIns="45720">
             <a:normAutofit/>
           </a:bodyPr>
           <a:lstStyle/>
           <a:p>
-            <a:pPr lvl="0"/>
-            <a:r>
-              <a:rPr lang="en-US" smtClean="0"/>
+            <a:pPr lvl="0">
+              <a:buNone/>
+            </a:pPr>
+            <a:r>
               <a:t>Click to edit Master text styles</a:t>
             </a:r>
           </a:p>
           <a:p>
-            <a:pPr lvl="1"/>
-            <a:r>
-              <a:rPr lang="en-US" smtClean="0"/>
+            <a:pPr lvl="1">
+              <a:buNone/>
+            </a:pPr>
+            <a:r>
               <a:t>Second level</a:t>
             </a:r>
           </a:p>
           <a:p>
-            <a:pPr lvl="2"/>
-            <a:r>
-              <a:rPr lang="en-US" smtClean="0"/>
+            <a:pPr lvl="2">
+              <a:buNone/>
+            </a:pPr>
+            <a:r>
               <a:t>Third level</a:t>
             </a:r>
           </a:p>
           <a:p>
-            <a:pPr lvl="3"/>
-            <a:r>
-              <a:rPr lang="en-US" smtClean="0"/>
+            <a:pPr lvl="3">
+              <a:buNone/>
+            </a:pPr>
+            <a:r>
               <a:t>Fourth level</a:t>
             </a:r>
           </a:p>
           <a:p>
-            <a:pPr lvl="4"/>
-            <a:r>
-              <a:rPr lang="en-US" smtClean="0"/>
+            <a:pPr lvl="4">
+              <a:buNone/>
+            </a:pPr>
+            <a:r>
               <a:t>Fifth level</a:t>
             </a:r>
-            <a:endParaRPr lang="en-US"/>
-          </a:p>
-        </p:txBody>
-      </p:sp>
-      <p:sp>
-        <p:nvSpPr>
-          <p:cNvPr id="4" name="Date Placeholder 3"/>
-          <p:cNvSpPr>
-            <a:spLocks noGrp="1"/>
-          </p:cNvSpPr>
-          <p:nvPr>
-            <p:ph type="dt" sz="half" idx="2"/>
+          </a:p>
+        </p:txBody>
+      </p:sp>
+      <p:sp>
+        <p:nvSpPr>
+          <p:cNvPr id="4" name="Date Placeholder 3">
+            <a:extLst>
+              <a:ext uri="{FF2B5EF4-FFF2-40B4-BE49-F238E27FC236}">
+                <a16:creationId xmlns:a16="http://schemas.microsoft.com/office/drawing/2014/main" id="{1476E339-7483-4F0F-A6DD-5A9B43F4AB40}"/>
+              </a:ext>
+            </a:extLst>
+          </p:cNvPr>
+          <p:cNvSpPr>
+            <a:spLocks noGrp="1"/>
+          </p:cNvSpPr>
+          <p:nvPr>
+            <p:ph type="dt" idx="2"/>
           </p:nvPr>
         </p:nvSpPr>
         <p:spPr>
@@ -3764,9 +4252,10 @@
           </a:prstGeom>
         </p:spPr>
         <p:txBody>
-          <a:bodyPr vert="horz" lIns="91440" tIns="45720" rIns="91440" bIns="45720" rtlCol="0" anchor="ctr"/>
+          <a:bodyPr vert="horz" lIns="91440" tIns="45720" rIns="91440" bIns="45720" anchor="ctr"/>
           <a:lstStyle>
             <a:lvl1pPr algn="l">
+              <a:buNone/>
               <a:defRPr sz="1200">
                 <a:solidFill>
                   <a:schemeClr val="tx1">
@@ -3778,21 +4267,26 @@
           </a:lstStyle>
           <a:p>
             <a:fld id="{5BCAD085-E8A6-8845-BD4E-CB4CCA059FC4}" type="datetimeFigureOut">
-              <a:rPr lang="en-US" smtClean="0"/>
-              <a:t>1/27/13</a:t>
+              <a:t>9/27/2026</a:t>
             </a:fld>
-            <a:endParaRPr lang="en-US"/>
-          </a:p>
-        </p:txBody>
-      </p:sp>
-      <p:sp>
-        <p:nvSpPr>
-          <p:cNvPr id="5" name="Footer Placeholder 4"/>
-          <p:cNvSpPr>
-            <a:spLocks noGrp="1"/>
-          </p:cNvSpPr>
-          <p:nvPr>
-            <p:ph type="ftr" sz="quarter" idx="3"/>
+            <a:endParaRPr/>
+          </a:p>
+        </p:txBody>
+      </p:sp>
+      <p:sp>
+        <p:nvSpPr>
+          <p:cNvPr id="5" name="Footer Placeholder 4">
+            <a:extLst>
+              <a:ext uri="{FF2B5EF4-FFF2-40B4-BE49-F238E27FC236}">
+                <a16:creationId xmlns:a16="http://schemas.microsoft.com/office/drawing/2014/main" id="{871E903E-1CAE-4AD1-A4C4-E0C7125E89B3}"/>
+              </a:ext>
+            </a:extLst>
+          </p:cNvPr>
+          <p:cNvSpPr>
+            <a:spLocks noGrp="1"/>
+          </p:cNvSpPr>
+          <p:nvPr>
+            <p:ph type="ftr" idx="3"/>
           </p:nvPr>
         </p:nvSpPr>
         <p:spPr>
@@ -3805,9 +4299,10 @@
           </a:prstGeom>
         </p:spPr>
         <p:txBody>
-          <a:bodyPr vert="horz" lIns="91440" tIns="45720" rIns="91440" bIns="45720" rtlCol="0" anchor="ctr"/>
+          <a:bodyPr vert="horz" lIns="91440" tIns="45720" rIns="91440" bIns="45720" anchor="ctr"/>
           <a:lstStyle>
             <a:lvl1pPr algn="ctr">
+              <a:buNone/>
               <a:defRPr sz="1200">
                 <a:solidFill>
                   <a:schemeClr val="tx1">
@@ -3818,18 +4313,24 @@
             </a:lvl1pPr>
           </a:lstStyle>
           <a:p>
-            <a:endParaRPr lang="en-US"/>
-          </a:p>
-        </p:txBody>
-      </p:sp>
-      <p:sp>
-        <p:nvSpPr>
-          <p:cNvPr id="6" name="Slide Number Placeholder 5"/>
-          <p:cNvSpPr>
-            <a:spLocks noGrp="1"/>
-          </p:cNvSpPr>
-          <p:nvPr>
-            <p:ph type="sldNum" sz="quarter" idx="4"/>
+            <a:endParaRPr/>
+          </a:p>
+        </p:txBody>
+      </p:sp>
+      <p:sp>
+        <p:nvSpPr>
+          <p:cNvPr id="6" name="Slide Number Placeholder 5">
+            <a:extLst>
+              <a:ext uri="{FF2B5EF4-FFF2-40B4-BE49-F238E27FC236}">
+                <a16:creationId xmlns:a16="http://schemas.microsoft.com/office/drawing/2014/main" id="{02687492-39A0-44D7-AE7D-6475F380E472}"/>
+              </a:ext>
+            </a:extLst>
+          </p:cNvPr>
+          <p:cNvSpPr>
+            <a:spLocks noGrp="1"/>
+          </p:cNvSpPr>
+          <p:nvPr>
+            <p:ph type="sldNum" idx="4"/>
           </p:nvPr>
         </p:nvSpPr>
         <p:spPr>
@@ -3842,9 +4343,10 @@
           </a:prstGeom>
         </p:spPr>
         <p:txBody>
-          <a:bodyPr vert="horz" lIns="91440" tIns="45720" rIns="91440" bIns="45720" rtlCol="0" anchor="ctr"/>
+          <a:bodyPr vert="horz" lIns="91440" tIns="45720" rIns="91440" bIns="45720" anchor="ctr"/>
           <a:lstStyle>
             <a:lvl1pPr algn="r">
+              <a:buNone/>
               <a:defRPr sz="1200">
                 <a:solidFill>
                   <a:schemeClr val="tx1">
@@ -3856,19 +4358,13 @@
           </a:lstStyle>
           <a:p>
             <a:fld id="{C1FF6DA9-008F-8B48-92A6-B652298478BF}" type="slidenum">
-              <a:rPr lang="en-US" smtClean="0"/>
               <a:t>‹#›</a:t>
             </a:fld>
-            <a:endParaRPr lang="en-US"/>
+            <a:endParaRPr/>
           </a:p>
         </p:txBody>
       </p:sp>
     </p:spTree>
-    <p:extLst>
-      <p:ext uri="{BB962C8B-B14F-4D97-AF65-F5344CB8AC3E}">
-        <p14:creationId xmlns:p14="http://schemas.microsoft.com/office/powerpoint/2010/main" val="2209977519"/>
-      </p:ext>
-    </p:extLst>
   </p:cSld>
   <p:clrMap bg1="lt1" tx1="dk1" bg2="lt2" tx2="dk2" accent1="accent1" accent2="accent2" accent3="accent3" accent4="accent4" accent5="accent5" accent6="accent6" hlink="hlink" folHlink="folHlink"/>
   <p:sldLayoutIdLst>
@@ -3886,7 +4382,7 @@
   </p:sldLayoutIdLst>
   <p:txStyles>
     <p:titleStyle>
-      <a:lvl1pPr algn="ctr" defTabSz="457200" rtl="0" eaLnBrk="1" latinLnBrk="0" hangingPunct="1">
+      <a:lvl1pPr algn="ctr" defTabSz="457200">
         <a:spcBef>
           <a:spcPct val="0"/>
         </a:spcBef>
@@ -3896,13 +4392,13 @@
             <a:schemeClr val="tx1"/>
           </a:solidFill>
           <a:latin typeface="+mj-lt"/>
-          <a:ea typeface="+mj-ea"/>
-          <a:cs typeface="+mj-cs"/>
+          <a:ea typeface="+mj-lt"/>
+          <a:cs typeface="+mj-lt"/>
         </a:defRPr>
       </a:lvl1pPr>
     </p:titleStyle>
     <p:bodyStyle>
-      <a:lvl1pPr marL="342900" indent="-342900" algn="l" defTabSz="457200" rtl="0" eaLnBrk="1" latinLnBrk="0" hangingPunct="1">
+      <a:lvl1pPr marL="342900" indent="-342900" algn="l" defTabSz="457200">
         <a:spcBef>
           <a:spcPct val="20000"/>
         </a:spcBef>
@@ -3913,11 +4409,11 @@
             <a:schemeClr val="tx1"/>
           </a:solidFill>
           <a:latin typeface="+mn-lt"/>
-          <a:ea typeface="+mn-ea"/>
-          <a:cs typeface="+mn-cs"/>
+          <a:ea typeface="+mn-lt"/>
+          <a:cs typeface="+mn-lt"/>
         </a:defRPr>
       </a:lvl1pPr>
-      <a:lvl2pPr marL="742950" indent="-285750" algn="l" defTabSz="457200" rtl="0" eaLnBrk="1" latinLnBrk="0" hangingPunct="1">
+      <a:lvl2pPr marL="742950" indent="-285750" algn="l" defTabSz="457200">
         <a:spcBef>
           <a:spcPct val="20000"/>
         </a:spcBef>
@@ -3928,11 +4424,11 @@
             <a:schemeClr val="tx1"/>
           </a:solidFill>
           <a:latin typeface="+mn-lt"/>
-          <a:ea typeface="+mn-ea"/>
-          <a:cs typeface="+mn-cs"/>
+          <a:ea typeface="+mn-lt"/>
+          <a:cs typeface="+mn-lt"/>
         </a:defRPr>
       </a:lvl2pPr>
-      <a:lvl3pPr marL="1143000" indent="-228600" algn="l" defTabSz="457200" rtl="0" eaLnBrk="1" latinLnBrk="0" hangingPunct="1">
+      <a:lvl3pPr marL="1143000" indent="-228600" algn="l" defTabSz="457200">
         <a:spcBef>
           <a:spcPct val="20000"/>
         </a:spcBef>
@@ -3943,11 +4439,11 @@
             <a:schemeClr val="tx1"/>
           </a:solidFill>
           <a:latin typeface="+mn-lt"/>
-          <a:ea typeface="+mn-ea"/>
-          <a:cs typeface="+mn-cs"/>
+          <a:ea typeface="+mn-lt"/>
+          <a:cs typeface="+mn-lt"/>
         </a:defRPr>
       </a:lvl3pPr>
-      <a:lvl4pPr marL="1600200" indent="-228600" algn="l" defTabSz="457200" rtl="0" eaLnBrk="1" latinLnBrk="0" hangingPunct="1">
+      <a:lvl4pPr marL="1600200" indent="-228600" algn="l" defTabSz="457200">
         <a:spcBef>
           <a:spcPct val="20000"/>
         </a:spcBef>
@@ -3958,11 +4454,11 @@
             <a:schemeClr val="tx1"/>
           </a:solidFill>
           <a:latin typeface="+mn-lt"/>
-          <a:ea typeface="+mn-ea"/>
-          <a:cs typeface="+mn-cs"/>
+          <a:ea typeface="+mn-lt"/>
+          <a:cs typeface="+mn-lt"/>
         </a:defRPr>
       </a:lvl4pPr>
-      <a:lvl5pPr marL="2057400" indent="-228600" algn="l" defTabSz="457200" rtl="0" eaLnBrk="1" latinLnBrk="0" hangingPunct="1">
+      <a:lvl5pPr marL="2057400" indent="-228600" algn="l" defTabSz="457200">
         <a:spcBef>
           <a:spcPct val="20000"/>
         </a:spcBef>
@@ -3973,11 +4469,11 @@
             <a:schemeClr val="tx1"/>
           </a:solidFill>
           <a:latin typeface="+mn-lt"/>
-          <a:ea typeface="+mn-ea"/>
-          <a:cs typeface="+mn-cs"/>
+          <a:ea typeface="+mn-lt"/>
+          <a:cs typeface="+mn-lt"/>
         </a:defRPr>
       </a:lvl5pPr>
-      <a:lvl6pPr marL="2514600" indent="-228600" algn="l" defTabSz="457200" rtl="0" eaLnBrk="1" latinLnBrk="0" hangingPunct="1">
+      <a:lvl6pPr marL="2514600" indent="-228600" algn="l" defTabSz="457200">
         <a:spcBef>
           <a:spcPct val="20000"/>
         </a:spcBef>
@@ -3988,11 +4484,11 @@
             <a:schemeClr val="tx1"/>
           </a:solidFill>
           <a:latin typeface="+mn-lt"/>
-          <a:ea typeface="+mn-ea"/>
-          <a:cs typeface="+mn-cs"/>
+          <a:ea typeface="+mn-lt"/>
+          <a:cs typeface="+mn-lt"/>
         </a:defRPr>
       </a:lvl6pPr>
-      <a:lvl7pPr marL="2971800" indent="-228600" algn="l" defTabSz="457200" rtl="0" eaLnBrk="1" latinLnBrk="0" hangingPunct="1">
+      <a:lvl7pPr marL="2971800" indent="-228600" algn="l" defTabSz="457200">
         <a:spcBef>
           <a:spcPct val="20000"/>
         </a:spcBef>
@@ -4003,11 +4499,11 @@
             <a:schemeClr val="tx1"/>
           </a:solidFill>
           <a:latin typeface="+mn-lt"/>
-          <a:ea typeface="+mn-ea"/>
-          <a:cs typeface="+mn-cs"/>
+          <a:ea typeface="+mn-lt"/>
+          <a:cs typeface="+mn-lt"/>
         </a:defRPr>
       </a:lvl7pPr>
-      <a:lvl8pPr marL="3429000" indent="-228600" algn="l" defTabSz="457200" rtl="0" eaLnBrk="1" latinLnBrk="0" hangingPunct="1">
+      <a:lvl8pPr marL="3429000" indent="-228600" algn="l" defTabSz="457200">
         <a:spcBef>
           <a:spcPct val="20000"/>
         </a:spcBef>
@@ -4018,11 +4514,11 @@
             <a:schemeClr val="tx1"/>
           </a:solidFill>
           <a:latin typeface="+mn-lt"/>
-          <a:ea typeface="+mn-ea"/>
-          <a:cs typeface="+mn-cs"/>
+          <a:ea typeface="+mn-lt"/>
+          <a:cs typeface="+mn-lt"/>
         </a:defRPr>
       </a:lvl8pPr>
-      <a:lvl9pPr marL="3886200" indent="-228600" algn="l" defTabSz="457200" rtl="0" eaLnBrk="1" latinLnBrk="0" hangingPunct="1">
+      <a:lvl9pPr marL="3886200" indent="-228600" algn="l" defTabSz="457200">
         <a:spcBef>
           <a:spcPct val="20000"/>
         </a:spcBef>
@@ -4033,103 +4529,109 @@
             <a:schemeClr val="tx1"/>
           </a:solidFill>
           <a:latin typeface="+mn-lt"/>
-          <a:ea typeface="+mn-ea"/>
-          <a:cs typeface="+mn-cs"/>
+          <a:ea typeface="+mn-lt"/>
+          <a:cs typeface="+mn-lt"/>
         </a:defRPr>
       </a:lvl9pPr>
     </p:bodyStyle>
     <p:otherStyle>
-      <a:defPPr>
-        <a:defRPr lang="en-US"/>
-      </a:defPPr>
-      <a:lvl1pPr marL="0" algn="l" defTabSz="457200" rtl="0" eaLnBrk="1" latinLnBrk="0" hangingPunct="1">
+      <a:lvl1pPr marL="0" algn="l" defTabSz="457200">
+        <a:buNone/>
         <a:defRPr sz="1800" kern="1200">
           <a:solidFill>
             <a:schemeClr val="tx1"/>
           </a:solidFill>
           <a:latin typeface="+mn-lt"/>
-          <a:ea typeface="+mn-ea"/>
-          <a:cs typeface="+mn-cs"/>
+          <a:ea typeface="+mn-lt"/>
+          <a:cs typeface="+mn-lt"/>
         </a:defRPr>
       </a:lvl1pPr>
-      <a:lvl2pPr marL="457200" algn="l" defTabSz="457200" rtl="0" eaLnBrk="1" latinLnBrk="0" hangingPunct="1">
+      <a:lvl2pPr marL="457200" algn="l" defTabSz="457200">
+        <a:buNone/>
         <a:defRPr sz="1800" kern="1200">
           <a:solidFill>
             <a:schemeClr val="tx1"/>
           </a:solidFill>
           <a:latin typeface="+mn-lt"/>
-          <a:ea typeface="+mn-ea"/>
-          <a:cs typeface="+mn-cs"/>
+          <a:ea typeface="+mn-lt"/>
+          <a:cs typeface="+mn-lt"/>
         </a:defRPr>
       </a:lvl2pPr>
-      <a:lvl3pPr marL="914400" algn="l" defTabSz="457200" rtl="0" eaLnBrk="1" latinLnBrk="0" hangingPunct="1">
+      <a:lvl3pPr marL="914400" algn="l" defTabSz="457200">
+        <a:buNone/>
         <a:defRPr sz="1800" kern="1200">
           <a:solidFill>
             <a:schemeClr val="tx1"/>
           </a:solidFill>
           <a:latin typeface="+mn-lt"/>
-          <a:ea typeface="+mn-ea"/>
-          <a:cs typeface="+mn-cs"/>
+          <a:ea typeface="+mn-lt"/>
+          <a:cs typeface="+mn-lt"/>
         </a:defRPr>
       </a:lvl3pPr>
-      <a:lvl4pPr marL="1371600" algn="l" defTabSz="457200" rtl="0" eaLnBrk="1" latinLnBrk="0" hangingPunct="1">
+      <a:lvl4pPr marL="1371600" algn="l" defTabSz="457200">
+        <a:buNone/>
         <a:defRPr sz="1800" kern="1200">
           <a:solidFill>
             <a:schemeClr val="tx1"/>
           </a:solidFill>
           <a:latin typeface="+mn-lt"/>
-          <a:ea typeface="+mn-ea"/>
-          <a:cs typeface="+mn-cs"/>
+          <a:ea typeface="+mn-lt"/>
+          <a:cs typeface="+mn-lt"/>
         </a:defRPr>
       </a:lvl4pPr>
-      <a:lvl5pPr marL="1828800" algn="l" defTabSz="457200" rtl="0" eaLnBrk="1" latinLnBrk="0" hangingPunct="1">
+      <a:lvl5pPr marL="1828800" algn="l" defTabSz="457200">
+        <a:buNone/>
         <a:defRPr sz="1800" kern="1200">
           <a:solidFill>
             <a:schemeClr val="tx1"/>
           </a:solidFill>
           <a:latin typeface="+mn-lt"/>
-          <a:ea typeface="+mn-ea"/>
-          <a:cs typeface="+mn-cs"/>
+          <a:ea typeface="+mn-lt"/>
+          <a:cs typeface="+mn-lt"/>
         </a:defRPr>
       </a:lvl5pPr>
-      <a:lvl6pPr marL="2286000" algn="l" defTabSz="457200" rtl="0" eaLnBrk="1" latinLnBrk="0" hangingPunct="1">
+      <a:lvl6pPr marL="2286000" algn="l" defTabSz="457200">
+        <a:buNone/>
         <a:defRPr sz="1800" kern="1200">
           <a:solidFill>
             <a:schemeClr val="tx1"/>
           </a:solidFill>
           <a:latin typeface="+mn-lt"/>
-          <a:ea typeface="+mn-ea"/>
-          <a:cs typeface="+mn-cs"/>
+          <a:ea typeface="+mn-lt"/>
+          <a:cs typeface="+mn-lt"/>
         </a:defRPr>
       </a:lvl6pPr>
-      <a:lvl7pPr marL="2743200" algn="l" defTabSz="457200" rtl="0" eaLnBrk="1" latinLnBrk="0" hangingPunct="1">
+      <a:lvl7pPr marL="2743200" algn="l" defTabSz="457200">
+        <a:buNone/>
         <a:defRPr sz="1800" kern="1200">
           <a:solidFill>
             <a:schemeClr val="tx1"/>
           </a:solidFill>
           <a:latin typeface="+mn-lt"/>
-          <a:ea typeface="+mn-ea"/>
-          <a:cs typeface="+mn-cs"/>
+          <a:ea typeface="+mn-lt"/>
+          <a:cs typeface="+mn-lt"/>
         </a:defRPr>
       </a:lvl7pPr>
-      <a:lvl8pPr marL="3200400" algn="l" defTabSz="457200" rtl="0" eaLnBrk="1" latinLnBrk="0" hangingPunct="1">
+      <a:lvl8pPr marL="3200400" algn="l" defTabSz="457200">
+        <a:buNone/>
         <a:defRPr sz="1800" kern="1200">
           <a:solidFill>
             <a:schemeClr val="tx1"/>
           </a:solidFill>
           <a:latin typeface="+mn-lt"/>
-          <a:ea typeface="+mn-ea"/>
-          <a:cs typeface="+mn-cs"/>
+          <a:ea typeface="+mn-lt"/>
+          <a:cs typeface="+mn-lt"/>
         </a:defRPr>
       </a:lvl8pPr>
-      <a:lvl9pPr marL="3657600" algn="l" defTabSz="457200" rtl="0" eaLnBrk="1" latinLnBrk="0" hangingPunct="1">
+      <a:lvl9pPr marL="3657600" algn="l" defTabSz="457200">
+        <a:buNone/>
         <a:defRPr sz="1800" kern="1200">
           <a:solidFill>
             <a:schemeClr val="tx1"/>
           </a:solidFill>
           <a:latin typeface="+mn-lt"/>
-          <a:ea typeface="+mn-ea"/>
-          <a:cs typeface="+mn-cs"/>
+          <a:ea typeface="+mn-lt"/>
+          <a:cs typeface="+mn-lt"/>
         </a:defRPr>
       </a:lvl9pPr>
     </p:otherStyle>
@@ -4138,7 +4640,7 @@
 </file>
 
 <file path=ppt/slides/slide1.xml><?xml version="1.0" encoding="utf-8"?>
-<p:sld xmlns:a="http://schemas.openxmlformats.org/drawingml/2006/main" xmlns:p="http://schemas.openxmlformats.org/presentationml/2006/main" xmlns:r="http://schemas.openxmlformats.org/officeDocument/2006/relationships">
+<p:sld xmlns:a="http://schemas.openxmlformats.org/drawingml/2006/main" xmlns:r="http://schemas.openxmlformats.org/officeDocument/2006/relationships" xmlns:p="http://schemas.openxmlformats.org/presentationml/2006/main">
   <p:cSld>
     <p:bg>
       <p:bgPr>
@@ -4154,17 +4656,32 @@
         <p:cNvGrpSpPr/>
         <p:nvPr/>
       </p:nvGrpSpPr>
-      <p:grpSpPr/>
-      <p:sp>
-        <p:nvSpPr>
-          <p:cNvPr id="2" name="TextBox 1"/>
-          <p:cNvSpPr txBox="1"/>
+      <p:grpSpPr>
+        <a:xfrm>
+          <a:off x="0" y="0"/>
+          <a:ext cx="0" cy="0"/>
+          <a:chOff x="0" y="0"/>
+          <a:chExt cx="0" cy="0"/>
+        </a:xfrm>
+      </p:grpSpPr>
+      <p:sp>
+        <p:nvSpPr>
+          <p:cNvPr id="2" name="TextBox 1">
+            <a:extLst>
+              <a:ext uri="{FF2B5EF4-FFF2-40B4-BE49-F238E27FC236}">
+                <a16:creationId xmlns:a16="http://schemas.microsoft.com/office/drawing/2014/main" id="{3651D0A8-B316-412F-B3E5-8EB7F0305400}"/>
+              </a:ext>
+            </a:extLst>
+          </p:cNvPr>
+          <p:cNvSpPr>
+            <a:spLocks noGrp="1"/>
+          </p:cNvSpPr>
           <p:nvPr/>
         </p:nvSpPr>
         <p:spPr>
           <a:xfrm>
             <a:off x="640080" y="2103120"/>
-            <a:ext cx="10607040" cy="3291840"/>
+            <a:ext cx="10607040" cy="2076450"/>
           </a:xfrm>
           <a:prstGeom prst="rect">
             <a:avLst/>
@@ -4172,7 +4689,7 @@
           <a:noFill/>
         </p:spPr>
         <p:txBody>
-          <a:bodyPr wrap="square" lIns="0" rIns="0" tIns="0" bIns="0">
+          <a:bodyPr wrap="square" lIns="0" tIns="0" rIns="0" bIns="0">
             <a:spAutoFit/>
           </a:bodyPr>
           <a:lstStyle/>
@@ -4183,6 +4700,8 @@
                   <a:srgbClr val="CF3338"/>
                 </a:solidFill>
                 <a:latin typeface="Arial Black"/>
+                <a:ea typeface="Arial Black"/>
+                <a:cs typeface="Arial Black"/>
               </a:rPr>
               <a:t>GUERRILLA AI FOR EXCEL. A LIVE SERIES, DAY 1 OF 5</a:t>
             </a:r>
@@ -4192,6 +4711,7 @@
               <a:spcBef>
                 <a:spcPts val="1000"/>
               </a:spcBef>
+              <a:buNone/>
             </a:pPr>
             <a:r>
               <a:rPr sz="4200" b="1" i="0">
@@ -4199,6 +4719,8 @@
                   <a:srgbClr val="1F2120"/>
                 </a:solidFill>
                 <a:latin typeface="Arial Black"/>
+                <a:ea typeface="Arial Black"/>
+                <a:cs typeface="Arial Black"/>
               </a:rPr>
               <a:t>The AI already hiding in your Excel</a:t>
             </a:r>
@@ -4208,6 +4730,7 @@
               <a:spcBef>
                 <a:spcPts val="1400"/>
               </a:spcBef>
+              <a:buNone/>
             </a:pPr>
             <a:r>
               <a:rPr sz="2000" b="0" i="0">
@@ -4215,6 +4738,8 @@
                   <a:srgbClr val="707070"/>
                 </a:solidFill>
                 <a:latin typeface="Arial"/>
+                <a:ea typeface="Arial"/>
+                <a:cs typeface="Arial"/>
               </a:rPr>
               <a:t>Flash Fill, Analyze Data, and the models Microsoft never told you about.</a:t>
             </a:r>
@@ -4223,8 +4748,16 @@
       </p:sp>
       <p:sp>
         <p:nvSpPr>
-          <p:cNvPr id="3" name="TextBox 2"/>
-          <p:cNvSpPr txBox="1"/>
+          <p:cNvPr id="3" name="TextBox 2">
+            <a:extLst>
+              <a:ext uri="{FF2B5EF4-FFF2-40B4-BE49-F238E27FC236}">
+                <a16:creationId xmlns:a16="http://schemas.microsoft.com/office/drawing/2014/main" id="{18548BF6-9404-47FA-B088-77813D6B2AF4}"/>
+              </a:ext>
+            </a:extLst>
+          </p:cNvPr>
+          <p:cNvSpPr>
+            <a:spLocks noGrp="1"/>
+          </p:cNvSpPr>
           <p:nvPr/>
         </p:nvSpPr>
         <p:spPr>
@@ -4238,7 +4771,7 @@
           <a:noFill/>
         </p:spPr>
         <p:txBody>
-          <a:bodyPr wrap="square" lIns="0" rIns="0" tIns="0" bIns="0">
+          <a:bodyPr wrap="square" lIns="0" tIns="0" rIns="0" bIns="0">
             <a:spAutoFit/>
           </a:bodyPr>
           <a:lstStyle/>
@@ -4249,6 +4782,8 @@
                   <a:srgbClr val="707070"/>
                 </a:solidFill>
                 <a:latin typeface="Arial"/>
+                <a:ea typeface="Arial"/>
+                <a:cs typeface="Arial"/>
               </a:rPr>
               <a:t>Live Mon Sep 28 to Fri Oct 2, 12:00 to 12:20 PM ET. Sessions are recorded.</a:t>
             </a:r>
@@ -4257,8 +4792,16 @@
       </p:sp>
       <p:sp>
         <p:nvSpPr>
-          <p:cNvPr id="4" name="TextBox 3"/>
-          <p:cNvSpPr txBox="1"/>
+          <p:cNvPr id="4" name="TextBox 3">
+            <a:extLst>
+              <a:ext uri="{FF2B5EF4-FFF2-40B4-BE49-F238E27FC236}">
+                <a16:creationId xmlns:a16="http://schemas.microsoft.com/office/drawing/2014/main" id="{752B0494-F96A-41C1-A7F6-C6DECA4B96AE}"/>
+              </a:ext>
+            </a:extLst>
+          </p:cNvPr>
+          <p:cNvSpPr>
+            <a:spLocks noGrp="1"/>
+          </p:cNvSpPr>
           <p:nvPr/>
         </p:nvSpPr>
         <p:spPr>
@@ -4272,7 +4815,7 @@
           <a:noFill/>
         </p:spPr>
         <p:txBody>
-          <a:bodyPr wrap="square" lIns="0" rIns="0" tIns="0" bIns="0">
+          <a:bodyPr wrap="square" lIns="0" tIns="0" rIns="0" bIns="0">
             <a:spAutoFit/>
           </a:bodyPr>
           <a:lstStyle/>
@@ -4283,6 +4826,8 @@
                   <a:srgbClr val="CF3338"/>
                 </a:solidFill>
                 <a:latin typeface="Arial Black"/>
+                <a:ea typeface="Arial Black"/>
+                <a:cs typeface="Arial Black"/>
               </a:rPr>
               <a:t>STRINGFEST ANALYTICS</a:t>
             </a:r>
@@ -4290,6 +4835,11 @@
         </p:txBody>
       </p:sp>
     </p:spTree>
+    <p:extLst>
+      <p:ext uri="{BB962C8B-B14F-4D97-AF65-F5344CB8AC3E}">
+        <p14:creationId xmlns:p14="http://schemas.microsoft.com/office/powerpoint/2010/main" val="1794751887"/>
+      </p:ext>
+    </p:extLst>
   </p:cSld>
   <p:clrMapOvr>
     <a:masterClrMapping/>
@@ -4298,7 +4848,7 @@
 </file>
 
 <file path=ppt/slides/slide10.xml><?xml version="1.0" encoding="utf-8"?>
-<p:sld xmlns:a="http://schemas.openxmlformats.org/drawingml/2006/main" xmlns:p="http://schemas.openxmlformats.org/presentationml/2006/main" xmlns:r="http://schemas.openxmlformats.org/officeDocument/2006/relationships">
+<p:sld xmlns:a="http://schemas.openxmlformats.org/drawingml/2006/main" xmlns:r="http://schemas.openxmlformats.org/officeDocument/2006/relationships" xmlns:p="http://schemas.openxmlformats.org/presentationml/2006/main">
   <p:cSld>
     <p:bg>
       <p:bgPr>
@@ -4314,17 +4864,32 @@
         <p:cNvGrpSpPr/>
         <p:nvPr/>
       </p:nvGrpSpPr>
-      <p:grpSpPr/>
-      <p:sp>
-        <p:nvSpPr>
-          <p:cNvPr id="2" name="TextBox 1"/>
-          <p:cNvSpPr txBox="1"/>
+      <p:grpSpPr>
+        <a:xfrm>
+          <a:off x="0" y="0"/>
+          <a:ext cx="0" cy="0"/>
+          <a:chOff x="0" y="0"/>
+          <a:chExt cx="0" cy="0"/>
+        </a:xfrm>
+      </p:grpSpPr>
+      <p:sp>
+        <p:nvSpPr>
+          <p:cNvPr id="2" name="TextBox 1">
+            <a:extLst>
+              <a:ext uri="{FF2B5EF4-FFF2-40B4-BE49-F238E27FC236}">
+                <a16:creationId xmlns:a16="http://schemas.microsoft.com/office/drawing/2014/main" id="{35328A7F-85D0-4C9A-9AB5-4F6CA343009A}"/>
+              </a:ext>
+            </a:extLst>
+          </p:cNvPr>
+          <p:cNvSpPr>
+            <a:spLocks noGrp="1"/>
+          </p:cNvSpPr>
           <p:nvPr/>
         </p:nvSpPr>
         <p:spPr>
           <a:xfrm>
-            <a:off x="822960" y="2286000"/>
-            <a:ext cx="10332720" cy="2743200"/>
+            <a:off x="822960" y="2103120"/>
+            <a:ext cx="10515600" cy="2114550"/>
           </a:xfrm>
           <a:prstGeom prst="rect">
             <a:avLst/>
@@ -4332,7 +4897,7 @@
           <a:noFill/>
         </p:spPr>
         <p:txBody>
-          <a:bodyPr wrap="square" lIns="0" rIns="0" tIns="0" bIns="0">
+          <a:bodyPr wrap="square" lIns="0" tIns="0" rIns="0" bIns="0">
             <a:spAutoFit/>
           </a:bodyPr>
           <a:lstStyle/>
@@ -4343,6 +4908,8 @@
                   <a:srgbClr val="FFFFFF"/>
                 </a:solidFill>
                 <a:latin typeface="Arial Black"/>
+                <a:ea typeface="Arial Black"/>
+                <a:cs typeface="Arial Black"/>
               </a:rPr>
               <a:t>THANK YOU</a:t>
             </a:r>
@@ -4352,6 +4919,7 @@
               <a:spcBef>
                 <a:spcPts val="800"/>
               </a:spcBef>
+              <a:buNone/>
             </a:pPr>
             <a:r>
               <a:rPr sz="3600" b="1" i="0">
@@ -4359,6 +4927,8 @@
                   <a:srgbClr val="FFFFFF"/>
                 </a:solidFill>
                 <a:latin typeface="Arial Black"/>
+                <a:ea typeface="Arial Black"/>
+                <a:cs typeface="Arial Black"/>
               </a:rPr>
               <a:t>See you tomorrow at noon Eastern</a:t>
             </a:r>
@@ -4368,6 +4938,7 @@
               <a:spcBef>
                 <a:spcPts val="1400"/>
               </a:spcBef>
+              <a:buNone/>
             </a:pPr>
             <a:r>
               <a:rPr sz="1800" b="0" i="0">
@@ -4375,6 +4946,8 @@
                   <a:srgbClr val="FFFFFF"/>
                 </a:solidFill>
                 <a:latin typeface="Arial"/>
+                <a:ea typeface="Arial"/>
+                <a:cs typeface="Arial"/>
               </a:rPr>
               <a:t>Replays and the full back catalog live in the Stringfest membership vault.</a:t>
             </a:r>
@@ -4382,6 +4955,11 @@
         </p:txBody>
       </p:sp>
     </p:spTree>
+    <p:extLst>
+      <p:ext uri="{BB962C8B-B14F-4D97-AF65-F5344CB8AC3E}">
+        <p14:creationId xmlns:p14="http://schemas.microsoft.com/office/powerpoint/2010/main" val="917594386"/>
+      </p:ext>
+    </p:extLst>
   </p:cSld>
   <p:clrMapOvr>
     <a:masterClrMapping/>
@@ -4390,7 +4968,7 @@
 </file>
 
 <file path=ppt/slides/slide2.xml><?xml version="1.0" encoding="utf-8"?>
-<p:sld xmlns:a="http://schemas.openxmlformats.org/drawingml/2006/main" xmlns:p="http://schemas.openxmlformats.org/presentationml/2006/main" xmlns:r="http://schemas.openxmlformats.org/officeDocument/2006/relationships">
+<p:sld xmlns:a="http://schemas.openxmlformats.org/drawingml/2006/main" xmlns:r="http://schemas.openxmlformats.org/officeDocument/2006/relationships" xmlns:p="http://schemas.openxmlformats.org/presentationml/2006/main">
   <p:cSld>
     <p:bg>
       <p:bgPr>
@@ -4406,11 +4984,26 @@
         <p:cNvGrpSpPr/>
         <p:nvPr/>
       </p:nvGrpSpPr>
-      <p:grpSpPr/>
-      <p:sp>
-        <p:nvSpPr>
-          <p:cNvPr id="2" name="TextBox 1"/>
-          <p:cNvSpPr txBox="1"/>
+      <p:grpSpPr>
+        <a:xfrm>
+          <a:off x="0" y="0"/>
+          <a:ext cx="0" cy="0"/>
+          <a:chOff x="0" y="0"/>
+          <a:chExt cx="0" cy="0"/>
+        </a:xfrm>
+      </p:grpSpPr>
+      <p:sp>
+        <p:nvSpPr>
+          <p:cNvPr id="2" name="TextBox 1">
+            <a:extLst>
+              <a:ext uri="{FF2B5EF4-FFF2-40B4-BE49-F238E27FC236}">
+                <a16:creationId xmlns:a16="http://schemas.microsoft.com/office/drawing/2014/main" id="{3C330F3B-C254-4FFB-812E-2AEC125E2483}"/>
+              </a:ext>
+            </a:extLst>
+          </p:cNvPr>
+          <p:cNvSpPr>
+            <a:spLocks noGrp="1"/>
+          </p:cNvSpPr>
           <p:nvPr/>
         </p:nvSpPr>
         <p:spPr>
@@ -4424,7 +5017,7 @@
           <a:noFill/>
         </p:spPr>
         <p:txBody>
-          <a:bodyPr wrap="square" lIns="0" rIns="0" tIns="0" bIns="0">
+          <a:bodyPr wrap="square" lIns="0" tIns="0" rIns="0" bIns="0">
             <a:spAutoFit/>
           </a:bodyPr>
           <a:lstStyle/>
@@ -4435,6 +5028,8 @@
                   <a:srgbClr val="1F2120"/>
                 </a:solidFill>
                 <a:latin typeface="Arial Black"/>
+                <a:ea typeface="Arial Black"/>
+                <a:cs typeface="Arial Black"/>
               </a:rPr>
               <a:t>How this week works</a:t>
             </a:r>
@@ -4444,6 +5039,7 @@
               <a:spcBef>
                 <a:spcPts val="400"/>
               </a:spcBef>
+              <a:buNone/>
             </a:pPr>
             <a:r>
               <a:rPr sz="1500" b="0" i="1">
@@ -4451,6 +5047,8 @@
                   <a:srgbClr val="CF3338"/>
                 </a:solidFill>
                 <a:latin typeface="Arial"/>
+                <a:ea typeface="Arial"/>
+                <a:cs typeface="Arial"/>
               </a:rPr>
               <a:t>Housekeeping, then we never speak of it again</a:t>
             </a:r>
@@ -4459,8 +5057,16 @@
       </p:sp>
       <p:sp>
         <p:nvSpPr>
-          <p:cNvPr id="3" name="TextBox 2"/>
-          <p:cNvSpPr txBox="1"/>
+          <p:cNvPr id="3" name="TextBox 2">
+            <a:extLst>
+              <a:ext uri="{FF2B5EF4-FFF2-40B4-BE49-F238E27FC236}">
+                <a16:creationId xmlns:a16="http://schemas.microsoft.com/office/drawing/2014/main" id="{67F43C2D-217C-4CBE-9A25-376BEDD83480}"/>
+              </a:ext>
+            </a:extLst>
+          </p:cNvPr>
+          <p:cNvSpPr>
+            <a:spLocks noGrp="1"/>
+          </p:cNvSpPr>
           <p:nvPr/>
         </p:nvSpPr>
         <p:spPr>
@@ -4474,7 +5080,7 @@
           <a:noFill/>
         </p:spPr>
         <p:txBody>
-          <a:bodyPr wrap="square" lIns="0" rIns="0" tIns="0" bIns="0">
+          <a:bodyPr wrap="square" lIns="0" tIns="0" rIns="0" bIns="0">
             <a:spAutoFit/>
           </a:bodyPr>
           <a:lstStyle/>
@@ -4483,6 +5089,7 @@
               <a:spcAft>
                 <a:spcPts val="700"/>
               </a:spcAft>
+              <a:buNone/>
             </a:pPr>
             <a:r>
               <a:rPr sz="1200" b="1" i="0">
@@ -4490,8 +5097,10 @@
                   <a:srgbClr val="CF3338"/>
                 </a:solidFill>
                 <a:latin typeface="Arial"/>
-              </a:rPr>
-              <a:t>▶  </a:t>
+                <a:ea typeface="Arial"/>
+                <a:cs typeface="Arial"/>
+              </a:rPr>
+              <a:t>• </a:t>
             </a:r>
             <a:r>
               <a:rPr sz="1600" b="0" i="0">
@@ -4499,6 +5108,8 @@
                   <a:srgbClr val="1F2120"/>
                 </a:solidFill>
                 <a:latin typeface="Arial"/>
+                <a:ea typeface="Arial"/>
+                <a:cs typeface="Arial"/>
               </a:rPr>
               <a:t>Live Monday to Friday, 12:00 to 12:20 PM Eastern. Twenty minutes, one win per day.</a:t>
             </a:r>
@@ -4508,6 +5119,7 @@
               <a:spcAft>
                 <a:spcPts val="700"/>
               </a:spcAft>
+              <a:buNone/>
             </a:pPr>
             <a:r>
               <a:rPr sz="1200" b="1" i="0">
@@ -4515,8 +5127,10 @@
                   <a:srgbClr val="CF3338"/>
                 </a:solidFill>
                 <a:latin typeface="Arial"/>
-              </a:rPr>
-              <a:t>▶  </a:t>
+                <a:ea typeface="Arial"/>
+                <a:cs typeface="Arial"/>
+              </a:rPr>
+              <a:t>• </a:t>
             </a:r>
             <a:r>
               <a:rPr sz="1600" b="0" i="0">
@@ -4524,6 +5138,8 @@
                   <a:srgbClr val="1F2120"/>
                 </a:solidFill>
                 <a:latin typeface="Arial"/>
+                <a:ea typeface="Arial"/>
+                <a:cs typeface="Arial"/>
               </a:rPr>
               <a:t>Every session is recorded. Replays live in the Stringfest Analytics membership vault.</a:t>
             </a:r>
@@ -4533,6 +5149,7 @@
               <a:spcAft>
                 <a:spcPts val="700"/>
               </a:spcAft>
+              <a:buNone/>
             </a:pPr>
             <a:r>
               <a:rPr sz="1200" b="1" i="0">
@@ -4540,8 +5157,10 @@
                   <a:srgbClr val="CF3338"/>
                 </a:solidFill>
                 <a:latin typeface="Arial"/>
-              </a:rPr>
-              <a:t>▶  </a:t>
+                <a:ea typeface="Arial"/>
+                <a:cs typeface="Arial"/>
+              </a:rPr>
+              <a:t>• </a:t>
             </a:r>
             <a:r>
               <a:rPr sz="1600" b="0" i="0">
@@ -4549,6 +5168,8 @@
                   <a:srgbClr val="1F2120"/>
                 </a:solidFill>
                 <a:latin typeface="Arial"/>
+                <a:ea typeface="Arial"/>
+                <a:cs typeface="Arial"/>
               </a:rPr>
               <a:t>Files and follow-ups go to the email you registered with on Eventbrite. Watch that inbox.</a:t>
             </a:r>
@@ -4558,6 +5179,7 @@
               <a:spcAft>
                 <a:spcPts val="700"/>
               </a:spcAft>
+              <a:buNone/>
             </a:pPr>
             <a:r>
               <a:rPr sz="1200" b="1" i="0">
@@ -4565,8 +5187,10 @@
                   <a:srgbClr val="CF3338"/>
                 </a:solidFill>
                 <a:latin typeface="Arial"/>
-              </a:rPr>
-              <a:t>▶  </a:t>
+                <a:ea typeface="Arial"/>
+                <a:cs typeface="Arial"/>
+              </a:rPr>
+              <a:t>• </a:t>
             </a:r>
             <a:r>
               <a:rPr sz="1600" b="0" i="0">
@@ -4574,6 +5198,8 @@
                   <a:srgbClr val="1F2120"/>
                 </a:solidFill>
                 <a:latin typeface="Arial"/>
+                <a:ea typeface="Arial"/>
+                <a:cs typeface="Arial"/>
               </a:rPr>
               <a:t>One shared dataset all week: a genuinely ugly sales export from Lakeshore Office Supply.</a:t>
             </a:r>
@@ -4583,6 +5209,7 @@
               <a:spcAft>
                 <a:spcPts val="700"/>
               </a:spcAft>
+              <a:buNone/>
             </a:pPr>
             <a:r>
               <a:rPr sz="1200" b="1" i="0">
@@ -4590,8 +5217,10 @@
                   <a:srgbClr val="CF3338"/>
                 </a:solidFill>
                 <a:latin typeface="Arial"/>
-              </a:rPr>
-              <a:t>▶  </a:t>
+                <a:ea typeface="Arial"/>
+                <a:cs typeface="Arial"/>
+              </a:rPr>
+              <a:t>• </a:t>
             </a:r>
             <a:r>
               <a:rPr sz="1600" b="0" i="0">
@@ -4599,6 +5228,8 @@
                   <a:srgbClr val="1F2120"/>
                 </a:solidFill>
                 <a:latin typeface="Arial"/>
+                <a:ea typeface="Arial"/>
+                <a:cs typeface="Arial"/>
               </a:rPr>
               <a:t>Demos are watch-along. Each day ends with two or three things to do at your desk after.</a:t>
             </a:r>
@@ -4606,6 +5237,11 @@
         </p:txBody>
       </p:sp>
     </p:spTree>
+    <p:extLst>
+      <p:ext uri="{BB962C8B-B14F-4D97-AF65-F5344CB8AC3E}">
+        <p14:creationId xmlns:p14="http://schemas.microsoft.com/office/powerpoint/2010/main" val="334416618"/>
+      </p:ext>
+    </p:extLst>
   </p:cSld>
   <p:clrMapOvr>
     <a:masterClrMapping/>
@@ -4614,7 +5250,7 @@
 </file>
 
 <file path=ppt/slides/slide3.xml><?xml version="1.0" encoding="utf-8"?>
-<p:sld xmlns:a="http://schemas.openxmlformats.org/drawingml/2006/main" xmlns:p="http://schemas.openxmlformats.org/presentationml/2006/main" xmlns:r="http://schemas.openxmlformats.org/officeDocument/2006/relationships">
+<p:sld xmlns:a="http://schemas.openxmlformats.org/drawingml/2006/main" xmlns:r="http://schemas.openxmlformats.org/officeDocument/2006/relationships" xmlns:p="http://schemas.openxmlformats.org/presentationml/2006/main">
   <p:cSld>
     <p:bg>
       <p:bgPr>
@@ -4630,11 +5266,26 @@
         <p:cNvGrpSpPr/>
         <p:nvPr/>
       </p:nvGrpSpPr>
-      <p:grpSpPr/>
-      <p:sp>
-        <p:nvSpPr>
-          <p:cNvPr id="2" name="TextBox 1"/>
-          <p:cNvSpPr txBox="1"/>
+      <p:grpSpPr>
+        <a:xfrm>
+          <a:off x="0" y="0"/>
+          <a:ext cx="0" cy="0"/>
+          <a:chOff x="0" y="0"/>
+          <a:chExt cx="0" cy="0"/>
+        </a:xfrm>
+      </p:grpSpPr>
+      <p:sp>
+        <p:nvSpPr>
+          <p:cNvPr id="2" name="TextBox 1">
+            <a:extLst>
+              <a:ext uri="{FF2B5EF4-FFF2-40B4-BE49-F238E27FC236}">
+                <a16:creationId xmlns:a16="http://schemas.microsoft.com/office/drawing/2014/main" id="{31C0E947-B901-4781-8D40-D3AE6DC6C68F}"/>
+              </a:ext>
+            </a:extLst>
+          </p:cNvPr>
+          <p:cNvSpPr>
+            <a:spLocks noGrp="1"/>
+          </p:cNvSpPr>
           <p:nvPr/>
         </p:nvSpPr>
         <p:spPr>
@@ -4648,7 +5299,7 @@
           <a:noFill/>
         </p:spPr>
         <p:txBody>
-          <a:bodyPr wrap="square" lIns="0" rIns="0" tIns="0" bIns="0">
+          <a:bodyPr wrap="square" lIns="0" tIns="0" rIns="0" bIns="0">
             <a:spAutoFit/>
           </a:bodyPr>
           <a:lstStyle/>
@@ -4659,6 +5310,8 @@
                   <a:srgbClr val="1F2120"/>
                 </a:solidFill>
                 <a:latin typeface="Arial Black"/>
+                <a:ea typeface="Arial Black"/>
+                <a:cs typeface="Arial Black"/>
               </a:rPr>
               <a:t>Why this counts as AI</a:t>
             </a:r>
@@ -4668,6 +5321,7 @@
               <a:spcBef>
                 <a:spcPts val="400"/>
               </a:spcBef>
+              <a:buNone/>
             </a:pPr>
             <a:r>
               <a:rPr sz="1500" b="0" i="1">
@@ -4675,6 +5329,8 @@
                   <a:srgbClr val="CF3338"/>
                 </a:solidFill>
                 <a:latin typeface="Arial"/>
+                <a:ea typeface="Arial"/>
+                <a:cs typeface="Arial"/>
               </a:rPr>
               <a:t>The guerrilla hook, day 1</a:t>
             </a:r>
@@ -4683,8 +5339,16 @@
       </p:sp>
       <p:sp>
         <p:nvSpPr>
-          <p:cNvPr id="3" name="TextBox 2"/>
-          <p:cNvSpPr txBox="1"/>
+          <p:cNvPr id="3" name="TextBox 2">
+            <a:extLst>
+              <a:ext uri="{FF2B5EF4-FFF2-40B4-BE49-F238E27FC236}">
+                <a16:creationId xmlns:a16="http://schemas.microsoft.com/office/drawing/2014/main" id="{C353EF1C-4DE6-41A1-8E16-73ABA6648D46}"/>
+              </a:ext>
+            </a:extLst>
+          </p:cNvPr>
+          <p:cNvSpPr>
+            <a:spLocks noGrp="1"/>
+          </p:cNvSpPr>
           <p:nvPr/>
         </p:nvSpPr>
         <p:spPr>
@@ -4698,7 +5362,7 @@
           <a:noFill/>
         </p:spPr>
         <p:txBody>
-          <a:bodyPr wrap="square" lIns="0" rIns="0" tIns="0" bIns="0">
+          <a:bodyPr wrap="square" lIns="0" tIns="0" rIns="0" bIns="0">
             <a:spAutoFit/>
           </a:bodyPr>
           <a:lstStyle/>
@@ -4707,6 +5371,7 @@
               <a:spcAft>
                 <a:spcPts val="700"/>
               </a:spcAft>
+              <a:buNone/>
             </a:pPr>
             <a:r>
               <a:rPr sz="1200" b="1" i="0">
@@ -4714,8 +5379,10 @@
                   <a:srgbClr val="CF3338"/>
                 </a:solidFill>
                 <a:latin typeface="Arial"/>
-              </a:rPr>
-              <a:t>▶  </a:t>
+                <a:ea typeface="Arial"/>
+                <a:cs typeface="Arial"/>
+              </a:rPr>
+              <a:t>• </a:t>
             </a:r>
             <a:r>
               <a:rPr sz="1600" b="0" i="0">
@@ -4723,6 +5390,8 @@
                   <a:srgbClr val="1F2120"/>
                 </a:solidFill>
                 <a:latin typeface="Arial"/>
+                <a:ea typeface="Arial"/>
+                <a:cs typeface="Arial"/>
               </a:rPr>
               <a:t>Microsoft shipped machine learning inside Excel years ago and nobody told you.</a:t>
             </a:r>
@@ -4732,6 +5401,7 @@
               <a:spcAft>
                 <a:spcPts val="700"/>
               </a:spcAft>
+              <a:buNone/>
             </a:pPr>
             <a:r>
               <a:rPr sz="1200" b="1" i="0">
@@ -4739,8 +5409,10 @@
                   <a:srgbClr val="CF3338"/>
                 </a:solidFill>
                 <a:latin typeface="Arial"/>
-              </a:rPr>
-              <a:t>▶  </a:t>
+                <a:ea typeface="Arial"/>
+                <a:cs typeface="Arial"/>
+              </a:rPr>
+              <a:t>• </a:t>
             </a:r>
             <a:r>
               <a:rPr sz="1600" b="0" i="0">
@@ -4748,6 +5420,8 @@
                   <a:srgbClr val="1F2120"/>
                 </a:solidFill>
                 <a:latin typeface="Arial"/>
+                <a:ea typeface="Arial"/>
+                <a:cs typeface="Arial"/>
               </a:rPr>
               <a:t>Flash Fill is pattern recognition. You give one example and it learns the rule.</a:t>
             </a:r>
@@ -4757,6 +5431,7 @@
               <a:spcAft>
                 <a:spcPts val="700"/>
               </a:spcAft>
+              <a:buNone/>
             </a:pPr>
             <a:r>
               <a:rPr sz="1200" b="1" i="0">
@@ -4764,8 +5439,10 @@
                   <a:srgbClr val="CF3338"/>
                 </a:solidFill>
                 <a:latin typeface="Arial"/>
-              </a:rPr>
-              <a:t>▶  </a:t>
+                <a:ea typeface="Arial"/>
+                <a:cs typeface="Arial"/>
+              </a:rPr>
+              <a:t>• </a:t>
             </a:r>
             <a:r>
               <a:rPr sz="1600" b="0" i="0">
@@ -4773,8 +5450,10 @@
                   <a:srgbClr val="1F2120"/>
                 </a:solidFill>
                 <a:latin typeface="Arial"/>
-              </a:rPr>
-              <a:t>Analyze Data and Recommended PivotTables are models running against your data, no license required.</a:t>
+                <a:ea typeface="Arial"/>
+                <a:cs typeface="Arial"/>
+              </a:rPr>
+              <a:t>Analyze Data and Recommended PivotTables suggest ways to summarize your data.</a:t>
             </a:r>
           </a:p>
           <a:p>
@@ -4782,6 +5461,7 @@
               <a:spcAft>
                 <a:spcPts val="700"/>
               </a:spcAft>
+              <a:buNone/>
             </a:pPr>
             <a:r>
               <a:rPr sz="1200" b="1" i="0">
@@ -4789,8 +5469,10 @@
                   <a:srgbClr val="CF3338"/>
                 </a:solidFill>
                 <a:latin typeface="Arial"/>
-              </a:rPr>
-              <a:t>▶  </a:t>
+                <a:ea typeface="Arial"/>
+                <a:cs typeface="Arial"/>
+              </a:rPr>
+              <a:t>• </a:t>
             </a:r>
             <a:r>
               <a:rPr sz="1600" b="0" i="0">
@@ -4798,6 +5480,8 @@
                   <a:srgbClr val="1F2120"/>
                 </a:solidFill>
                 <a:latin typeface="Arial"/>
+                <a:ea typeface="Arial"/>
+                <a:cs typeface="Arial"/>
               </a:rPr>
               <a:t>The guerrilla skill is knowing these exist and when to reach for them.</a:t>
             </a:r>
@@ -4807,6 +5491,7 @@
               <a:spcAft>
                 <a:spcPts val="700"/>
               </a:spcAft>
+              <a:buNone/>
             </a:pPr>
             <a:r>
               <a:rPr sz="1200" b="1" i="0">
@@ -4814,8 +5499,10 @@
                   <a:srgbClr val="CF3338"/>
                 </a:solidFill>
                 <a:latin typeface="Arial"/>
-              </a:rPr>
-              <a:t>▶  </a:t>
+                <a:ea typeface="Arial"/>
+                <a:cs typeface="Arial"/>
+              </a:rPr>
+              <a:t>• </a:t>
             </a:r>
             <a:r>
               <a:rPr sz="1600" b="0" i="0">
@@ -4823,6 +5510,8 @@
                   <a:srgbClr val="1F2120"/>
                 </a:solidFill>
                 <a:latin typeface="Arial"/>
+                <a:ea typeface="Arial"/>
+                <a:cs typeface="Arial"/>
               </a:rPr>
               <a:t>Before asking for an AI budget, exhaust the AI you already have.</a:t>
             </a:r>
@@ -4830,6 +5519,11 @@
         </p:txBody>
       </p:sp>
     </p:spTree>
+    <p:extLst>
+      <p:ext uri="{BB962C8B-B14F-4D97-AF65-F5344CB8AC3E}">
+        <p14:creationId xmlns:p14="http://schemas.microsoft.com/office/powerpoint/2010/main" val="623969976"/>
+      </p:ext>
+    </p:extLst>
   </p:cSld>
   <p:clrMapOvr>
     <a:masterClrMapping/>
@@ -4838,7 +5532,7 @@
 </file>
 
 <file path=ppt/slides/slide4.xml><?xml version="1.0" encoding="utf-8"?>
-<p:sld xmlns:a="http://schemas.openxmlformats.org/drawingml/2006/main" xmlns:p="http://schemas.openxmlformats.org/presentationml/2006/main" xmlns:r="http://schemas.openxmlformats.org/officeDocument/2006/relationships">
+<p:sld xmlns:a="http://schemas.openxmlformats.org/drawingml/2006/main" xmlns:r="http://schemas.openxmlformats.org/officeDocument/2006/relationships" xmlns:p="http://schemas.openxmlformats.org/presentationml/2006/main">
   <p:cSld>
     <p:bg>
       <p:bgPr>
@@ -4854,11 +5548,26 @@
         <p:cNvGrpSpPr/>
         <p:nvPr/>
       </p:nvGrpSpPr>
-      <p:grpSpPr/>
-      <p:sp>
-        <p:nvSpPr>
-          <p:cNvPr id="2" name="TextBox 1"/>
-          <p:cNvSpPr txBox="1"/>
+      <p:grpSpPr>
+        <a:xfrm>
+          <a:off x="0" y="0"/>
+          <a:ext cx="0" cy="0"/>
+          <a:chOff x="0" y="0"/>
+          <a:chExt cx="0" cy="0"/>
+        </a:xfrm>
+      </p:grpSpPr>
+      <p:sp>
+        <p:nvSpPr>
+          <p:cNvPr id="2" name="TextBox 1">
+            <a:extLst>
+              <a:ext uri="{FF2B5EF4-FFF2-40B4-BE49-F238E27FC236}">
+                <a16:creationId xmlns:a16="http://schemas.microsoft.com/office/drawing/2014/main" id="{7B99CC36-AF2E-4550-A3A5-92244EC1A785}"/>
+              </a:ext>
+            </a:extLst>
+          </p:cNvPr>
+          <p:cNvSpPr>
+            <a:spLocks noGrp="1"/>
+          </p:cNvSpPr>
           <p:nvPr/>
         </p:nvSpPr>
         <p:spPr>
@@ -4872,7 +5581,7 @@
           <a:noFill/>
         </p:spPr>
         <p:txBody>
-          <a:bodyPr wrap="square" lIns="0" rIns="0" tIns="0" bIns="0">
+          <a:bodyPr wrap="square" lIns="0" tIns="0" rIns="0" bIns="0">
             <a:spAutoFit/>
           </a:bodyPr>
           <a:lstStyle/>
@@ -4883,6 +5592,8 @@
                   <a:srgbClr val="1F2120"/>
                 </a:solidFill>
                 <a:latin typeface="Arial Black"/>
+                <a:ea typeface="Arial Black"/>
+                <a:cs typeface="Arial Black"/>
               </a:rPr>
               <a:t>Meet the mess: the Lakeshore export</a:t>
             </a:r>
@@ -4892,6 +5603,7 @@
               <a:spcBef>
                 <a:spcPts val="400"/>
               </a:spcBef>
+              <a:buNone/>
             </a:pPr>
             <a:r>
               <a:rPr sz="1500" b="0" i="1">
@@ -4899,6 +5611,8 @@
                   <a:srgbClr val="CF3338"/>
                 </a:solidFill>
                 <a:latin typeface="Arial"/>
+                <a:ea typeface="Arial"/>
+                <a:cs typeface="Arial"/>
               </a:rPr>
               <a:t>One dataset, all five days</a:t>
             </a:r>
@@ -4907,8 +5621,16 @@
       </p:sp>
       <p:sp>
         <p:nvSpPr>
-          <p:cNvPr id="3" name="TextBox 2"/>
-          <p:cNvSpPr txBox="1"/>
+          <p:cNvPr id="3" name="TextBox 2">
+            <a:extLst>
+              <a:ext uri="{FF2B5EF4-FFF2-40B4-BE49-F238E27FC236}">
+                <a16:creationId xmlns:a16="http://schemas.microsoft.com/office/drawing/2014/main" id="{0DAAA142-AAEA-467C-8596-B8CA4535B5EF}"/>
+              </a:ext>
+            </a:extLst>
+          </p:cNvPr>
+          <p:cNvSpPr>
+            <a:spLocks noGrp="1"/>
+          </p:cNvSpPr>
           <p:nvPr/>
         </p:nvSpPr>
         <p:spPr>
@@ -4922,7 +5644,7 @@
           <a:noFill/>
         </p:spPr>
         <p:txBody>
-          <a:bodyPr wrap="square" lIns="0" rIns="0" tIns="0" bIns="0">
+          <a:bodyPr wrap="square" lIns="0" tIns="0" rIns="0" bIns="0">
             <a:spAutoFit/>
           </a:bodyPr>
           <a:lstStyle/>
@@ -4931,6 +5653,7 @@
               <a:spcAft>
                 <a:spcPts val="700"/>
               </a:spcAft>
+              <a:buNone/>
             </a:pPr>
             <a:r>
               <a:rPr sz="1200" b="1" i="0">
@@ -4938,8 +5661,10 @@
                   <a:srgbClr val="CF3338"/>
                 </a:solidFill>
                 <a:latin typeface="Arial"/>
-              </a:rPr>
-              <a:t>▶  </a:t>
+                <a:ea typeface="Arial"/>
+                <a:cs typeface="Arial"/>
+              </a:rPr>
+              <a:t>• </a:t>
             </a:r>
             <a:r>
               <a:rPr sz="1600" b="0" i="0">
@@ -4947,6 +5672,8 @@
                   <a:srgbClr val="1F2120"/>
                 </a:solidFill>
                 <a:latin typeface="Arial"/>
+                <a:ea typeface="Arial"/>
+                <a:cs typeface="Arial"/>
               </a:rPr>
               <a:t>Rep appears only as an email address</a:t>
             </a:r>
@@ -4956,6 +5683,7 @@
               <a:spcAft>
                 <a:spcPts val="700"/>
               </a:spcAft>
+              <a:buNone/>
             </a:pPr>
             <a:r>
               <a:rPr sz="1200" b="1" i="0">
@@ -4963,8 +5691,10 @@
                   <a:srgbClr val="CF3338"/>
                 </a:solidFill>
                 <a:latin typeface="Arial"/>
-              </a:rPr>
-              <a:t>▶  </a:t>
+                <a:ea typeface="Arial"/>
+                <a:cs typeface="Arial"/>
+              </a:rPr>
+              <a:t>• </a:t>
             </a:r>
             <a:r>
               <a:rPr sz="1600" b="0" i="0">
@@ -4972,6 +5702,8 @@
                   <a:srgbClr val="1F2120"/>
                 </a:solidFill>
                 <a:latin typeface="Arial"/>
+                <a:ea typeface="Arial"/>
+                <a:cs typeface="Arial"/>
               </a:rPr>
               <a:t>Product and category jammed into one column</a:t>
             </a:r>
@@ -4981,6 +5713,7 @@
               <a:spcAft>
                 <a:spcPts val="700"/>
               </a:spcAft>
+              <a:buNone/>
             </a:pPr>
             <a:r>
               <a:rPr sz="1200" b="1" i="0">
@@ -4988,8 +5721,10 @@
                   <a:srgbClr val="CF3338"/>
                 </a:solidFill>
                 <a:latin typeface="Arial"/>
-              </a:rPr>
-              <a:t>▶  </a:t>
+                <a:ea typeface="Arial"/>
+                <a:cs typeface="Arial"/>
+              </a:rPr>
+              <a:t>• </a:t>
             </a:r>
             <a:r>
               <a:rPr sz="1600" b="0" i="0">
@@ -4997,6 +5732,8 @@
                   <a:srgbClr val="1F2120"/>
                 </a:solidFill>
                 <a:latin typeface="Arial"/>
+                <a:ea typeface="Arial"/>
+                <a:cs typeface="Arial"/>
               </a:rPr>
               <a:t>Region typed four different ways, some with stray spaces</a:t>
             </a:r>
@@ -5006,6 +5743,7 @@
               <a:spcAft>
                 <a:spcPts val="700"/>
               </a:spcAft>
+              <a:buNone/>
             </a:pPr>
             <a:r>
               <a:rPr sz="1200" b="1" i="0">
@@ -5013,8 +5751,10 @@
                   <a:srgbClr val="CF3338"/>
                 </a:solidFill>
                 <a:latin typeface="Arial"/>
-              </a:rPr>
-              <a:t>▶  </a:t>
+                <a:ea typeface="Arial"/>
+                <a:cs typeface="Arial"/>
+              </a:rPr>
+              <a:t>• </a:t>
             </a:r>
             <a:r>
               <a:rPr sz="1600" b="0" i="0">
@@ -5022,6 +5762,8 @@
                   <a:srgbClr val="1F2120"/>
                 </a:solidFill>
                 <a:latin typeface="Arial"/>
+                <a:ea typeface="Arial"/>
+                <a:cs typeface="Arial"/>
               </a:rPr>
               <a:t>Dates in two formats, numbers stored as text, prices with $ signs</a:t>
             </a:r>
@@ -5031,6 +5773,7 @@
               <a:spcAft>
                 <a:spcPts val="700"/>
               </a:spcAft>
+              <a:buNone/>
             </a:pPr>
             <a:r>
               <a:rPr sz="1200" b="1" i="0">
@@ -5038,8 +5781,10 @@
                   <a:srgbClr val="CF3338"/>
                 </a:solidFill>
                 <a:latin typeface="Arial"/>
-              </a:rPr>
-              <a:t>▶  </a:t>
+                <a:ea typeface="Arial"/>
+                <a:cs typeface="Arial"/>
+              </a:rPr>
+              <a:t>• </a:t>
             </a:r>
             <a:r>
               <a:rPr sz="1600" b="0" i="0">
@@ -5047,6 +5792,8 @@
                   <a:srgbClr val="1F2120"/>
                 </a:solidFill>
                 <a:latin typeface="Arial"/>
+                <a:ea typeface="Arial"/>
+                <a:cs typeface="Arial"/>
               </a:rPr>
               <a:t>Two TOTAL rows and a blank row buried in the data</a:t>
             </a:r>
@@ -5054,6 +5801,11 @@
         </p:txBody>
       </p:sp>
     </p:spTree>
+    <p:extLst>
+      <p:ext uri="{BB962C8B-B14F-4D97-AF65-F5344CB8AC3E}">
+        <p14:creationId xmlns:p14="http://schemas.microsoft.com/office/powerpoint/2010/main" val="954330396"/>
+      </p:ext>
+    </p:extLst>
   </p:cSld>
   <p:clrMapOvr>
     <a:masterClrMapping/>
@@ -5062,7 +5814,7 @@
 </file>
 
 <file path=ppt/slides/slide5.xml><?xml version="1.0" encoding="utf-8"?>
-<p:sld xmlns:a="http://schemas.openxmlformats.org/drawingml/2006/main" xmlns:p="http://schemas.openxmlformats.org/presentationml/2006/main" xmlns:r="http://schemas.openxmlformats.org/officeDocument/2006/relationships">
+<p:sld xmlns:a="http://schemas.openxmlformats.org/drawingml/2006/main" xmlns:r="http://schemas.openxmlformats.org/officeDocument/2006/relationships" xmlns:p="http://schemas.openxmlformats.org/presentationml/2006/main">
   <p:cSld>
     <p:bg>
       <p:bgPr>
@@ -5078,11 +5830,26 @@
         <p:cNvGrpSpPr/>
         <p:nvPr/>
       </p:nvGrpSpPr>
-      <p:grpSpPr/>
-      <p:sp>
-        <p:nvSpPr>
-          <p:cNvPr id="2" name="Rectangle 1"/>
-          <p:cNvSpPr/>
+      <p:grpSpPr>
+        <a:xfrm>
+          <a:off x="0" y="0"/>
+          <a:ext cx="0" cy="0"/>
+          <a:chOff x="0" y="0"/>
+          <a:chExt cx="0" cy="0"/>
+        </a:xfrm>
+      </p:grpSpPr>
+      <p:sp>
+        <p:nvSpPr>
+          <p:cNvPr id="2" name="Rectangle 1">
+            <a:extLst>
+              <a:ext uri="{FF2B5EF4-FFF2-40B4-BE49-F238E27FC236}">
+                <a16:creationId xmlns:a16="http://schemas.microsoft.com/office/drawing/2014/main" id="{58472192-5C9F-4ABB-98E7-B7586C2C374D}"/>
+              </a:ext>
+            </a:extLst>
+          </p:cNvPr>
+          <p:cNvSpPr>
+            <a:spLocks noGrp="1"/>
+          </p:cNvSpPr>
           <p:nvPr/>
         </p:nvSpPr>
         <p:spPr>
@@ -5099,7 +5866,6 @@
           <a:ln>
             <a:noFill/>
           </a:ln>
-          <a:effectLst/>
         </p:spPr>
         <p:style>
           <a:lnRef idx="1">
@@ -5116,17 +5882,28 @@
           </a:fontRef>
         </p:style>
         <p:txBody>
-          <a:bodyPr rtlCol="0" anchor="ctr"/>
-          <a:lstStyle/>
-          <a:p>
-            <a:pPr algn="ctr"/>
-          </a:p>
-        </p:txBody>
-      </p:sp>
-      <p:sp>
-        <p:nvSpPr>
-          <p:cNvPr id="3" name="TextBox 2"/>
-          <p:cNvSpPr txBox="1"/>
+          <a:bodyPr anchor="ctr"/>
+          <a:lstStyle/>
+          <a:p>
+            <a:pPr algn="ctr">
+              <a:buNone/>
+            </a:pPr>
+            <a:endParaRPr/>
+          </a:p>
+        </p:txBody>
+      </p:sp>
+      <p:sp>
+        <p:nvSpPr>
+          <p:cNvPr id="3" name="TextBox 2">
+            <a:extLst>
+              <a:ext uri="{FF2B5EF4-FFF2-40B4-BE49-F238E27FC236}">
+                <a16:creationId xmlns:a16="http://schemas.microsoft.com/office/drawing/2014/main" id="{345E01E3-E40C-4AEC-8DE1-88988D828AEC}"/>
+              </a:ext>
+            </a:extLst>
+          </p:cNvPr>
+          <p:cNvSpPr>
+            <a:spLocks noGrp="1"/>
+          </p:cNvSpPr>
           <p:nvPr/>
         </p:nvSpPr>
         <p:spPr>
@@ -5140,7 +5917,7 @@
           <a:noFill/>
         </p:spPr>
         <p:txBody>
-          <a:bodyPr wrap="square" lIns="0" rIns="0" tIns="0" bIns="0">
+          <a:bodyPr wrap="square" lIns="0" tIns="0" rIns="0" bIns="0">
             <a:spAutoFit/>
           </a:bodyPr>
           <a:lstStyle/>
@@ -5151,6 +5928,8 @@
                   <a:srgbClr val="FFFFFF"/>
                 </a:solidFill>
                 <a:latin typeface="Arial Black"/>
+                <a:ea typeface="Arial Black"/>
+                <a:cs typeface="Arial Black"/>
               </a:rPr>
               <a:t>LIVE</a:t>
             </a:r>
@@ -5162,6 +5941,8 @@
                   <a:srgbClr val="FFFFFF"/>
                 </a:solidFill>
                 <a:latin typeface="Arial Black"/>
+                <a:ea typeface="Arial Black"/>
+                <a:cs typeface="Arial Black"/>
               </a:rPr>
               <a:t>DEMO</a:t>
             </a:r>
@@ -5170,8 +5951,16 @@
       </p:sp>
       <p:sp>
         <p:nvSpPr>
-          <p:cNvPr id="4" name="TextBox 3"/>
-          <p:cNvSpPr txBox="1"/>
+          <p:cNvPr id="4" name="TextBox 3">
+            <a:extLst>
+              <a:ext uri="{FF2B5EF4-FFF2-40B4-BE49-F238E27FC236}">
+                <a16:creationId xmlns:a16="http://schemas.microsoft.com/office/drawing/2014/main" id="{83E7A947-3801-4917-B83F-EAFBF762EB38}"/>
+              </a:ext>
+            </a:extLst>
+          </p:cNvPr>
+          <p:cNvSpPr>
+            <a:spLocks noGrp="1"/>
+          </p:cNvSpPr>
           <p:nvPr/>
         </p:nvSpPr>
         <p:spPr>
@@ -5185,7 +5974,7 @@
           <a:noFill/>
         </p:spPr>
         <p:txBody>
-          <a:bodyPr wrap="square" lIns="0" rIns="0" tIns="0" bIns="0">
+          <a:bodyPr wrap="square" lIns="0" tIns="0" rIns="0" bIns="0">
             <a:spAutoFit/>
           </a:bodyPr>
           <a:lstStyle/>
@@ -5196,6 +5985,8 @@
                   <a:srgbClr val="CF3338"/>
                 </a:solidFill>
                 <a:latin typeface="Arial Black"/>
+                <a:ea typeface="Arial Black"/>
+                <a:cs typeface="Arial Black"/>
               </a:rPr>
               <a:t>Live demo: Flash Fill</a:t>
             </a:r>
@@ -5205,6 +5996,7 @@
               <a:spcBef>
                 <a:spcPts val="300"/>
               </a:spcBef>
+              <a:buNone/>
             </a:pPr>
             <a:r>
               <a:rPr sz="1450" b="0" i="1">
@@ -5212,6 +6004,8 @@
                   <a:srgbClr val="707070"/>
                 </a:solidFill>
                 <a:latin typeface="Arial"/>
+                <a:ea typeface="Arial"/>
+                <a:cs typeface="Arial"/>
               </a:rPr>
               <a:t>One typed example teaches Excel the pattern. Watch column I.</a:t>
             </a:r>
@@ -5220,8 +6014,16 @@
       </p:sp>
       <p:sp>
         <p:nvSpPr>
-          <p:cNvPr id="5" name="Rounded Rectangle 4"/>
-          <p:cNvSpPr/>
+          <p:cNvPr id="5" name="Rounded Rectangle 4">
+            <a:extLst>
+              <a:ext uri="{FF2B5EF4-FFF2-40B4-BE49-F238E27FC236}">
+                <a16:creationId xmlns:a16="http://schemas.microsoft.com/office/drawing/2014/main" id="{80A09D0F-1021-4CB7-B8B8-E77835FC94EF}"/>
+              </a:ext>
+            </a:extLst>
+          </p:cNvPr>
+          <p:cNvSpPr>
+            <a:spLocks noGrp="1"/>
+          </p:cNvSpPr>
           <p:nvPr/>
         </p:nvSpPr>
         <p:spPr>
@@ -5238,7 +6040,6 @@
           <a:ln>
             <a:noFill/>
           </a:ln>
-          <a:effectLst/>
         </p:spPr>
         <p:style>
           <a:lnRef idx="1">
@@ -5255,13 +6056,14 @@
           </a:fontRef>
         </p:style>
         <p:txBody>
-          <a:bodyPr rtlCol="0" anchor="t" wrap="square" lIns="256032" rIns="182880" tIns="182880" bIns="109728"/>
+          <a:bodyPr wrap="square" lIns="256032" tIns="182880" rIns="182880" bIns="109728" anchor="t"/>
           <a:lstStyle/>
           <a:p>
             <a:pPr algn="l">
               <a:spcAft>
                 <a:spcPts val="100"/>
               </a:spcAft>
+              <a:buNone/>
             </a:pPr>
             <a:r>
               <a:rPr sz="1300" b="0" i="0">
@@ -5269,6 +6071,8 @@
                   <a:srgbClr val="9EC57A"/>
                 </a:solidFill>
                 <a:latin typeface="Consolas"/>
+                <a:ea typeface="Consolas"/>
+                <a:cs typeface="Consolas"/>
               </a:rPr>
               <a:t># Split a clean name out of the email column</a:t>
             </a:r>
@@ -5278,6 +6082,7 @@
               <a:spcAft>
                 <a:spcPts val="100"/>
               </a:spcAft>
+              <a:buNone/>
             </a:pPr>
             <a:r>
               <a:rPr sz="1300" b="0" i="0">
@@ -5285,6 +6090,8 @@
                   <a:srgbClr val="F5F5F5"/>
                 </a:solidFill>
                 <a:latin typeface="Consolas"/>
+                <a:ea typeface="Consolas"/>
+                <a:cs typeface="Consolas"/>
               </a:rPr>
               <a:t>1. On raw-export, click cell I1 and type: Rep Name</a:t>
             </a:r>
@@ -5294,6 +6101,7 @@
               <a:spcAft>
                 <a:spcPts val="100"/>
               </a:spcAft>
+              <a:buNone/>
             </a:pPr>
             <a:r>
               <a:rPr sz="1300" b="0" i="0">
@@ -5301,8 +6109,10 @@
                   <a:srgbClr val="F5F5F5"/>
                 </a:solidFill>
                 <a:latin typeface="Consolas"/>
-              </a:rPr>
-              <a:t>2. In I2, type the answer for row 2: Dana Kowalski</a:t>
+                <a:ea typeface="Consolas"/>
+                <a:cs typeface="Consolas"/>
+              </a:rPr>
+              <a:t>2. In I2, type the answer for row 2: Marcus Webb</a:t>
             </a:r>
           </a:p>
           <a:p>
@@ -5310,6 +6120,7 @@
               <a:spcAft>
                 <a:spcPts val="100"/>
               </a:spcAft>
+              <a:buNone/>
             </a:pPr>
             <a:r>
               <a:rPr sz="1300" b="0" i="0">
@@ -5317,6 +6128,8 @@
                   <a:srgbClr val="F5F5F5"/>
                 </a:solidFill>
                 <a:latin typeface="Consolas"/>
+                <a:ea typeface="Consolas"/>
+                <a:cs typeface="Consolas"/>
               </a:rPr>
               <a:t>3. Press Enter, then press Ctrl+E (Flash Fill)</a:t>
             </a:r>
@@ -5326,6 +6139,7 @@
               <a:spcAft>
                 <a:spcPts val="100"/>
               </a:spcAft>
+              <a:buNone/>
             </a:pPr>
             <a:r>
               <a:rPr sz="1300" b="0" i="0">
@@ -5333,6 +6147,8 @@
                   <a:srgbClr val="F5F5F5"/>
                 </a:solidFill>
                 <a:latin typeface="Consolas"/>
+                <a:ea typeface="Consolas"/>
+                <a:cs typeface="Consolas"/>
               </a:rPr>
               <a:t>4. Watch the whole column fill from your one example</a:t>
             </a:r>
@@ -5342,6 +6158,7 @@
               <a:spcAft>
                 <a:spcPts val="100"/>
               </a:spcAft>
+              <a:buNone/>
             </a:pPr>
             <a:r>
               <a:rPr sz="1300" b="0" i="0">
@@ -5349,6 +6166,8 @@
                   <a:srgbClr val="F5F5F5"/>
                 </a:solidFill>
                 <a:latin typeface="Consolas"/>
+                <a:ea typeface="Consolas"/>
+                <a:cs typeface="Consolas"/>
               </a:rPr>
               <a:t>5. Spot-check two rows near the bottom</a:t>
             </a:r>
@@ -5357,8 +6176,16 @@
       </p:sp>
       <p:sp>
         <p:nvSpPr>
-          <p:cNvPr id="6" name="TextBox 5"/>
-          <p:cNvSpPr txBox="1"/>
+          <p:cNvPr id="6" name="TextBox 5">
+            <a:extLst>
+              <a:ext uri="{FF2B5EF4-FFF2-40B4-BE49-F238E27FC236}">
+                <a16:creationId xmlns:a16="http://schemas.microsoft.com/office/drawing/2014/main" id="{F2104570-B25D-4E0E-B5D3-63779E4B8905}"/>
+              </a:ext>
+            </a:extLst>
+          </p:cNvPr>
+          <p:cNvSpPr>
+            <a:spLocks noGrp="1"/>
+          </p:cNvSpPr>
           <p:nvPr/>
         </p:nvSpPr>
         <p:spPr>
@@ -5372,7 +6199,7 @@
           <a:noFill/>
         </p:spPr>
         <p:txBody>
-          <a:bodyPr wrap="square" lIns="0" rIns="0" tIns="0" bIns="0">
+          <a:bodyPr wrap="square" lIns="0" tIns="0" rIns="0" bIns="0">
             <a:spAutoFit/>
           </a:bodyPr>
           <a:lstStyle/>
@@ -5383,13 +6210,237 @@
                   <a:srgbClr val="CF3338"/>
                 </a:solidFill>
                 <a:latin typeface="Arial"/>
-              </a:rPr>
-              <a:t>▶  Machine learning, shipped in 2013, license cost: zero</a:t>
+                <a:ea typeface="Arial"/>
+                <a:cs typeface="Arial"/>
+              </a:rPr>
+              <a:t>• Machine learning, shipped in 2013, license cost: zero</a:t>
+            </a:r>
+          </a:p>
+        </p:txBody>
+      </p:sp>
+      <p:sp>
+        <p:nvSpPr>
+          <p:cNvPr id="7" name="Chat question">
+            <a:extLst>
+              <a:ext uri="{FF2B5EF4-FFF2-40B4-BE49-F238E27FC236}">
+                <a16:creationId xmlns:a16="http://schemas.microsoft.com/office/drawing/2014/main" id="{1B4B8A22-F6FB-42D7-858B-BCB903107F96}"/>
+              </a:ext>
+            </a:extLst>
+          </p:cNvPr>
+          <p:cNvSpPr>
+            <a:spLocks noGrp="1"/>
+          </p:cNvSpPr>
+          <p:nvPr/>
+        </p:nvSpPr>
+        <p:spPr>
+          <a:xfrm>
+            <a:off x="9353550" y="2790825"/>
+            <a:ext cx="2428875" cy="1362075"/>
+          </a:xfrm>
+          <a:prstGeom prst="rect">
+            <a:avLst/>
+          </a:prstGeom>
+          <a:noFill/>
+          <a:ln w="0">
+            <a:noFill/>
+          </a:ln>
+        </p:spPr>
+        <p:txBody>
+          <a:bodyPr wrap="square" lIns="0" tIns="0" rIns="0" bIns="0">
+            <a:noAutofit/>
+          </a:bodyPr>
+          <a:lstStyle/>
+          <a:p>
+            <a:pPr>
+              <a:defRPr sz="2175" b="1">
+                <a:solidFill>
+                  <a:srgbClr val="FFFFFF"/>
+                </a:solidFill>
+                <a:latin typeface="Arial"/>
+                <a:ea typeface="Arial"/>
+                <a:cs typeface="Arial"/>
+              </a:defRPr>
+            </a:pPr>
+            <a:r>
+              <a:rPr sz="2175" b="1">
+                <a:solidFill>
+                  <a:srgbClr val="FFFFFF"/>
+                </a:solidFill>
+                <a:latin typeface="Arial"/>
+                <a:ea typeface="Arial"/>
+                <a:cs typeface="Arial"/>
+              </a:rPr>
+              <a:t>Email changes later.</a:t>
+            </a:r>
+          </a:p>
+          <a:p>
+            <a:pPr>
+              <a:defRPr sz="2175" b="1">
+                <a:solidFill>
+                  <a:srgbClr val="FFFFFF"/>
+                </a:solidFill>
+                <a:latin typeface="Arial"/>
+                <a:ea typeface="Arial"/>
+                <a:cs typeface="Arial"/>
+              </a:defRPr>
+            </a:pPr>
+            <a:r>
+              <a:rPr sz="2175" b="1">
+                <a:solidFill>
+                  <a:srgbClr val="FFFFFF"/>
+                </a:solidFill>
+                <a:latin typeface="Arial"/>
+                <a:ea typeface="Arial"/>
+                <a:cs typeface="Arial"/>
+              </a:rPr>
+              <a:t>Will Flash Fill update?</a:t>
+            </a:r>
+          </a:p>
+        </p:txBody>
+      </p:sp>
+      <p:sp>
+        <p:nvSpPr>
+          <p:cNvPr id="8" name="Chat choices">
+            <a:extLst>
+              <a:ext uri="{FF2B5EF4-FFF2-40B4-BE49-F238E27FC236}">
+                <a16:creationId xmlns:a16="http://schemas.microsoft.com/office/drawing/2014/main" id="{1F41F95F-56E1-4D79-B957-31D20F0E9364}"/>
+              </a:ext>
+            </a:extLst>
+          </p:cNvPr>
+          <p:cNvSpPr>
+            <a:spLocks noGrp="1"/>
+          </p:cNvSpPr>
+          <p:nvPr/>
+        </p:nvSpPr>
+        <p:spPr>
+          <a:xfrm>
+            <a:off x="9353550" y="4362450"/>
+            <a:ext cx="2428875" cy="1009650"/>
+          </a:xfrm>
+          <a:prstGeom prst="rect">
+            <a:avLst/>
+          </a:prstGeom>
+          <a:noFill/>
+          <a:ln w="0">
+            <a:noFill/>
+          </a:ln>
+        </p:spPr>
+        <p:txBody>
+          <a:bodyPr wrap="square" lIns="0" tIns="0" rIns="0" bIns="0">
+            <a:noAutofit/>
+          </a:bodyPr>
+          <a:lstStyle/>
+          <a:p>
+            <a:pPr>
+              <a:defRPr sz="1950" b="1">
+                <a:solidFill>
+                  <a:srgbClr val="FFFFFF"/>
+                </a:solidFill>
+                <a:latin typeface="Arial"/>
+                <a:ea typeface="Arial"/>
+                <a:cs typeface="Arial"/>
+              </a:defRPr>
+            </a:pPr>
+            <a:r>
+              <a:rPr sz="1950" b="1">
+                <a:solidFill>
+                  <a:srgbClr val="FFFFFF"/>
+                </a:solidFill>
+                <a:latin typeface="Arial"/>
+                <a:ea typeface="Arial"/>
+                <a:cs typeface="Arial"/>
+              </a:rPr>
+              <a:t>YES / NO</a:t>
+            </a:r>
+          </a:p>
+        </p:txBody>
+      </p:sp>
+      <p:sp>
+        <p:nvSpPr>
+          <p:cNvPr id="9" name="Chat instruction">
+            <a:extLst>
+              <a:ext uri="{FF2B5EF4-FFF2-40B4-BE49-F238E27FC236}">
+                <a16:creationId xmlns:a16="http://schemas.microsoft.com/office/drawing/2014/main" id="{CFCF5993-B7DA-4641-BD89-3E3878F1A9F5}"/>
+              </a:ext>
+            </a:extLst>
+          </p:cNvPr>
+          <p:cNvSpPr>
+            <a:spLocks noGrp="1"/>
+          </p:cNvSpPr>
+          <p:nvPr/>
+        </p:nvSpPr>
+        <p:spPr>
+          <a:xfrm>
+            <a:off x="9353550" y="5715000"/>
+            <a:ext cx="2428875" cy="609600"/>
+          </a:xfrm>
+          <a:prstGeom prst="rect">
+            <a:avLst/>
+          </a:prstGeom>
+          <a:noFill/>
+          <a:ln w="0">
+            <a:noFill/>
+          </a:ln>
+        </p:spPr>
+        <p:txBody>
+          <a:bodyPr wrap="square" lIns="0" tIns="0" rIns="0" bIns="0">
+            <a:noAutofit/>
+          </a:bodyPr>
+          <a:lstStyle/>
+          <a:p>
+            <a:pPr>
+              <a:defRPr sz="1500" b="0">
+                <a:solidFill>
+                  <a:srgbClr val="FFFFFF"/>
+                </a:solidFill>
+                <a:latin typeface="Arial"/>
+                <a:ea typeface="Arial"/>
+                <a:cs typeface="Arial"/>
+              </a:defRPr>
+            </a:pPr>
+            <a:r>
+              <a:rPr sz="1500" b="0">
+                <a:solidFill>
+                  <a:srgbClr val="FFFFFF"/>
+                </a:solidFill>
+                <a:latin typeface="Arial"/>
+                <a:ea typeface="Arial"/>
+                <a:cs typeface="Arial"/>
+              </a:rPr>
+              <a:t>Type one word</a:t>
+            </a:r>
+          </a:p>
+          <a:p>
+            <a:pPr>
+              <a:defRPr sz="1500" b="0">
+                <a:solidFill>
+                  <a:srgbClr val="FFFFFF"/>
+                </a:solidFill>
+                <a:latin typeface="Arial"/>
+                <a:ea typeface="Arial"/>
+                <a:cs typeface="Arial"/>
+              </a:defRPr>
+            </a:pPr>
+            <a:r>
+              <a:rPr sz="1500" b="0">
+                <a:solidFill>
+                  <a:srgbClr val="FFFFFF"/>
+                </a:solidFill>
+                <a:latin typeface="Arial"/>
+                <a:ea typeface="Arial"/>
+                <a:cs typeface="Arial"/>
+              </a:rPr>
+              <a:t>or a letter in chat.</a:t>
             </a:r>
           </a:p>
         </p:txBody>
       </p:sp>
     </p:spTree>
+    <p:extLst>
+      <p:ext uri="{BB962C8B-B14F-4D97-AF65-F5344CB8AC3E}">
+        <p14:creationId xmlns:p14="http://schemas.microsoft.com/office/powerpoint/2010/main" val="524443396"/>
+      </p:ext>
+    </p:extLst>
   </p:cSld>
   <p:clrMapOvr>
     <a:masterClrMapping/>
@@ -5398,7 +6449,7 @@
 </file>
 
 <file path=ppt/slides/slide6.xml><?xml version="1.0" encoding="utf-8"?>
-<p:sld xmlns:a="http://schemas.openxmlformats.org/drawingml/2006/main" xmlns:p="http://schemas.openxmlformats.org/presentationml/2006/main" xmlns:r="http://schemas.openxmlformats.org/officeDocument/2006/relationships">
+<p:sld xmlns:a="http://schemas.openxmlformats.org/drawingml/2006/main" xmlns:r="http://schemas.openxmlformats.org/officeDocument/2006/relationships" xmlns:p="http://schemas.openxmlformats.org/presentationml/2006/main">
   <p:cSld>
     <p:bg>
       <p:bgPr>
@@ -5414,11 +6465,26 @@
         <p:cNvGrpSpPr/>
         <p:nvPr/>
       </p:nvGrpSpPr>
-      <p:grpSpPr/>
-      <p:sp>
-        <p:nvSpPr>
-          <p:cNvPr id="2" name="Rectangle 1"/>
-          <p:cNvSpPr/>
+      <p:grpSpPr>
+        <a:xfrm>
+          <a:off x="0" y="0"/>
+          <a:ext cx="0" cy="0"/>
+          <a:chOff x="0" y="0"/>
+          <a:chExt cx="0" cy="0"/>
+        </a:xfrm>
+      </p:grpSpPr>
+      <p:sp>
+        <p:nvSpPr>
+          <p:cNvPr id="2" name="Rectangle 1">
+            <a:extLst>
+              <a:ext uri="{FF2B5EF4-FFF2-40B4-BE49-F238E27FC236}">
+                <a16:creationId xmlns:a16="http://schemas.microsoft.com/office/drawing/2014/main" id="{E556FB9C-E237-412C-B93C-046EFEBF3D8A}"/>
+              </a:ext>
+            </a:extLst>
+          </p:cNvPr>
+          <p:cNvSpPr>
+            <a:spLocks noGrp="1"/>
+          </p:cNvSpPr>
           <p:nvPr/>
         </p:nvSpPr>
         <p:spPr>
@@ -5435,7 +6501,6 @@
           <a:ln>
             <a:noFill/>
           </a:ln>
-          <a:effectLst/>
         </p:spPr>
         <p:style>
           <a:lnRef idx="1">
@@ -5452,17 +6517,28 @@
           </a:fontRef>
         </p:style>
         <p:txBody>
-          <a:bodyPr rtlCol="0" anchor="ctr"/>
-          <a:lstStyle/>
-          <a:p>
-            <a:pPr algn="ctr"/>
-          </a:p>
-        </p:txBody>
-      </p:sp>
-      <p:sp>
-        <p:nvSpPr>
-          <p:cNvPr id="3" name="TextBox 2"/>
-          <p:cNvSpPr txBox="1"/>
+          <a:bodyPr anchor="ctr"/>
+          <a:lstStyle/>
+          <a:p>
+            <a:pPr algn="ctr">
+              <a:buNone/>
+            </a:pPr>
+            <a:endParaRPr/>
+          </a:p>
+        </p:txBody>
+      </p:sp>
+      <p:sp>
+        <p:nvSpPr>
+          <p:cNvPr id="3" name="TextBox 2">
+            <a:extLst>
+              <a:ext uri="{FF2B5EF4-FFF2-40B4-BE49-F238E27FC236}">
+                <a16:creationId xmlns:a16="http://schemas.microsoft.com/office/drawing/2014/main" id="{D604CC45-53CD-4902-BF54-327E34ED00A7}"/>
+              </a:ext>
+            </a:extLst>
+          </p:cNvPr>
+          <p:cNvSpPr>
+            <a:spLocks noGrp="1"/>
+          </p:cNvSpPr>
           <p:nvPr/>
         </p:nvSpPr>
         <p:spPr>
@@ -5476,7 +6552,7 @@
           <a:noFill/>
         </p:spPr>
         <p:txBody>
-          <a:bodyPr wrap="square" lIns="0" rIns="0" tIns="0" bIns="0">
+          <a:bodyPr wrap="square" lIns="0" tIns="0" rIns="0" bIns="0">
             <a:spAutoFit/>
           </a:bodyPr>
           <a:lstStyle/>
@@ -5487,6 +6563,8 @@
                   <a:srgbClr val="FFFFFF"/>
                 </a:solidFill>
                 <a:latin typeface="Arial Black"/>
+                <a:ea typeface="Arial Black"/>
+                <a:cs typeface="Arial Black"/>
               </a:rPr>
               <a:t>LIVE</a:t>
             </a:r>
@@ -5498,6 +6576,8 @@
                   <a:srgbClr val="FFFFFF"/>
                 </a:solidFill>
                 <a:latin typeface="Arial Black"/>
+                <a:ea typeface="Arial Black"/>
+                <a:cs typeface="Arial Black"/>
               </a:rPr>
               <a:t>DEMO</a:t>
             </a:r>
@@ -5506,8 +6586,16 @@
       </p:sp>
       <p:sp>
         <p:nvSpPr>
-          <p:cNvPr id="4" name="TextBox 3"/>
-          <p:cNvSpPr txBox="1"/>
+          <p:cNvPr id="4" name="TextBox 3">
+            <a:extLst>
+              <a:ext uri="{FF2B5EF4-FFF2-40B4-BE49-F238E27FC236}">
+                <a16:creationId xmlns:a16="http://schemas.microsoft.com/office/drawing/2014/main" id="{996B19F4-824A-420D-B608-B6E9B80A6BB1}"/>
+              </a:ext>
+            </a:extLst>
+          </p:cNvPr>
+          <p:cNvSpPr>
+            <a:spLocks noGrp="1"/>
+          </p:cNvSpPr>
           <p:nvPr/>
         </p:nvSpPr>
         <p:spPr>
@@ -5521,7 +6609,7 @@
           <a:noFill/>
         </p:spPr>
         <p:txBody>
-          <a:bodyPr wrap="square" lIns="0" rIns="0" tIns="0" bIns="0">
+          <a:bodyPr wrap="square" lIns="0" tIns="0" rIns="0" bIns="0">
             <a:spAutoFit/>
           </a:bodyPr>
           <a:lstStyle/>
@@ -5532,6 +6620,8 @@
                   <a:srgbClr val="CF3338"/>
                 </a:solidFill>
                 <a:latin typeface="Arial Black"/>
+                <a:ea typeface="Arial Black"/>
+                <a:cs typeface="Arial Black"/>
               </a:rPr>
               <a:t>Live demo: Analyze Data</a:t>
             </a:r>
@@ -5541,6 +6631,7 @@
               <a:spcBef>
                 <a:spcPts val="300"/>
               </a:spcBef>
+              <a:buNone/>
             </a:pPr>
             <a:r>
               <a:rPr sz="1450" b="0" i="1">
@@ -5548,6 +6639,8 @@
                   <a:srgbClr val="707070"/>
                 </a:solidFill>
                 <a:latin typeface="Arial"/>
+                <a:ea typeface="Arial"/>
+                <a:cs typeface="Arial"/>
               </a:rPr>
               <a:t>Ask a question in plain English, get a PivotTable back.</a:t>
             </a:r>
@@ -5556,8 +6649,16 @@
       </p:sp>
       <p:sp>
         <p:nvSpPr>
-          <p:cNvPr id="5" name="Rounded Rectangle 4"/>
-          <p:cNvSpPr/>
+          <p:cNvPr id="5" name="Rounded Rectangle 4">
+            <a:extLst>
+              <a:ext uri="{FF2B5EF4-FFF2-40B4-BE49-F238E27FC236}">
+                <a16:creationId xmlns:a16="http://schemas.microsoft.com/office/drawing/2014/main" id="{30A25AE8-5B85-453B-91CE-DD09F659C3DC}"/>
+              </a:ext>
+            </a:extLst>
+          </p:cNvPr>
+          <p:cNvSpPr>
+            <a:spLocks noGrp="1"/>
+          </p:cNvSpPr>
           <p:nvPr/>
         </p:nvSpPr>
         <p:spPr>
@@ -5574,7 +6675,6 @@
           <a:ln>
             <a:noFill/>
           </a:ln>
-          <a:effectLst/>
         </p:spPr>
         <p:style>
           <a:lnRef idx="1">
@@ -5591,13 +6691,14 @@
           </a:fontRef>
         </p:style>
         <p:txBody>
-          <a:bodyPr rtlCol="0" anchor="t" wrap="square" lIns="256032" rIns="182880" tIns="182880" bIns="109728"/>
+          <a:bodyPr wrap="square" lIns="256032" tIns="182880" rIns="182880" bIns="109728" anchor="t"/>
           <a:lstStyle/>
           <a:p>
             <a:pPr algn="l">
               <a:spcAft>
                 <a:spcPts val="100"/>
               </a:spcAft>
+              <a:buNone/>
             </a:pPr>
             <a:r>
               <a:rPr sz="1300" b="0" i="0">
@@ -5605,6 +6706,8 @@
                   <a:srgbClr val="9EC57A"/>
                 </a:solidFill>
                 <a:latin typeface="Consolas"/>
+                <a:ea typeface="Consolas"/>
+                <a:cs typeface="Consolas"/>
               </a:rPr>
               <a:t># Ask Excel a question in plain English</a:t>
             </a:r>
@@ -5614,6 +6717,7 @@
               <a:spcAft>
                 <a:spcPts val="100"/>
               </a:spcAft>
+              <a:buNone/>
             </a:pPr>
             <a:r>
               <a:rPr sz="1300" b="0" i="0">
@@ -5621,6 +6725,8 @@
                   <a:srgbClr val="F5F5F5"/>
                 </a:solidFill>
                 <a:latin typeface="Consolas"/>
+                <a:ea typeface="Consolas"/>
+                <a:cs typeface="Consolas"/>
               </a:rPr>
               <a:t>1. Click anywhere in the data</a:t>
             </a:r>
@@ -5630,6 +6736,7 @@
               <a:spcAft>
                 <a:spcPts val="100"/>
               </a:spcAft>
+              <a:buNone/>
             </a:pPr>
             <a:r>
               <a:rPr sz="1300" b="0" i="0">
@@ -5637,6 +6744,8 @@
                   <a:srgbClr val="F5F5F5"/>
                 </a:solidFill>
                 <a:latin typeface="Consolas"/>
+                <a:ea typeface="Consolas"/>
+                <a:cs typeface="Consolas"/>
               </a:rPr>
               <a:t>2. Home tab &gt; Analyze Data</a:t>
             </a:r>
@@ -5646,6 +6755,7 @@
               <a:spcAft>
                 <a:spcPts val="100"/>
               </a:spcAft>
+              <a:buNone/>
             </a:pPr>
             <a:r>
               <a:rPr sz="1300" b="0" i="0">
@@ -5653,6 +6763,8 @@
                   <a:srgbClr val="F5F5F5"/>
                 </a:solidFill>
                 <a:latin typeface="Consolas"/>
+                <a:ea typeface="Consolas"/>
+                <a:cs typeface="Consolas"/>
               </a:rPr>
               <a:t>3. Type: total Amount by Region</a:t>
             </a:r>
@@ -5662,6 +6774,7 @@
               <a:spcAft>
                 <a:spcPts val="100"/>
               </a:spcAft>
+              <a:buNone/>
             </a:pPr>
             <a:r>
               <a:rPr sz="1300" b="0" i="0">
@@ -5669,6 +6782,8 @@
                   <a:srgbClr val="F5F5F5"/>
                 </a:solidFill>
                 <a:latin typeface="Consolas"/>
+                <a:ea typeface="Consolas"/>
+                <a:cs typeface="Consolas"/>
               </a:rPr>
               <a:t>4. Insert the suggested PivotTable</a:t>
             </a:r>
@@ -5678,6 +6793,7 @@
               <a:spcAft>
                 <a:spcPts val="100"/>
               </a:spcAft>
+              <a:buNone/>
             </a:pPr>
             <a:r>
               <a:rPr sz="1300" b="0" i="0">
@@ -5685,6 +6801,8 @@
                   <a:srgbClr val="F5F5F5"/>
                 </a:solidFill>
                 <a:latin typeface="Consolas"/>
+                <a:ea typeface="Consolas"/>
+                <a:cs typeface="Consolas"/>
               </a:rPr>
               <a:t>5. Fallback: Insert &gt; Recommended PivotTables</a:t>
             </a:r>
@@ -5693,8 +6811,16 @@
       </p:sp>
       <p:sp>
         <p:nvSpPr>
-          <p:cNvPr id="6" name="TextBox 5"/>
-          <p:cNvSpPr txBox="1"/>
+          <p:cNvPr id="6" name="TextBox 5">
+            <a:extLst>
+              <a:ext uri="{FF2B5EF4-FFF2-40B4-BE49-F238E27FC236}">
+                <a16:creationId xmlns:a16="http://schemas.microsoft.com/office/drawing/2014/main" id="{8EC849C3-924C-44CC-990E-1A980EFF7AEB}"/>
+              </a:ext>
+            </a:extLst>
+          </p:cNvPr>
+          <p:cNvSpPr>
+            <a:spLocks noGrp="1"/>
+          </p:cNvSpPr>
           <p:nvPr/>
         </p:nvSpPr>
         <p:spPr>
@@ -5708,7 +6834,7 @@
           <a:noFill/>
         </p:spPr>
         <p:txBody>
-          <a:bodyPr wrap="square" lIns="0" rIns="0" tIns="0" bIns="0">
+          <a:bodyPr wrap="square" lIns="0" tIns="0" rIns="0" bIns="0">
             <a:spAutoFit/>
           </a:bodyPr>
           <a:lstStyle/>
@@ -5719,13 +6845,237 @@
                   <a:srgbClr val="CF3338"/>
                 </a:solidFill>
                 <a:latin typeface="Arial"/>
-              </a:rPr>
-              <a:t>▶  A model reads your data and answers in English</a:t>
+                <a:ea typeface="Arial"/>
+                <a:cs typeface="Arial"/>
+              </a:rPr>
+              <a:t>• A model reads your data and answers in English</a:t>
+            </a:r>
+          </a:p>
+        </p:txBody>
+      </p:sp>
+      <p:sp>
+        <p:nvSpPr>
+          <p:cNvPr id="7" name="Chat question">
+            <a:extLst>
+              <a:ext uri="{FF2B5EF4-FFF2-40B4-BE49-F238E27FC236}">
+                <a16:creationId xmlns:a16="http://schemas.microsoft.com/office/drawing/2014/main" id="{D1A333FA-5CEC-4B54-B114-64F52D289B5B}"/>
+              </a:ext>
+            </a:extLst>
+          </p:cNvPr>
+          <p:cNvSpPr>
+            <a:spLocks noGrp="1"/>
+          </p:cNvSpPr>
+          <p:nvPr/>
+        </p:nvSpPr>
+        <p:spPr>
+          <a:xfrm>
+            <a:off x="9353550" y="2790825"/>
+            <a:ext cx="2428875" cy="1362075"/>
+          </a:xfrm>
+          <a:prstGeom prst="rect">
+            <a:avLst/>
+          </a:prstGeom>
+          <a:noFill/>
+          <a:ln w="0">
+            <a:noFill/>
+          </a:ln>
+        </p:spPr>
+        <p:txBody>
+          <a:bodyPr wrap="square" lIns="0" tIns="0" rIns="0" bIns="0">
+            <a:noAutofit/>
+          </a:bodyPr>
+          <a:lstStyle/>
+          <a:p>
+            <a:pPr>
+              <a:defRPr sz="2175" b="1">
+                <a:solidFill>
+                  <a:srgbClr val="FFFFFF"/>
+                </a:solidFill>
+                <a:latin typeface="Arial"/>
+                <a:ea typeface="Arial"/>
+                <a:cs typeface="Arial"/>
+              </a:defRPr>
+            </a:pPr>
+            <a:r>
+              <a:rPr sz="2175" b="1">
+                <a:solidFill>
+                  <a:srgbClr val="FFFFFF"/>
+                </a:solidFill>
+                <a:latin typeface="Arial"/>
+                <a:ea typeface="Arial"/>
+                <a:cs typeface="Arial"/>
+              </a:rPr>
+              <a:t>Before adding up sales:</a:t>
+            </a:r>
+          </a:p>
+          <a:p>
+            <a:pPr>
+              <a:defRPr sz="2175" b="1">
+                <a:solidFill>
+                  <a:srgbClr val="FFFFFF"/>
+                </a:solidFill>
+                <a:latin typeface="Arial"/>
+                <a:ea typeface="Arial"/>
+                <a:cs typeface="Arial"/>
+              </a:defRPr>
+            </a:pPr>
+            <a:r>
+              <a:rPr sz="2175" b="1">
+                <a:solidFill>
+                  <a:srgbClr val="FFFFFF"/>
+                </a:solidFill>
+                <a:latin typeface="Arial"/>
+                <a:ea typeface="Arial"/>
+                <a:cs typeface="Arial"/>
+              </a:rPr>
+              <a:t>keep the TOTAL rows?</a:t>
+            </a:r>
+          </a:p>
+        </p:txBody>
+      </p:sp>
+      <p:sp>
+        <p:nvSpPr>
+          <p:cNvPr id="8" name="Chat choices">
+            <a:extLst>
+              <a:ext uri="{FF2B5EF4-FFF2-40B4-BE49-F238E27FC236}">
+                <a16:creationId xmlns:a16="http://schemas.microsoft.com/office/drawing/2014/main" id="{8BD917FA-226F-4F9A-8C6E-8F68D165C0E6}"/>
+              </a:ext>
+            </a:extLst>
+          </p:cNvPr>
+          <p:cNvSpPr>
+            <a:spLocks noGrp="1"/>
+          </p:cNvSpPr>
+          <p:nvPr/>
+        </p:nvSpPr>
+        <p:spPr>
+          <a:xfrm>
+            <a:off x="9353550" y="4362450"/>
+            <a:ext cx="2428875" cy="1009650"/>
+          </a:xfrm>
+          <a:prstGeom prst="rect">
+            <a:avLst/>
+          </a:prstGeom>
+          <a:noFill/>
+          <a:ln w="0">
+            <a:noFill/>
+          </a:ln>
+        </p:spPr>
+        <p:txBody>
+          <a:bodyPr wrap="square" lIns="0" tIns="0" rIns="0" bIns="0">
+            <a:noAutofit/>
+          </a:bodyPr>
+          <a:lstStyle/>
+          <a:p>
+            <a:pPr>
+              <a:defRPr sz="1950" b="1">
+                <a:solidFill>
+                  <a:srgbClr val="FFFFFF"/>
+                </a:solidFill>
+                <a:latin typeface="Arial"/>
+                <a:ea typeface="Arial"/>
+                <a:cs typeface="Arial"/>
+              </a:defRPr>
+            </a:pPr>
+            <a:r>
+              <a:rPr sz="1950" b="1">
+                <a:solidFill>
+                  <a:srgbClr val="FFFFFF"/>
+                </a:solidFill>
+                <a:latin typeface="Arial"/>
+                <a:ea typeface="Arial"/>
+                <a:cs typeface="Arial"/>
+              </a:rPr>
+              <a:t>KEEP / REMOVE</a:t>
+            </a:r>
+          </a:p>
+        </p:txBody>
+      </p:sp>
+      <p:sp>
+        <p:nvSpPr>
+          <p:cNvPr id="9" name="Chat instruction">
+            <a:extLst>
+              <a:ext uri="{FF2B5EF4-FFF2-40B4-BE49-F238E27FC236}">
+                <a16:creationId xmlns:a16="http://schemas.microsoft.com/office/drawing/2014/main" id="{2C5568F1-1BDF-478A-BB37-95F6719BFC60}"/>
+              </a:ext>
+            </a:extLst>
+          </p:cNvPr>
+          <p:cNvSpPr>
+            <a:spLocks noGrp="1"/>
+          </p:cNvSpPr>
+          <p:nvPr/>
+        </p:nvSpPr>
+        <p:spPr>
+          <a:xfrm>
+            <a:off x="9353550" y="5715000"/>
+            <a:ext cx="2428875" cy="609600"/>
+          </a:xfrm>
+          <a:prstGeom prst="rect">
+            <a:avLst/>
+          </a:prstGeom>
+          <a:noFill/>
+          <a:ln w="0">
+            <a:noFill/>
+          </a:ln>
+        </p:spPr>
+        <p:txBody>
+          <a:bodyPr wrap="square" lIns="0" tIns="0" rIns="0" bIns="0">
+            <a:noAutofit/>
+          </a:bodyPr>
+          <a:lstStyle/>
+          <a:p>
+            <a:pPr>
+              <a:defRPr sz="1500" b="0">
+                <a:solidFill>
+                  <a:srgbClr val="FFFFFF"/>
+                </a:solidFill>
+                <a:latin typeface="Arial"/>
+                <a:ea typeface="Arial"/>
+                <a:cs typeface="Arial"/>
+              </a:defRPr>
+            </a:pPr>
+            <a:r>
+              <a:rPr sz="1500" b="0">
+                <a:solidFill>
+                  <a:srgbClr val="FFFFFF"/>
+                </a:solidFill>
+                <a:latin typeface="Arial"/>
+                <a:ea typeface="Arial"/>
+                <a:cs typeface="Arial"/>
+              </a:rPr>
+              <a:t>Type one word</a:t>
+            </a:r>
+          </a:p>
+          <a:p>
+            <a:pPr>
+              <a:defRPr sz="1500" b="0">
+                <a:solidFill>
+                  <a:srgbClr val="FFFFFF"/>
+                </a:solidFill>
+                <a:latin typeface="Arial"/>
+                <a:ea typeface="Arial"/>
+                <a:cs typeface="Arial"/>
+              </a:defRPr>
+            </a:pPr>
+            <a:r>
+              <a:rPr sz="1500" b="0">
+                <a:solidFill>
+                  <a:srgbClr val="FFFFFF"/>
+                </a:solidFill>
+                <a:latin typeface="Arial"/>
+                <a:ea typeface="Arial"/>
+                <a:cs typeface="Arial"/>
+              </a:rPr>
+              <a:t>or a letter in chat.</a:t>
             </a:r>
           </a:p>
         </p:txBody>
       </p:sp>
     </p:spTree>
+    <p:extLst>
+      <p:ext uri="{BB962C8B-B14F-4D97-AF65-F5344CB8AC3E}">
+        <p14:creationId xmlns:p14="http://schemas.microsoft.com/office/powerpoint/2010/main" val="1825479062"/>
+      </p:ext>
+    </p:extLst>
   </p:cSld>
   <p:clrMapOvr>
     <a:masterClrMapping/>
@@ -5734,7 +7084,7 @@
 </file>
 
 <file path=ppt/slides/slide7.xml><?xml version="1.0" encoding="utf-8"?>
-<p:sld xmlns:a="http://schemas.openxmlformats.org/drawingml/2006/main" xmlns:p="http://schemas.openxmlformats.org/presentationml/2006/main" xmlns:r="http://schemas.openxmlformats.org/officeDocument/2006/relationships">
+<p:sld xmlns:a="http://schemas.openxmlformats.org/drawingml/2006/main" xmlns:r="http://schemas.openxmlformats.org/officeDocument/2006/relationships" xmlns:p="http://schemas.openxmlformats.org/presentationml/2006/main">
   <p:cSld>
     <p:bg>
       <p:bgPr>
@@ -5750,17 +7100,32 @@
         <p:cNvGrpSpPr/>
         <p:nvPr/>
       </p:nvGrpSpPr>
-      <p:grpSpPr/>
-      <p:sp>
-        <p:nvSpPr>
-          <p:cNvPr id="2" name="TextBox 1"/>
-          <p:cNvSpPr txBox="1"/>
+      <p:grpSpPr>
+        <a:xfrm>
+          <a:off x="0" y="0"/>
+          <a:ext cx="0" cy="0"/>
+          <a:chOff x="0" y="0"/>
+          <a:chExt cx="0" cy="0"/>
+        </a:xfrm>
+      </p:grpSpPr>
+      <p:sp>
+        <p:nvSpPr>
+          <p:cNvPr id="2" name="TextBox 1">
+            <a:extLst>
+              <a:ext uri="{FF2B5EF4-FFF2-40B4-BE49-F238E27FC236}">
+                <a16:creationId xmlns:a16="http://schemas.microsoft.com/office/drawing/2014/main" id="{A3BA38CE-309B-4D79-B0A4-D46EEC0B7557}"/>
+              </a:ext>
+            </a:extLst>
+          </p:cNvPr>
+          <p:cNvSpPr>
+            <a:spLocks noGrp="1"/>
+          </p:cNvSpPr>
           <p:nvPr/>
         </p:nvSpPr>
         <p:spPr>
           <a:xfrm>
             <a:off x="640080" y="457200"/>
-            <a:ext cx="10881360" cy="1188720"/>
+            <a:ext cx="10881360" cy="743793"/>
           </a:xfrm>
           <a:prstGeom prst="rect">
             <a:avLst/>
@@ -5768,17 +7133,19 @@
           <a:noFill/>
         </p:spPr>
         <p:txBody>
-          <a:bodyPr wrap="square" lIns="0" rIns="0" tIns="0" bIns="0">
+          <a:bodyPr wrap="square" lIns="0" tIns="0" rIns="0" bIns="0">
             <a:spAutoFit/>
           </a:bodyPr>
           <a:lstStyle/>
           <a:p>
             <a:r>
-              <a:rPr sz="3000" b="1" i="0">
+              <a:rPr sz="3000" b="1" i="0" dirty="0">
                 <a:solidFill>
                   <a:srgbClr val="1F2120"/>
                 </a:solidFill>
                 <a:latin typeface="Arial Black"/>
+                <a:ea typeface="Arial Black"/>
+                <a:cs typeface="Arial Black"/>
               </a:rPr>
               <a:t>The honest moment</a:t>
             </a:r>
@@ -5788,23 +7155,56 @@
               <a:spcBef>
                 <a:spcPts val="400"/>
               </a:spcBef>
-            </a:pPr>
-            <a:r>
-              <a:rPr sz="1500" b="0" i="1">
+              <a:buNone/>
+            </a:pPr>
+            <a:r>
+              <a:rPr sz="1500" b="0" i="1" dirty="0">
                 <a:solidFill>
                   <a:srgbClr val="CF3338"/>
                 </a:solidFill>
                 <a:latin typeface="Arial"/>
-              </a:rPr>
-              <a:t>Why the answer was wrong, and why that is the real lesson</a:t>
-            </a:r>
-          </a:p>
-        </p:txBody>
-      </p:sp>
-      <p:sp>
-        <p:nvSpPr>
-          <p:cNvPr id="3" name="TextBox 2"/>
-          <p:cNvSpPr txBox="1"/>
+                <a:ea typeface="Arial"/>
+                <a:cs typeface="Arial"/>
+              </a:rPr>
+              <a:t>Why the answer was wrong</a:t>
+            </a:r>
+            <a:r>
+              <a:rPr lang="en-US" sz="1500" i="1" dirty="0">
+                <a:solidFill>
+                  <a:srgbClr val="CF3338"/>
+                </a:solidFill>
+                <a:latin typeface="Arial"/>
+                <a:ea typeface="Arial"/>
+                <a:cs typeface="Arial"/>
+              </a:rPr>
+              <a:t>… </a:t>
+            </a:r>
+            <a:r>
+              <a:rPr sz="1500" b="0" i="1" dirty="0">
+                <a:solidFill>
+                  <a:srgbClr val="CF3338"/>
+                </a:solidFill>
+                <a:latin typeface="Arial"/>
+                <a:ea typeface="Arial"/>
+                <a:cs typeface="Arial"/>
+              </a:rPr>
+              <a:t>and why that is the real lesson</a:t>
+            </a:r>
+          </a:p>
+        </p:txBody>
+      </p:sp>
+      <p:sp>
+        <p:nvSpPr>
+          <p:cNvPr id="3" name="TextBox 2">
+            <a:extLst>
+              <a:ext uri="{FF2B5EF4-FFF2-40B4-BE49-F238E27FC236}">
+                <a16:creationId xmlns:a16="http://schemas.microsoft.com/office/drawing/2014/main" id="{0CD7569F-ACF3-45AC-8D5A-392E8D75B3BC}"/>
+              </a:ext>
+            </a:extLst>
+          </p:cNvPr>
+          <p:cNvSpPr>
+            <a:spLocks noGrp="1"/>
+          </p:cNvSpPr>
           <p:nvPr/>
         </p:nvSpPr>
         <p:spPr>
@@ -5818,7 +7218,7 @@
           <a:noFill/>
         </p:spPr>
         <p:txBody>
-          <a:bodyPr wrap="square" lIns="0" rIns="0" tIns="0" bIns="0">
+          <a:bodyPr wrap="square" lIns="0" tIns="0" rIns="0" bIns="0">
             <a:spAutoFit/>
           </a:bodyPr>
           <a:lstStyle/>
@@ -5827,6 +7227,7 @@
               <a:spcAft>
                 <a:spcPts val="700"/>
               </a:spcAft>
+              <a:buNone/>
             </a:pPr>
             <a:r>
               <a:rPr sz="1200" b="1" i="0">
@@ -5834,8 +7235,10 @@
                   <a:srgbClr val="CF3338"/>
                 </a:solidFill>
                 <a:latin typeface="Arial"/>
-              </a:rPr>
-              <a:t>▶  </a:t>
+                <a:ea typeface="Arial"/>
+                <a:cs typeface="Arial"/>
+              </a:rPr>
+              <a:t>• </a:t>
             </a:r>
             <a:r>
               <a:rPr sz="1600" b="0" i="0">
@@ -5843,8 +7246,10 @@
                   <a:srgbClr val="1F2120"/>
                 </a:solidFill>
                 <a:latin typeface="Arial"/>
-              </a:rPr>
-              <a:t>Analyze Data just showed seven regions. Lakeshore has four.</a:t>
+                <a:ea typeface="Arial"/>
+                <a:cs typeface="Arial"/>
+              </a:rPr>
+              <a:t>Look for inconsistent region labels. Lakeshore has four intended regions.</a:t>
             </a:r>
           </a:p>
           <a:p>
@@ -5852,6 +7257,7 @@
               <a:spcAft>
                 <a:spcPts val="700"/>
               </a:spcAft>
+              <a:buNone/>
             </a:pPr>
             <a:r>
               <a:rPr sz="1200" b="1" i="0">
@@ -5859,8 +7265,10 @@
                   <a:srgbClr val="CF3338"/>
                 </a:solidFill>
                 <a:latin typeface="Arial"/>
-              </a:rPr>
-              <a:t>▶  </a:t>
+                <a:ea typeface="Arial"/>
+                <a:cs typeface="Arial"/>
+              </a:rPr>
+              <a:t>• </a:t>
             </a:r>
             <a:r>
               <a:rPr sz="1600" b="0" i="0">
@@ -5868,8 +7276,10 @@
                   <a:srgbClr val="1F2120"/>
                 </a:solidFill>
                 <a:latin typeface="Arial"/>
-              </a:rPr>
-              <a:t>MIDWEST, Midwest, and midwest-with-a-space read as three different places.</a:t>
+                <a:ea typeface="Arial"/>
+                <a:cs typeface="Arial"/>
+              </a:rPr>
+              <a:t>Extra spaces and inconsistent region labels can distort a summary.</a:t>
             </a:r>
           </a:p>
           <a:p>
@@ -5877,6 +7287,7 @@
               <a:spcAft>
                 <a:spcPts val="700"/>
               </a:spcAft>
+              <a:buNone/>
             </a:pPr>
             <a:r>
               <a:rPr sz="1200" b="1" i="0">
@@ -5884,8 +7295,10 @@
                   <a:srgbClr val="CF3338"/>
                 </a:solidFill>
                 <a:latin typeface="Arial"/>
-              </a:rPr>
-              <a:t>▶  </a:t>
+                <a:ea typeface="Arial"/>
+                <a:cs typeface="Arial"/>
+              </a:rPr>
+              <a:t>• </a:t>
             </a:r>
             <a:r>
               <a:rPr sz="1600" b="0" i="0">
@@ -5893,6 +7306,8 @@
                   <a:srgbClr val="1F2120"/>
                 </a:solidFill>
                 <a:latin typeface="Arial"/>
+                <a:ea typeface="Arial"/>
+                <a:cs typeface="Arial"/>
               </a:rPr>
               <a:t>The TOTAL rows quietly double-counted the answer.</a:t>
             </a:r>
@@ -5902,6 +7317,7 @@
               <a:spcAft>
                 <a:spcPts val="700"/>
               </a:spcAft>
+              <a:buNone/>
             </a:pPr>
             <a:r>
               <a:rPr sz="1200" b="1" i="0">
@@ -5909,8 +7325,10 @@
                   <a:srgbClr val="CF3338"/>
                 </a:solidFill>
                 <a:latin typeface="Arial"/>
-              </a:rPr>
-              <a:t>▶  </a:t>
+                <a:ea typeface="Arial"/>
+                <a:cs typeface="Arial"/>
+              </a:rPr>
+              <a:t>• </a:t>
             </a:r>
             <a:r>
               <a:rPr sz="1600" b="0" i="0">
@@ -5918,6 +7336,8 @@
                   <a:srgbClr val="1F2120"/>
                 </a:solidFill>
                 <a:latin typeface="Arial"/>
+                <a:ea typeface="Arial"/>
+                <a:cs typeface="Arial"/>
               </a:rPr>
               <a:t>The AI is only as good as the data underneath it. Hold that thought for Wednesday.</a:t>
             </a:r>
@@ -5927,6 +7347,7 @@
               <a:spcAft>
                 <a:spcPts val="700"/>
               </a:spcAft>
+              <a:buNone/>
             </a:pPr>
             <a:r>
               <a:rPr sz="1200" b="1" i="0">
@@ -5934,8 +7355,10 @@
                   <a:srgbClr val="CF3338"/>
                 </a:solidFill>
                 <a:latin typeface="Arial"/>
-              </a:rPr>
-              <a:t>▶  </a:t>
+                <a:ea typeface="Arial"/>
+                <a:cs typeface="Arial"/>
+              </a:rPr>
+              <a:t>• </a:t>
             </a:r>
             <a:r>
               <a:rPr sz="1600" b="0" i="0">
@@ -5943,6 +7366,8 @@
                   <a:srgbClr val="1F2120"/>
                 </a:solidFill>
                 <a:latin typeface="Arial"/>
+                <a:ea typeface="Arial"/>
+                <a:cs typeface="Arial"/>
               </a:rPr>
               <a:t>Also free: Copilot Chat in Excel, no purchased license. Licensing questions go to your IT team.</a:t>
             </a:r>
@@ -5950,6 +7375,11 @@
         </p:txBody>
       </p:sp>
     </p:spTree>
+    <p:extLst>
+      <p:ext uri="{BB962C8B-B14F-4D97-AF65-F5344CB8AC3E}">
+        <p14:creationId xmlns:p14="http://schemas.microsoft.com/office/powerpoint/2010/main" val="347495886"/>
+      </p:ext>
+    </p:extLst>
   </p:cSld>
   <p:clrMapOvr>
     <a:masterClrMapping/>
@@ -5958,7 +7388,7 @@
 </file>
 
 <file path=ppt/slides/slide8.xml><?xml version="1.0" encoding="utf-8"?>
-<p:sld xmlns:a="http://schemas.openxmlformats.org/drawingml/2006/main" xmlns:p="http://schemas.openxmlformats.org/presentationml/2006/main" xmlns:r="http://schemas.openxmlformats.org/officeDocument/2006/relationships">
+<p:sld xmlns:a="http://schemas.openxmlformats.org/drawingml/2006/main" xmlns:r="http://schemas.openxmlformats.org/officeDocument/2006/relationships" xmlns:p="http://schemas.openxmlformats.org/presentationml/2006/main">
   <p:cSld>
     <p:bg>
       <p:bgPr>
@@ -5974,11 +7404,26 @@
         <p:cNvGrpSpPr/>
         <p:nvPr/>
       </p:nvGrpSpPr>
-      <p:grpSpPr/>
-      <p:sp>
-        <p:nvSpPr>
-          <p:cNvPr id="2" name="TextBox 1"/>
-          <p:cNvSpPr txBox="1"/>
+      <p:grpSpPr>
+        <a:xfrm>
+          <a:off x="0" y="0"/>
+          <a:ext cx="0" cy="0"/>
+          <a:chOff x="0" y="0"/>
+          <a:chExt cx="0" cy="0"/>
+        </a:xfrm>
+      </p:grpSpPr>
+      <p:sp>
+        <p:nvSpPr>
+          <p:cNvPr id="2" name="TextBox 1">
+            <a:extLst>
+              <a:ext uri="{FF2B5EF4-FFF2-40B4-BE49-F238E27FC236}">
+                <a16:creationId xmlns:a16="http://schemas.microsoft.com/office/drawing/2014/main" id="{5AD0DFF7-7D0E-414C-A922-5B4B5F19EEDB}"/>
+              </a:ext>
+            </a:extLst>
+          </p:cNvPr>
+          <p:cNvSpPr>
+            <a:spLocks noGrp="1"/>
+          </p:cNvSpPr>
           <p:nvPr/>
         </p:nvSpPr>
         <p:spPr>
@@ -5992,7 +7437,7 @@
           <a:noFill/>
         </p:spPr>
         <p:txBody>
-          <a:bodyPr wrap="square" lIns="0" rIns="0" tIns="0" bIns="0">
+          <a:bodyPr wrap="square" lIns="0" tIns="0" rIns="0" bIns="0">
             <a:spAutoFit/>
           </a:bodyPr>
           <a:lstStyle/>
@@ -6003,6 +7448,8 @@
                   <a:srgbClr val="1F2120"/>
                 </a:solidFill>
                 <a:latin typeface="Arial Black"/>
+                <a:ea typeface="Arial Black"/>
+                <a:cs typeface="Arial Black"/>
               </a:rPr>
               <a:t>Do this at your desk today</a:t>
             </a:r>
@@ -6012,6 +7459,7 @@
               <a:spcBef>
                 <a:spcPts val="400"/>
               </a:spcBef>
+              <a:buNone/>
             </a:pPr>
             <a:r>
               <a:rPr sz="1500" b="0" i="1">
@@ -6019,22 +7467,32 @@
                   <a:srgbClr val="CF3338"/>
                 </a:solidFill>
                 <a:latin typeface="Arial"/>
-              </a:rPr>
-              <a:t>Ten minutes, tops</a:t>
-            </a:r>
-          </a:p>
-        </p:txBody>
-      </p:sp>
-      <p:sp>
-        <p:nvSpPr>
-          <p:cNvPr id="3" name="TextBox 2"/>
-          <p:cNvSpPr txBox="1"/>
+                <a:ea typeface="Arial"/>
+                <a:cs typeface="Arial"/>
+              </a:rPr>
+              <a:t>Choose one small win</a:t>
+            </a:r>
+          </a:p>
+        </p:txBody>
+      </p:sp>
+      <p:sp>
+        <p:nvSpPr>
+          <p:cNvPr id="3" name="TextBox 2">
+            <a:extLst>
+              <a:ext uri="{FF2B5EF4-FFF2-40B4-BE49-F238E27FC236}">
+                <a16:creationId xmlns:a16="http://schemas.microsoft.com/office/drawing/2014/main" id="{A51320F7-AA66-45F7-BF8B-1F235CA6B822}"/>
+              </a:ext>
+            </a:extLst>
+          </p:cNvPr>
+          <p:cNvSpPr>
+            <a:spLocks noGrp="1"/>
+          </p:cNvSpPr>
           <p:nvPr/>
         </p:nvSpPr>
         <p:spPr>
           <a:xfrm>
             <a:off x="640080" y="1783080"/>
-            <a:ext cx="10881360" cy="4846320"/>
+            <a:ext cx="10881360" cy="2409825"/>
           </a:xfrm>
           <a:prstGeom prst="rect">
             <a:avLst/>
@@ -6042,7 +7500,7 @@
           <a:noFill/>
         </p:spPr>
         <p:txBody>
-          <a:bodyPr wrap="square" lIns="0" rIns="0" tIns="0" bIns="0">
+          <a:bodyPr wrap="square" lIns="0" tIns="0" rIns="0" bIns="0">
             <a:spAutoFit/>
           </a:bodyPr>
           <a:lstStyle/>
@@ -6051,6 +7509,7 @@
               <a:spcAft>
                 <a:spcPts val="700"/>
               </a:spcAft>
+              <a:buNone/>
             </a:pPr>
             <a:r>
               <a:rPr sz="1200" b="1" i="0">
@@ -6058,8 +7517,10 @@
                   <a:srgbClr val="CF3338"/>
                 </a:solidFill>
                 <a:latin typeface="Arial"/>
-              </a:rPr>
-              <a:t>▶  </a:t>
+                <a:ea typeface="Arial"/>
+                <a:cs typeface="Arial"/>
+              </a:rPr>
+              <a:t>• </a:t>
             </a:r>
             <a:r>
               <a:rPr sz="1600" b="0" i="0">
@@ -6067,8 +7528,10 @@
                   <a:srgbClr val="1F2120"/>
                 </a:solidFill>
                 <a:latin typeface="Arial"/>
-              </a:rPr>
-              <a:t>Find one column you have been cleaning by hand and let Flash Fill do it: type one example, press Ctrl+E.</a:t>
+                <a:ea typeface="Arial"/>
+                <a:cs typeface="Arial"/>
+              </a:rPr>
+              <a:t>NAMES: Try Flash Fill on one email column. Type a correct example, then press Ctrl+E.</a:t>
             </a:r>
           </a:p>
           <a:p>
@@ -6076,6 +7539,7 @@
               <a:spcAft>
                 <a:spcPts val="700"/>
               </a:spcAft>
+              <a:buNone/>
             </a:pPr>
             <a:r>
               <a:rPr sz="1200" b="1" i="0">
@@ -6083,8 +7547,10 @@
                   <a:srgbClr val="CF3338"/>
                 </a:solidFill>
                 <a:latin typeface="Arial"/>
-              </a:rPr>
-              <a:t>▶  </a:t>
+                <a:ea typeface="Arial"/>
+                <a:cs typeface="Arial"/>
+              </a:rPr>
+              <a:t>• </a:t>
             </a:r>
             <a:r>
               <a:rPr sz="1600" b="0" i="0">
@@ -6092,8 +7558,10 @@
                   <a:srgbClr val="1F2120"/>
                 </a:solidFill>
                 <a:latin typeface="Arial"/>
-              </a:rPr>
-              <a:t>Open a real dataset and click Home &gt; Analyze Data. Ask it one question you actually care about.</a:t>
+                <a:ea typeface="Arial"/>
+                <a:cs typeface="Arial"/>
+              </a:rPr>
+              <a:t>TOTALS: Check one summary for subtotal rows or inconsistent region labels.</a:t>
             </a:r>
           </a:p>
           <a:p>
@@ -6101,6 +7569,7 @@
               <a:spcAft>
                 <a:spcPts val="700"/>
               </a:spcAft>
+              <a:buNone/>
             </a:pPr>
             <a:r>
               <a:rPr sz="1200" b="1" i="0">
@@ -6108,8 +7577,10 @@
                   <a:srgbClr val="CF3338"/>
                 </a:solidFill>
                 <a:latin typeface="Arial"/>
-              </a:rPr>
-              <a:t>▶  </a:t>
+                <a:ea typeface="Arial"/>
+                <a:cs typeface="Arial"/>
+              </a:rPr>
+              <a:t>• </a:t>
             </a:r>
             <a:r>
               <a:rPr sz="1600" b="0" i="0">
@@ -6117,13 +7588,230 @@
                   <a:srgbClr val="1F2120"/>
                 </a:solidFill>
                 <a:latin typeface="Arial"/>
-              </a:rPr>
-              <a:t>Note what it gets wrong. Bring that list tomorrow. The fix is the whole week.</a:t>
+                <a:ea typeface="Arial"/>
+                <a:cs typeface="Arial"/>
+              </a:rPr>
+              <a:t>Choose one. Check the result against the source.</a:t>
+            </a:r>
+          </a:p>
+        </p:txBody>
+      </p:sp>
+      <p:sp>
+        <p:nvSpPr>
+          <p:cNvPr id="4" name="Chat prompt panel">
+            <a:extLst>
+              <a:ext uri="{FF2B5EF4-FFF2-40B4-BE49-F238E27FC236}">
+                <a16:creationId xmlns:a16="http://schemas.microsoft.com/office/drawing/2014/main" id="{EFC76B53-DB15-4DDB-83BC-1D0C1A450AF0}"/>
+              </a:ext>
+            </a:extLst>
+          </p:cNvPr>
+          <p:cNvSpPr>
+            <a:spLocks noGrp="1"/>
+          </p:cNvSpPr>
+          <p:nvPr/>
+        </p:nvSpPr>
+        <p:spPr>
+          <a:xfrm>
+            <a:off x="638175" y="4476750"/>
+            <a:ext cx="10896600" cy="1352550"/>
+          </a:xfrm>
+          <a:prstGeom prst="rect">
+            <a:avLst/>
+          </a:prstGeom>
+          <a:solidFill>
+            <a:srgbClr val="1F2120"/>
+          </a:solidFill>
+          <a:ln w="0">
+            <a:noFill/>
+          </a:ln>
+        </p:spPr>
+        <p:txBody>
+          <a:bodyPr wrap="square" lIns="0" tIns="0" rIns="0" bIns="0">
+            <a:noAutofit/>
+          </a:bodyPr>
+          <a:lstStyle/>
+          <a:p>
+            <a:endParaRPr/>
+          </a:p>
+        </p:txBody>
+      </p:sp>
+      <p:sp>
+        <p:nvSpPr>
+          <p:cNvPr id="5" name="Chat question">
+            <a:extLst>
+              <a:ext uri="{FF2B5EF4-FFF2-40B4-BE49-F238E27FC236}">
+                <a16:creationId xmlns:a16="http://schemas.microsoft.com/office/drawing/2014/main" id="{9B3546D4-B488-4F79-9642-206AA61927B5}"/>
+              </a:ext>
+            </a:extLst>
+          </p:cNvPr>
+          <p:cNvSpPr>
+            <a:spLocks noGrp="1"/>
+          </p:cNvSpPr>
+          <p:nvPr/>
+        </p:nvSpPr>
+        <p:spPr>
+          <a:xfrm>
+            <a:off x="857250" y="4619625"/>
+            <a:ext cx="10429875" cy="381000"/>
+          </a:xfrm>
+          <a:prstGeom prst="rect">
+            <a:avLst/>
+          </a:prstGeom>
+          <a:noFill/>
+          <a:ln w="0">
+            <a:noFill/>
+          </a:ln>
+        </p:spPr>
+        <p:txBody>
+          <a:bodyPr wrap="square" lIns="0" tIns="0" rIns="0" bIns="0">
+            <a:noAutofit/>
+          </a:bodyPr>
+          <a:lstStyle/>
+          <a:p>
+            <a:pPr>
+              <a:defRPr sz="2100" b="1">
+                <a:solidFill>
+                  <a:srgbClr val="FFFFFF"/>
+                </a:solidFill>
+                <a:latin typeface="Arial"/>
+                <a:ea typeface="Arial"/>
+                <a:cs typeface="Arial"/>
+              </a:defRPr>
+            </a:pPr>
+            <a:r>
+              <a:rPr sz="2100" b="1">
+                <a:solidFill>
+                  <a:srgbClr val="FFFFFF"/>
+                </a:solidFill>
+                <a:latin typeface="Arial"/>
+                <a:ea typeface="Arial"/>
+                <a:cs typeface="Arial"/>
+              </a:rPr>
+              <a:t>Which will you try first?</a:t>
+            </a:r>
+          </a:p>
+        </p:txBody>
+      </p:sp>
+      <p:sp>
+        <p:nvSpPr>
+          <p:cNvPr id="6" name="Chat choices">
+            <a:extLst>
+              <a:ext uri="{FF2B5EF4-FFF2-40B4-BE49-F238E27FC236}">
+                <a16:creationId xmlns:a16="http://schemas.microsoft.com/office/drawing/2014/main" id="{20403A46-6D0A-417A-A732-BE6C1AD305D5}"/>
+              </a:ext>
+            </a:extLst>
+          </p:cNvPr>
+          <p:cNvSpPr>
+            <a:spLocks noGrp="1"/>
+          </p:cNvSpPr>
+          <p:nvPr/>
+        </p:nvSpPr>
+        <p:spPr>
+          <a:xfrm>
+            <a:off x="857250" y="5086350"/>
+            <a:ext cx="6858000" cy="419100"/>
+          </a:xfrm>
+          <a:prstGeom prst="rect">
+            <a:avLst/>
+          </a:prstGeom>
+          <a:noFill/>
+          <a:ln w="0">
+            <a:noFill/>
+          </a:ln>
+        </p:spPr>
+        <p:txBody>
+          <a:bodyPr wrap="square" lIns="0" tIns="0" rIns="0" bIns="0">
+            <a:noAutofit/>
+          </a:bodyPr>
+          <a:lstStyle/>
+          <a:p>
+            <a:pPr>
+              <a:defRPr sz="2400" b="1">
+                <a:solidFill>
+                  <a:srgbClr val="FFFFFF"/>
+                </a:solidFill>
+                <a:latin typeface="Arial"/>
+                <a:ea typeface="Arial"/>
+                <a:cs typeface="Arial"/>
+              </a:defRPr>
+            </a:pPr>
+            <a:r>
+              <a:rPr sz="2400" b="1">
+                <a:solidFill>
+                  <a:srgbClr val="FFFFFF"/>
+                </a:solidFill>
+                <a:latin typeface="Arial"/>
+                <a:ea typeface="Arial"/>
+                <a:cs typeface="Arial"/>
+              </a:rPr>
+              <a:t>NAMES / TOTALS</a:t>
+            </a:r>
+          </a:p>
+        </p:txBody>
+      </p:sp>
+      <p:sp>
+        <p:nvSpPr>
+          <p:cNvPr id="7" name="Chat instruction">
+            <a:extLst>
+              <a:ext uri="{FF2B5EF4-FFF2-40B4-BE49-F238E27FC236}">
+                <a16:creationId xmlns:a16="http://schemas.microsoft.com/office/drawing/2014/main" id="{3E275CDB-D728-4B93-AFC7-1E4569A421D0}"/>
+              </a:ext>
+            </a:extLst>
+          </p:cNvPr>
+          <p:cNvSpPr>
+            <a:spLocks noGrp="1"/>
+          </p:cNvSpPr>
+          <p:nvPr/>
+        </p:nvSpPr>
+        <p:spPr>
+          <a:xfrm>
+            <a:off x="8143875" y="5219700"/>
+            <a:ext cx="3048000" cy="400050"/>
+          </a:xfrm>
+          <a:prstGeom prst="rect">
+            <a:avLst/>
+          </a:prstGeom>
+          <a:noFill/>
+          <a:ln w="0">
+            <a:noFill/>
+          </a:ln>
+        </p:spPr>
+        <p:txBody>
+          <a:bodyPr wrap="square" lIns="0" tIns="0" rIns="0" bIns="0">
+            <a:noAutofit/>
+          </a:bodyPr>
+          <a:lstStyle/>
+          <a:p>
+            <a:pPr>
+              <a:defRPr sz="1425" b="0">
+                <a:solidFill>
+                  <a:srgbClr val="FFFFFF"/>
+                </a:solidFill>
+                <a:latin typeface="Arial"/>
+                <a:ea typeface="Arial"/>
+                <a:cs typeface="Arial"/>
+              </a:defRPr>
+            </a:pPr>
+            <a:r>
+              <a:rPr sz="1425" b="0">
+                <a:solidFill>
+                  <a:srgbClr val="FFFFFF"/>
+                </a:solidFill>
+                <a:latin typeface="Arial"/>
+                <a:ea typeface="Arial"/>
+                <a:cs typeface="Arial"/>
+              </a:rPr>
+              <a:t>Type one word in chat.</a:t>
             </a:r>
           </a:p>
         </p:txBody>
       </p:sp>
     </p:spTree>
+    <p:extLst>
+      <p:ext uri="{BB962C8B-B14F-4D97-AF65-F5344CB8AC3E}">
+        <p14:creationId xmlns:p14="http://schemas.microsoft.com/office/powerpoint/2010/main" val="1192235390"/>
+      </p:ext>
+    </p:extLst>
   </p:cSld>
   <p:clrMapOvr>
     <a:masterClrMapping/>
@@ -6132,7 +7820,7 @@
 </file>
 
 <file path=ppt/slides/slide9.xml><?xml version="1.0" encoding="utf-8"?>
-<p:sld xmlns:a="http://schemas.openxmlformats.org/drawingml/2006/main" xmlns:p="http://schemas.openxmlformats.org/presentationml/2006/main" xmlns:r="http://schemas.openxmlformats.org/officeDocument/2006/relationships">
+<p:sld xmlns:a="http://schemas.openxmlformats.org/drawingml/2006/main" xmlns:r="http://schemas.openxmlformats.org/officeDocument/2006/relationships" xmlns:p="http://schemas.openxmlformats.org/presentationml/2006/main">
   <p:cSld>
     <p:bg>
       <p:bgPr>
@@ -6148,11 +7836,26 @@
         <p:cNvGrpSpPr/>
         <p:nvPr/>
       </p:nvGrpSpPr>
-      <p:grpSpPr/>
-      <p:sp>
-        <p:nvSpPr>
-          <p:cNvPr id="2" name="TextBox 1"/>
-          <p:cNvSpPr txBox="1"/>
+      <p:grpSpPr>
+        <a:xfrm>
+          <a:off x="0" y="0"/>
+          <a:ext cx="0" cy="0"/>
+          <a:chOff x="0" y="0"/>
+          <a:chExt cx="0" cy="0"/>
+        </a:xfrm>
+      </p:grpSpPr>
+      <p:sp>
+        <p:nvSpPr>
+          <p:cNvPr id="2" name="TextBox 1">
+            <a:extLst>
+              <a:ext uri="{FF2B5EF4-FFF2-40B4-BE49-F238E27FC236}">
+                <a16:creationId xmlns:a16="http://schemas.microsoft.com/office/drawing/2014/main" id="{5AC550B3-0DD8-47F8-9554-28EEEEC9ECA0}"/>
+              </a:ext>
+            </a:extLst>
+          </p:cNvPr>
+          <p:cNvSpPr>
+            <a:spLocks noGrp="1"/>
+          </p:cNvSpPr>
           <p:nvPr/>
         </p:nvSpPr>
         <p:spPr>
@@ -6166,7 +7869,7 @@
           <a:noFill/>
         </p:spPr>
         <p:txBody>
-          <a:bodyPr wrap="square" lIns="0" rIns="0" tIns="0" bIns="0">
+          <a:bodyPr wrap="square" lIns="0" tIns="0" rIns="0" bIns="0">
             <a:spAutoFit/>
           </a:bodyPr>
           <a:lstStyle/>
@@ -6177,6 +7880,8 @@
                   <a:srgbClr val="FFFFFF"/>
                 </a:solidFill>
                 <a:latin typeface="Arial Black"/>
+                <a:ea typeface="Arial Black"/>
+                <a:cs typeface="Arial Black"/>
               </a:rPr>
               <a:t>TOMORROW</a:t>
             </a:r>
@@ -6186,6 +7891,7 @@
               <a:spcBef>
                 <a:spcPts val="800"/>
               </a:spcBef>
+              <a:buNone/>
             </a:pPr>
             <a:r>
               <a:rPr sz="3600" b="1" i="0">
@@ -6193,6 +7899,8 @@
                   <a:srgbClr val="FFFFFF"/>
                 </a:solidFill>
                 <a:latin typeface="Arial Black"/>
+                <a:ea typeface="Arial Black"/>
+                <a:cs typeface="Arial Black"/>
               </a:rPr>
               <a:t>Make your data AI-readable</a:t>
             </a:r>
@@ -6202,6 +7910,7 @@
               <a:spcBef>
                 <a:spcPts val="1400"/>
               </a:spcBef>
+              <a:buNone/>
             </a:pPr>
             <a:r>
               <a:rPr sz="1800" b="0" i="0">
@@ -6209,6 +7918,8 @@
                   <a:srgbClr val="FFFFFF"/>
                 </a:solidFill>
                 <a:latin typeface="Arial"/>
+                <a:ea typeface="Arial"/>
+                <a:cs typeface="Arial"/>
               </a:rPr>
               <a:t>The single highest-leverage prep move an analyst can make, and it costs nothing.</a:t>
             </a:r>
@@ -6216,6 +7927,11 @@
         </p:txBody>
       </p:sp>
     </p:spTree>
+    <p:extLst>
+      <p:ext uri="{BB962C8B-B14F-4D97-AF65-F5344CB8AC3E}">
+        <p14:creationId xmlns:p14="http://schemas.microsoft.com/office/powerpoint/2010/main" val="2027139157"/>
+      </p:ext>
+    </p:extLst>
   </p:cSld>
   <p:clrMapOvr>
     <a:masterClrMapping/>
@@ -6385,7 +8101,7 @@
         </a:gradFill>
       </a:fillStyleLst>
       <a:lnStyleLst>
-        <a:ln w="9525" cap="flat" cmpd="sng" algn="ctr">
+        <a:ln w="9525">
           <a:solidFill>
             <a:schemeClr val="phClr">
               <a:shade val="95000"/>
@@ -6394,13 +8110,13 @@
           </a:solidFill>
           <a:prstDash val="solid"/>
         </a:ln>
-        <a:ln w="25400" cap="flat" cmpd="sng" algn="ctr">
+        <a:ln w="25400">
           <a:solidFill>
             <a:schemeClr val="phClr"/>
           </a:solidFill>
           <a:prstDash val="solid"/>
         </a:ln>
-        <a:ln w="38100" cap="flat" cmpd="sng" algn="ctr">
+        <a:ln w="38100">
           <a:solidFill>
             <a:schemeClr val="phClr"/>
           </a:solidFill>
@@ -6434,17 +8150,6 @@
               </a:srgbClr>
             </a:outerShdw>
           </a:effectLst>
-          <a:scene3d>
-            <a:camera prst="orthographicFront">
-              <a:rot lat="0" lon="0" rev="0"/>
-            </a:camera>
-            <a:lightRig rig="threePt" dir="t">
-              <a:rot lat="0" lon="0" rev="1200000"/>
-            </a:lightRig>
-          </a:scene3d>
-          <a:sp3d>
-            <a:bevelT w="63500" h="25400"/>
-          </a:sp3d>
         </a:effectStyle>
       </a:effectStyleLst>
       <a:bgFillStyleLst>
@@ -6499,46 +8204,7 @@
       </a:bgFillStyleLst>
     </a:fmtScheme>
   </a:themeElements>
-  <a:objectDefaults>
-    <a:spDef>
-      <a:spPr/>
-      <a:bodyPr/>
-      <a:lstStyle/>
-      <a:style>
-        <a:lnRef idx="1">
-          <a:schemeClr val="accent1"/>
-        </a:lnRef>
-        <a:fillRef idx="3">
-          <a:schemeClr val="accent1"/>
-        </a:fillRef>
-        <a:effectRef idx="2">
-          <a:schemeClr val="accent1"/>
-        </a:effectRef>
-        <a:fontRef idx="minor">
-          <a:schemeClr val="lt1"/>
-        </a:fontRef>
-      </a:style>
-    </a:spDef>
-    <a:lnDef>
-      <a:spPr/>
-      <a:bodyPr/>
-      <a:lstStyle/>
-      <a:style>
-        <a:lnRef idx="2">
-          <a:schemeClr val="accent1"/>
-        </a:lnRef>
-        <a:fillRef idx="0">
-          <a:schemeClr val="accent1"/>
-        </a:fillRef>
-        <a:effectRef idx="1">
-          <a:schemeClr val="accent1"/>
-        </a:effectRef>
-        <a:fontRef idx="minor">
-          <a:schemeClr val="tx1"/>
-        </a:fontRef>
-      </a:style>
-    </a:lnDef>
-  </a:objectDefaults>
+  <a:objectDefaults/>
   <a:extraClrSchemeLst/>
 </a:theme>
 </file>
@@ -6705,7 +8371,7 @@
         </a:gradFill>
       </a:fillStyleLst>
       <a:lnStyleLst>
-        <a:ln w="9525" cap="flat" cmpd="sng" algn="ctr">
+        <a:ln w="9525">
           <a:solidFill>
             <a:schemeClr val="phClr">
               <a:shade val="95000"/>
@@ -6714,13 +8380,13 @@
           </a:solidFill>
           <a:prstDash val="solid"/>
         </a:ln>
-        <a:ln w="25400" cap="flat" cmpd="sng" algn="ctr">
+        <a:ln w="25400">
           <a:solidFill>
             <a:schemeClr val="phClr"/>
           </a:solidFill>
           <a:prstDash val="solid"/>
         </a:ln>
-        <a:ln w="38100" cap="flat" cmpd="sng" algn="ctr">
+        <a:ln w="38100">
           <a:solidFill>
             <a:schemeClr val="phClr"/>
           </a:solidFill>
@@ -6754,17 +8420,6 @@
               </a:srgbClr>
             </a:outerShdw>
           </a:effectLst>
-          <a:scene3d>
-            <a:camera prst="orthographicFront">
-              <a:rot lat="0" lon="0" rev="0"/>
-            </a:camera>
-            <a:lightRig rig="threePt" dir="t">
-              <a:rot lat="0" lon="0" rev="1200000"/>
-            </a:lightRig>
-          </a:scene3d>
-          <a:sp3d>
-            <a:bevelT w="63500" h="25400"/>
-          </a:sp3d>
         </a:effectStyle>
       </a:effectStyleLst>
       <a:bgFillStyleLst>
@@ -6819,46 +8474,7 @@
       </a:bgFillStyleLst>
     </a:fmtScheme>
   </a:themeElements>
-  <a:objectDefaults>
-    <a:spDef>
-      <a:spPr/>
-      <a:bodyPr/>
-      <a:lstStyle/>
-      <a:style>
-        <a:lnRef idx="1">
-          <a:schemeClr val="accent1"/>
-        </a:lnRef>
-        <a:fillRef idx="3">
-          <a:schemeClr val="accent1"/>
-        </a:fillRef>
-        <a:effectRef idx="2">
-          <a:schemeClr val="accent1"/>
-        </a:effectRef>
-        <a:fontRef idx="minor">
-          <a:schemeClr val="lt1"/>
-        </a:fontRef>
-      </a:style>
-    </a:spDef>
-    <a:lnDef>
-      <a:spPr/>
-      <a:bodyPr/>
-      <a:lstStyle/>
-      <a:style>
-        <a:lnRef idx="2">
-          <a:schemeClr val="accent1"/>
-        </a:lnRef>
-        <a:fillRef idx="0">
-          <a:schemeClr val="accent1"/>
-        </a:fillRef>
-        <a:effectRef idx="1">
-          <a:schemeClr val="accent1"/>
-        </a:effectRef>
-        <a:fontRef idx="minor">
-          <a:schemeClr val="tx1"/>
-        </a:fontRef>
-      </a:style>
-    </a:lnDef>
-  </a:objectDefaults>
+  <a:objectDefaults/>
   <a:extraClrSchemeLst/>
 </a:theme>
 </file>